--- a/외부AI_4종_벤치마크_비교.pptx
+++ b/외부AI_4종_벤치마크_비교.pptx
@@ -11,6 +11,8 @@
     <p:sldId id="259" r:id="rId10"/>
     <p:sldId id="260" r:id="rId11"/>
     <p:sldId id="261" r:id="rId12"/>
+    <p:sldId id="262" r:id="rId13"/>
+    <p:sldId id="263" r:id="rId14"/>
   </p:sldIdLst>
   <p:sldSz cx="12191695" cy="6858000" type="screen4x3"/>
   <p:notesSz cx="6858000" cy="9144000"/>
@@ -123,7 +125,7 @@
           <a:lstStyle/>
           <a:p>
             <a:pPr>
-              <a:defRPr sz="1300" b="1">
+              <a:defRPr sz="1200" b="1">
                 <a:solidFill>
                   <a:srgbClr val="142A4A"/>
                 </a:solidFill>
@@ -131,7 +133,351 @@
               </a:defRPr>
             </a:pPr>
             <a:r>
-              <a:t>Artificial Analysis Intelligence Index (높을수록 우수)</a:t>
+              <a:t>영역별 평균 점수 — 어디가 강한지 큰 그림 (%)</a:t>
+            </a:r>
+          </a:p>
+        </c:rich>
+      </c:tx>
+      <c:layout/>
+      <c:overlay val="0"/>
+    </c:title>
+    <c:autoTitleDeleted val="0"/>
+    <c:plotArea>
+      <c:barChart>
+        <c:barDir val="col"/>
+        <c:grouping val="clustered"/>
+        <c:ser>
+          <c:idx val="0"/>
+          <c:order val="0"/>
+          <c:tx>
+            <c:strRef>
+              <c:f>Sheet1!$B$1</c:f>
+              <c:strCache>
+                <c:ptCount val="1"/>
+                <c:pt idx="0">
+                  <c:v>Claude</c:v>
+                </c:pt>
+              </c:strCache>
+            </c:strRef>
+          </c:tx>
+          <c:spPr>
+            <a:solidFill>
+              <a:srgbClr val="1F6FB2"/>
+            </a:solidFill>
+            <a:ln>
+              <a:noFill/>
+            </a:ln>
+          </c:spPr>
+          <c:cat>
+            <c:strRef>
+              <c:f>Sheet1!$A$2:$A$3</c:f>
+              <c:strCache>
+                <c:ptCount val="2"/>
+                <c:pt idx="0">
+                  <c:v>코딩
+(평균)</c:v>
+                </c:pt>
+                <c:pt idx="1">
+                  <c:v>추론
+(평균)</c:v>
+                </c:pt>
+              </c:strCache>
+            </c:strRef>
+          </c:cat>
+          <c:val>
+            <c:numRef>
+              <c:f>Sheet1!$B$2:$B$3</c:f>
+              <c:numCache>
+                <c:formatCode>General</c:formatCode>
+                <c:ptCount val="2"/>
+                <c:pt idx="0">
+                  <c:v>82.5</c:v>
+                </c:pt>
+                <c:pt idx="1">
+                  <c:v>61.3</c:v>
+                </c:pt>
+              </c:numCache>
+            </c:numRef>
+          </c:val>
+        </c:ser>
+        <c:ser>
+          <c:idx val="1"/>
+          <c:order val="1"/>
+          <c:tx>
+            <c:strRef>
+              <c:f>Sheet1!$C$1</c:f>
+              <c:strCache>
+                <c:ptCount val="1"/>
+                <c:pt idx="0">
+                  <c:v>GPT</c:v>
+                </c:pt>
+              </c:strCache>
+            </c:strRef>
+          </c:tx>
+          <c:spPr>
+            <a:solidFill>
+              <a:srgbClr val="D4774A"/>
+            </a:solidFill>
+            <a:ln>
+              <a:noFill/>
+            </a:ln>
+          </c:spPr>
+          <c:cat>
+            <c:strRef>
+              <c:f>Sheet1!$A$2:$A$3</c:f>
+              <c:strCache>
+                <c:ptCount val="2"/>
+                <c:pt idx="0">
+                  <c:v>코딩
+(평균)</c:v>
+                </c:pt>
+                <c:pt idx="1">
+                  <c:v>추론
+(평균)</c:v>
+                </c:pt>
+              </c:strCache>
+            </c:strRef>
+          </c:cat>
+          <c:val>
+            <c:numRef>
+              <c:f>Sheet1!$C$2:$C$3</c:f>
+              <c:numCache>
+                <c:formatCode>General</c:formatCode>
+                <c:ptCount val="2"/>
+                <c:pt idx="0">
+                  <c:v>77.5</c:v>
+                </c:pt>
+                <c:pt idx="1">
+                  <c:v>55.5</c:v>
+                </c:pt>
+              </c:numCache>
+            </c:numRef>
+          </c:val>
+        </c:ser>
+        <c:ser>
+          <c:idx val="2"/>
+          <c:order val="2"/>
+          <c:tx>
+            <c:strRef>
+              <c:f>Sheet1!$D$1</c:f>
+              <c:strCache>
+                <c:ptCount val="1"/>
+                <c:pt idx="0">
+                  <c:v>Gemini</c:v>
+                </c:pt>
+              </c:strCache>
+            </c:strRef>
+          </c:tx>
+          <c:spPr>
+            <a:solidFill>
+              <a:srgbClr val="F27E2E"/>
+            </a:solidFill>
+            <a:ln>
+              <a:noFill/>
+            </a:ln>
+          </c:spPr>
+          <c:cat>
+            <c:strRef>
+              <c:f>Sheet1!$A$2:$A$3</c:f>
+              <c:strCache>
+                <c:ptCount val="2"/>
+                <c:pt idx="0">
+                  <c:v>코딩
+(평균)</c:v>
+                </c:pt>
+                <c:pt idx="1">
+                  <c:v>추론
+(평균)</c:v>
+                </c:pt>
+              </c:strCache>
+            </c:strRef>
+          </c:cat>
+          <c:val>
+            <c:numRef>
+              <c:f>Sheet1!$D$2:$D$3</c:f>
+              <c:numCache>
+                <c:formatCode>General</c:formatCode>
+                <c:ptCount val="2"/>
+                <c:pt idx="0">
+                  <c:v>75.0</c:v>
+                </c:pt>
+                <c:pt idx="1">
+                  <c:v>58.8</c:v>
+                </c:pt>
+              </c:numCache>
+            </c:numRef>
+          </c:val>
+        </c:ser>
+        <c:ser>
+          <c:idx val="3"/>
+          <c:order val="3"/>
+          <c:tx>
+            <c:strRef>
+              <c:f>Sheet1!$E$1</c:f>
+              <c:strCache>
+                <c:ptCount val="1"/>
+                <c:pt idx="0">
+                  <c:v>Grok</c:v>
+                </c:pt>
+              </c:strCache>
+            </c:strRef>
+          </c:tx>
+          <c:spPr>
+            <a:solidFill>
+              <a:srgbClr val="10A37A"/>
+            </a:solidFill>
+            <a:ln>
+              <a:noFill/>
+            </a:ln>
+          </c:spPr>
+          <c:cat>
+            <c:strRef>
+              <c:f>Sheet1!$A$2:$A$3</c:f>
+              <c:strCache>
+                <c:ptCount val="2"/>
+                <c:pt idx="0">
+                  <c:v>코딩
+(평균)</c:v>
+                </c:pt>
+                <c:pt idx="1">
+                  <c:v>추론
+(평균)</c:v>
+                </c:pt>
+              </c:strCache>
+            </c:strRef>
+          </c:cat>
+          <c:val>
+            <c:numRef>
+              <c:f>Sheet1!$E$2:$E$3</c:f>
+              <c:numCache>
+                <c:formatCode>General</c:formatCode>
+                <c:ptCount val="2"/>
+                <c:pt idx="0">
+                  <c:v>73.5</c:v>
+                </c:pt>
+                <c:pt idx="1">
+                  <c:v>52.4</c:v>
+                </c:pt>
+              </c:numCache>
+            </c:numRef>
+          </c:val>
+        </c:ser>
+        <c:axId val="-2068027336"/>
+        <c:axId val="-2113994440"/>
+      </c:barChart>
+      <c:catAx>
+        <c:axId val="-2068027336"/>
+        <c:scaling>
+          <c:orientation val="minMax"/>
+        </c:scaling>
+        <c:delete val="0"/>
+        <c:axPos val="b"/>
+        <c:majorTickMark val="out"/>
+        <c:minorTickMark val="none"/>
+        <c:tickLblPos val="nextTo"/>
+        <c:txPr>
+          <a:bodyPr/>
+          <a:lstStyle/>
+          <a:p>
+            <a:pPr>
+              <a:defRPr sz="900">
+                <a:latin typeface="Apple SD Gothic Neo"/>
+              </a:defRPr>
+            </a:pPr>
+          </a:p>
+        </c:txPr>
+        <c:crossAx val="-2113994440"/>
+        <c:crosses val="autoZero"/>
+        <c:auto val="1"/>
+        <c:lblAlgn val="ctr"/>
+        <c:lblOffset val="100"/>
+        <c:noMultiLvlLbl val="0"/>
+      </c:catAx>
+      <c:valAx>
+        <c:axId val="-2113994440"/>
+        <c:scaling>
+          <c:max val="100.0"/>
+          <c:min val="0.0"/>
+        </c:scaling>
+        <c:delete val="0"/>
+        <c:axPos val="l"/>
+        <c:majorGridlines/>
+        <c:majorTickMark val="out"/>
+        <c:minorTickMark val="none"/>
+        <c:tickLblPos val="nextTo"/>
+        <c:txPr>
+          <a:bodyPr/>
+          <a:lstStyle/>
+          <a:p>
+            <a:pPr>
+              <a:defRPr sz="900">
+                <a:latin typeface="Apple SD Gothic Neo"/>
+              </a:defRPr>
+            </a:pPr>
+          </a:p>
+        </c:txPr>
+        <c:crossAx val="-2068027336"/>
+        <c:crosses val="autoZero"/>
+      </c:valAx>
+    </c:plotArea>
+    <c:legend>
+      <c:legendPos val="b"/>
+      <c:overlay val="0"/>
+      <c:txPr>
+        <a:bodyPr/>
+        <a:lstStyle/>
+        <a:p>
+          <a:pPr>
+            <a:defRPr sz="850">
+              <a:latin typeface="Apple SD Gothic Neo"/>
+            </a:defRPr>
+          </a:pPr>
+        </a:p>
+      </c:txPr>
+    </c:legend>
+    <c:dispBlanksAs val="gap"/>
+  </c:chart>
+  <c:txPr>
+    <a:bodyPr/>
+    <a:lstStyle/>
+    <a:p>
+      <a:pPr>
+        <a:defRPr sz="1800"/>
+      </a:pPr>
+      <a:endParaRPr lang="en-US"/>
+    </a:p>
+  </c:txPr>
+  <c:externalData r:id="rId1">
+    <c:autoUpdate val="0"/>
+  </c:externalData>
+</c:chartSpace>
+</file>
+
+<file path=ppt/charts/chart2.xml><?xml version="1.0" encoding="utf-8"?>
+<c:chartSpace xmlns:c="http://schemas.openxmlformats.org/drawingml/2006/chart" xmlns:a="http://schemas.openxmlformats.org/drawingml/2006/main" xmlns:r="http://schemas.openxmlformats.org/officeDocument/2006/relationships">
+  <c:date1904 val="0"/>
+  <c:chart>
+    <c:title>
+      <c:tx>
+        <c:rich>
+          <a:bodyPr/>
+          <a:lstStyle/>
+          <a:p>
+            <a:pPr>
+              <a:defRPr sz="1150" b="1">
+                <a:solidFill>
+                  <a:srgbClr val="142A4A"/>
+                </a:solidFill>
+                <a:latin typeface="Apple SD Gothic Neo"/>
+              </a:defRPr>
+            </a:pPr>
+            <a:r>
+              <a:t>SWE-bench Verified (보통 난이도)</a:t>
+            </a:r>
+          </a:p>
+          <a:p>
+            <a:r>
+              <a:t>버그 고치기 성공률</a:t>
             </a:r>
           </a:p>
         </c:rich>
@@ -231,23 +577,23 @@
                 <c:formatCode>General</c:formatCode>
                 <c:ptCount val="4"/>
                 <c:pt idx="0">
-                  <c:v>61</c:v>
+                  <c:v>88.6</c:v>
                 </c:pt>
                 <c:pt idx="1">
-                  <c:v>60</c:v>
+                  <c:v>75.0</c:v>
                 </c:pt>
                 <c:pt idx="2">
-                  <c:v>57</c:v>
+                  <c:v>80.6</c:v>
                 </c:pt>
                 <c:pt idx="3">
-                  <c:v>53</c:v>
+                  <c:v>73.5</c:v>
                 </c:pt>
               </c:numCache>
             </c:numRef>
           </c:val>
         </c:ser>
         <c:dLbls>
-          <c:numFmt formatCode="0&quot;&quot;" sourceLinked="0"/>
+          <c:numFmt formatCode="0&quot;%&quot;" sourceLinked="0"/>
           <c:txPr>
             <a:bodyPr/>
             <a:lstStyle/>
@@ -275,7 +621,7 @@
         <c:axId val="-2068027336"/>
         <c:scaling>
           <c:orientation val="maxMin"/>
-          <c:max val="70.0"/>
+          <c:max val="100.0"/>
           <c:min val="0.0"/>
         </c:scaling>
         <c:delete val="0"/>
@@ -344,7 +690,7 @@
 </c:chartSpace>
 </file>
 
-<file path=ppt/charts/chart2.xml><?xml version="1.0" encoding="utf-8"?>
+<file path=ppt/charts/chart3.xml><?xml version="1.0" encoding="utf-8"?>
 <c:chartSpace xmlns:c="http://schemas.openxmlformats.org/drawingml/2006/chart" xmlns:a="http://schemas.openxmlformats.org/drawingml/2006/main" xmlns:r="http://schemas.openxmlformats.org/officeDocument/2006/relationships">
   <c:date1904 val="0"/>
   <c:chart>
@@ -355,7 +701,7 @@
           <a:lstStyle/>
           <a:p>
             <a:pPr>
-              <a:defRPr sz="1300" b="1">
+              <a:defRPr sz="1150" b="1">
                 <a:solidFill>
                   <a:srgbClr val="142A4A"/>
                 </a:solidFill>
@@ -363,7 +709,672 @@
               </a:defRPr>
             </a:pPr>
             <a:r>
-              <a:t>API 출력 단가 ($/1M tokens, 낮을수록 저렴)</a:t>
+              <a:t>SWE-bench Pro (어려운 버전)</a:t>
+            </a:r>
+          </a:p>
+          <a:p>
+            <a:r>
+              <a:t>Grok 미공개 — 3종만 비교</a:t>
+            </a:r>
+          </a:p>
+        </c:rich>
+      </c:tx>
+      <c:layout/>
+      <c:overlay val="0"/>
+    </c:title>
+    <c:autoTitleDeleted val="0"/>
+    <c:plotArea>
+      <c:barChart>
+        <c:barDir val="bar"/>
+        <c:grouping val="clustered"/>
+        <c:ser>
+          <c:idx val="0"/>
+          <c:order val="0"/>
+          <c:tx>
+            <c:strRef>
+              <c:f>Sheet1!$B$1</c:f>
+              <c:strCache>
+                <c:ptCount val="1"/>
+                <c:pt idx="0">
+                  <c:v/>
+                </c:pt>
+              </c:strCache>
+            </c:strRef>
+          </c:tx>
+          <c:dPt>
+            <c:idx val="0"/>
+            <c:spPr>
+              <a:solidFill>
+                <a:srgbClr val="D4774A"/>
+              </a:solidFill>
+              <a:ln>
+                <a:noFill/>
+              </a:ln>
+            </c:spPr>
+          </c:dPt>
+          <c:dPt>
+            <c:idx val="1"/>
+            <c:spPr>
+              <a:solidFill>
+                <a:srgbClr val="10A37A"/>
+              </a:solidFill>
+              <a:ln>
+                <a:noFill/>
+              </a:ln>
+            </c:spPr>
+          </c:dPt>
+          <c:dPt>
+            <c:idx val="2"/>
+            <c:spPr>
+              <a:solidFill>
+                <a:srgbClr val="4285F4"/>
+              </a:solidFill>
+              <a:ln>
+                <a:noFill/>
+              </a:ln>
+            </c:spPr>
+          </c:dPt>
+          <c:cat>
+            <c:strRef>
+              <c:f>Sheet1!$A$2:$A$4</c:f>
+              <c:strCache>
+                <c:ptCount val="3"/>
+                <c:pt idx="0">
+                  <c:v>Claude
+Opus 4.8</c:v>
+                </c:pt>
+                <c:pt idx="1">
+                  <c:v>GPT-5.5</c:v>
+                </c:pt>
+                <c:pt idx="2">
+                  <c:v>Gemini
+3.1 Pro</c:v>
+                </c:pt>
+              </c:strCache>
+            </c:strRef>
+          </c:cat>
+          <c:val>
+            <c:numRef>
+              <c:f>Sheet1!$B$2:$B$4</c:f>
+              <c:numCache>
+                <c:formatCode>General</c:formatCode>
+                <c:ptCount val="3"/>
+                <c:pt idx="0">
+                  <c:v>69.2</c:v>
+                </c:pt>
+                <c:pt idx="1">
+                  <c:v>58.6</c:v>
+                </c:pt>
+                <c:pt idx="2">
+                  <c:v>54.2</c:v>
+                </c:pt>
+              </c:numCache>
+            </c:numRef>
+          </c:val>
+        </c:ser>
+        <c:dLbls>
+          <c:numFmt formatCode="0&quot;%&quot;" sourceLinked="0"/>
+          <c:txPr>
+            <a:bodyPr/>
+            <a:lstStyle/>
+            <a:p>
+              <a:pPr>
+                <a:defRPr sz="900">
+                  <a:latin typeface="Apple SD Gothic Neo"/>
+                </a:defRPr>
+              </a:pPr>
+            </a:p>
+          </c:txPr>
+          <c:dLblPos val="outEnd"/>
+          <c:showLegendKey val="0"/>
+          <c:showVal val="1"/>
+          <c:showCatName val="0"/>
+          <c:showSerName val="0"/>
+          <c:showPercent val="0"/>
+          <c:showBubbleSize val="0"/>
+          <c:showLeaderLines val="1"/>
+        </c:dLbls>
+        <c:axId val="-2068027336"/>
+        <c:axId val="-2113994440"/>
+      </c:barChart>
+      <c:catAx>
+        <c:axId val="-2068027336"/>
+        <c:scaling>
+          <c:orientation val="maxMin"/>
+          <c:max val="100.0"/>
+          <c:min val="0.0"/>
+        </c:scaling>
+        <c:delete val="0"/>
+        <c:axPos val="l"/>
+        <c:majorGridlines/>
+        <c:majorTickMark val="out"/>
+        <c:minorTickMark val="none"/>
+        <c:tickLblPos val="nextTo"/>
+        <c:txPr>
+          <a:bodyPr/>
+          <a:lstStyle/>
+          <a:p>
+            <a:pPr>
+              <a:defRPr sz="900">
+                <a:latin typeface="Apple SD Gothic Neo"/>
+              </a:defRPr>
+            </a:pPr>
+          </a:p>
+        </c:txPr>
+        <c:crossAx val="-2113994440"/>
+        <c:crosses val="autoZero"/>
+        <c:auto val="1"/>
+        <c:lblAlgn val="ctr"/>
+        <c:lblOffset val="100"/>
+        <c:noMultiLvlLbl val="0"/>
+      </c:catAx>
+      <c:valAx>
+        <c:axId val="-2113994440"/>
+        <c:scaling/>
+        <c:delete val="0"/>
+        <c:axPos val="b"/>
+        <c:majorGridlines/>
+        <c:majorTickMark val="out"/>
+        <c:minorTickMark val="none"/>
+        <c:tickLblPos val="nextTo"/>
+        <c:txPr>
+          <a:bodyPr/>
+          <a:lstStyle/>
+          <a:p>
+            <a:pPr>
+              <a:defRPr sz="900">
+                <a:latin typeface="Apple SD Gothic Neo"/>
+              </a:defRPr>
+            </a:pPr>
+          </a:p>
+        </c:txPr>
+        <c:crossAx val="-2068027336"/>
+        <c:crosses val="autoZero"/>
+      </c:valAx>
+    </c:plotArea>
+    <c:dispBlanksAs val="gap"/>
+  </c:chart>
+  <c:txPr>
+    <a:bodyPr/>
+    <a:lstStyle/>
+    <a:p>
+      <a:pPr>
+        <a:defRPr sz="1800"/>
+      </a:pPr>
+      <a:endParaRPr lang="en-US"/>
+    </a:p>
+  </c:txPr>
+  <c:externalData r:id="rId1">
+    <c:autoUpdate val="0"/>
+  </c:externalData>
+</c:chartSpace>
+</file>
+
+<file path=ppt/charts/chart4.xml><?xml version="1.0" encoding="utf-8"?>
+<c:chartSpace xmlns:c="http://schemas.openxmlformats.org/drawingml/2006/chart" xmlns:a="http://schemas.openxmlformats.org/drawingml/2006/main" xmlns:r="http://schemas.openxmlformats.org/officeDocument/2006/relationships">
+  <c:date1904 val="0"/>
+  <c:chart>
+    <c:title>
+      <c:tx>
+        <c:rich>
+          <a:bodyPr/>
+          <a:lstStyle/>
+          <a:p>
+            <a:pPr>
+              <a:defRPr sz="1150" b="1">
+                <a:solidFill>
+                  <a:srgbClr val="142A4A"/>
+                </a:solidFill>
+                <a:latin typeface="Apple SD Gothic Neo"/>
+              </a:defRPr>
+            </a:pPr>
+            <a:r>
+              <a:t>Terminal-Bench 2.1 (터미널·명령어)</a:t>
+            </a:r>
+          </a:p>
+          <a:p>
+            <a:r>
+              <a:t>긴 명령 작업 성공률</a:t>
+            </a:r>
+          </a:p>
+        </c:rich>
+      </c:tx>
+      <c:layout/>
+      <c:overlay val="0"/>
+    </c:title>
+    <c:autoTitleDeleted val="0"/>
+    <c:plotArea>
+      <c:barChart>
+        <c:barDir val="bar"/>
+        <c:grouping val="clustered"/>
+        <c:ser>
+          <c:idx val="0"/>
+          <c:order val="0"/>
+          <c:tx>
+            <c:strRef>
+              <c:f>Sheet1!$B$1</c:f>
+              <c:strCache>
+                <c:ptCount val="1"/>
+                <c:pt idx="0">
+                  <c:v/>
+                </c:pt>
+              </c:strCache>
+            </c:strRef>
+          </c:tx>
+          <c:dPt>
+            <c:idx val="0"/>
+            <c:spPr>
+              <a:solidFill>
+                <a:srgbClr val="D4774A"/>
+              </a:solidFill>
+              <a:ln>
+                <a:noFill/>
+              </a:ln>
+            </c:spPr>
+          </c:dPt>
+          <c:dPt>
+            <c:idx val="1"/>
+            <c:spPr>
+              <a:solidFill>
+                <a:srgbClr val="10A37A"/>
+              </a:solidFill>
+              <a:ln>
+                <a:noFill/>
+              </a:ln>
+            </c:spPr>
+          </c:dPt>
+          <c:dPt>
+            <c:idx val="2"/>
+            <c:spPr>
+              <a:solidFill>
+                <a:srgbClr val="4285F4"/>
+              </a:solidFill>
+              <a:ln>
+                <a:noFill/>
+              </a:ln>
+            </c:spPr>
+          </c:dPt>
+          <c:cat>
+            <c:strRef>
+              <c:f>Sheet1!$A$2:$A$4</c:f>
+              <c:strCache>
+                <c:ptCount val="3"/>
+                <c:pt idx="0">
+                  <c:v>Claude
+Opus 4.8</c:v>
+                </c:pt>
+                <c:pt idx="1">
+                  <c:v>GPT-5.5</c:v>
+                </c:pt>
+                <c:pt idx="2">
+                  <c:v>Gemini
+3.1 Pro</c:v>
+                </c:pt>
+              </c:strCache>
+            </c:strRef>
+          </c:cat>
+          <c:val>
+            <c:numRef>
+              <c:f>Sheet1!$B$2:$B$4</c:f>
+              <c:numCache>
+                <c:formatCode>General</c:formatCode>
+                <c:ptCount val="3"/>
+                <c:pt idx="0">
+                  <c:v>74.6</c:v>
+                </c:pt>
+                <c:pt idx="1">
+                  <c:v>78.2</c:v>
+                </c:pt>
+                <c:pt idx="2">
+                  <c:v>70.3</c:v>
+                </c:pt>
+              </c:numCache>
+            </c:numRef>
+          </c:val>
+        </c:ser>
+        <c:dLbls>
+          <c:numFmt formatCode="0&quot;%&quot;" sourceLinked="0"/>
+          <c:txPr>
+            <a:bodyPr/>
+            <a:lstStyle/>
+            <a:p>
+              <a:pPr>
+                <a:defRPr sz="900">
+                  <a:latin typeface="Apple SD Gothic Neo"/>
+                </a:defRPr>
+              </a:pPr>
+            </a:p>
+          </c:txPr>
+          <c:dLblPos val="outEnd"/>
+          <c:showLegendKey val="0"/>
+          <c:showVal val="1"/>
+          <c:showCatName val="0"/>
+          <c:showSerName val="0"/>
+          <c:showPercent val="0"/>
+          <c:showBubbleSize val="0"/>
+          <c:showLeaderLines val="1"/>
+        </c:dLbls>
+        <c:axId val="-2068027336"/>
+        <c:axId val="-2113994440"/>
+      </c:barChart>
+      <c:catAx>
+        <c:axId val="-2068027336"/>
+        <c:scaling>
+          <c:orientation val="maxMin"/>
+          <c:max val="100.0"/>
+          <c:min val="0.0"/>
+        </c:scaling>
+        <c:delete val="0"/>
+        <c:axPos val="l"/>
+        <c:majorGridlines/>
+        <c:majorTickMark val="out"/>
+        <c:minorTickMark val="none"/>
+        <c:tickLblPos val="nextTo"/>
+        <c:txPr>
+          <a:bodyPr/>
+          <a:lstStyle/>
+          <a:p>
+            <a:pPr>
+              <a:defRPr sz="900">
+                <a:latin typeface="Apple SD Gothic Neo"/>
+              </a:defRPr>
+            </a:pPr>
+          </a:p>
+        </c:txPr>
+        <c:crossAx val="-2113994440"/>
+        <c:crosses val="autoZero"/>
+        <c:auto val="1"/>
+        <c:lblAlgn val="ctr"/>
+        <c:lblOffset val="100"/>
+        <c:noMultiLvlLbl val="0"/>
+      </c:catAx>
+      <c:valAx>
+        <c:axId val="-2113994440"/>
+        <c:scaling/>
+        <c:delete val="0"/>
+        <c:axPos val="b"/>
+        <c:majorGridlines/>
+        <c:majorTickMark val="out"/>
+        <c:minorTickMark val="none"/>
+        <c:tickLblPos val="nextTo"/>
+        <c:txPr>
+          <a:bodyPr/>
+          <a:lstStyle/>
+          <a:p>
+            <a:pPr>
+              <a:defRPr sz="900">
+                <a:latin typeface="Apple SD Gothic Neo"/>
+              </a:defRPr>
+            </a:pPr>
+          </a:p>
+        </c:txPr>
+        <c:crossAx val="-2068027336"/>
+        <c:crosses val="autoZero"/>
+      </c:valAx>
+    </c:plotArea>
+    <c:dispBlanksAs val="gap"/>
+  </c:chart>
+  <c:txPr>
+    <a:bodyPr/>
+    <a:lstStyle/>
+    <a:p>
+      <a:pPr>
+        <a:defRPr sz="1800"/>
+      </a:pPr>
+      <a:endParaRPr lang="en-US"/>
+    </a:p>
+  </c:txPr>
+  <c:externalData r:id="rId1">
+    <c:autoUpdate val="0"/>
+  </c:externalData>
+</c:chartSpace>
+</file>
+
+<file path=ppt/charts/chart5.xml><?xml version="1.0" encoding="utf-8"?>
+<c:chartSpace xmlns:c="http://schemas.openxmlformats.org/drawingml/2006/chart" xmlns:a="http://schemas.openxmlformats.org/drawingml/2006/main" xmlns:r="http://schemas.openxmlformats.org/officeDocument/2006/relationships">
+  <c:date1904 val="0"/>
+  <c:chart>
+    <c:title>
+      <c:tx>
+        <c:rich>
+          <a:bodyPr/>
+          <a:lstStyle/>
+          <a:p>
+            <a:pPr>
+              <a:defRPr sz="1150" b="1">
+                <a:solidFill>
+                  <a:srgbClr val="142A4A"/>
+                </a:solidFill>
+                <a:latin typeface="Apple SD Gothic Neo"/>
+              </a:defRPr>
+            </a:pPr>
+            <a:r>
+              <a:t>OSWorld-Verified (PC 직접 조작)</a:t>
+            </a:r>
+          </a:p>
+          <a:p>
+            <a:r>
+              <a:t>Gemini·Grok * 근사치</a:t>
+            </a:r>
+          </a:p>
+        </c:rich>
+      </c:tx>
+      <c:layout/>
+      <c:overlay val="0"/>
+    </c:title>
+    <c:autoTitleDeleted val="0"/>
+    <c:plotArea>
+      <c:barChart>
+        <c:barDir val="bar"/>
+        <c:grouping val="clustered"/>
+        <c:ser>
+          <c:idx val="0"/>
+          <c:order val="0"/>
+          <c:tx>
+            <c:strRef>
+              <c:f>Sheet1!$B$1</c:f>
+              <c:strCache>
+                <c:ptCount val="1"/>
+                <c:pt idx="0">
+                  <c:v/>
+                </c:pt>
+              </c:strCache>
+            </c:strRef>
+          </c:tx>
+          <c:dPt>
+            <c:idx val="0"/>
+            <c:spPr>
+              <a:solidFill>
+                <a:srgbClr val="D4774A"/>
+              </a:solidFill>
+              <a:ln>
+                <a:noFill/>
+              </a:ln>
+            </c:spPr>
+          </c:dPt>
+          <c:dPt>
+            <c:idx val="1"/>
+            <c:spPr>
+              <a:solidFill>
+                <a:srgbClr val="10A37A"/>
+              </a:solidFill>
+              <a:ln>
+                <a:noFill/>
+              </a:ln>
+            </c:spPr>
+          </c:dPt>
+          <c:dPt>
+            <c:idx val="2"/>
+            <c:spPr>
+              <a:solidFill>
+                <a:srgbClr val="4285F4"/>
+              </a:solidFill>
+              <a:ln>
+                <a:noFill/>
+              </a:ln>
+            </c:spPr>
+          </c:dPt>
+          <c:cat>
+            <c:strRef>
+              <c:f>Sheet1!$A$2:$A$4</c:f>
+              <c:strCache>
+                <c:ptCount val="3"/>
+                <c:pt idx="0">
+                  <c:v>Claude
+Opus 4.8</c:v>
+                </c:pt>
+                <c:pt idx="1">
+                  <c:v>GPT-5.5</c:v>
+                </c:pt>
+                <c:pt idx="2">
+                  <c:v>Gemini
+3.1 Pro</c:v>
+                </c:pt>
+              </c:strCache>
+            </c:strRef>
+          </c:cat>
+          <c:val>
+            <c:numRef>
+              <c:f>Sheet1!$B$2:$B$4</c:f>
+              <c:numCache>
+                <c:formatCode>General</c:formatCode>
+                <c:ptCount val="3"/>
+                <c:pt idx="0">
+                  <c:v>83.4</c:v>
+                </c:pt>
+                <c:pt idx="1">
+                  <c:v>78.7</c:v>
+                </c:pt>
+                <c:pt idx="2">
+                  <c:v>75.0</c:v>
+                </c:pt>
+              </c:numCache>
+            </c:numRef>
+          </c:val>
+        </c:ser>
+        <c:dLbls>
+          <c:numFmt formatCode="0&quot;%&quot;" sourceLinked="0"/>
+          <c:txPr>
+            <a:bodyPr/>
+            <a:lstStyle/>
+            <a:p>
+              <a:pPr>
+                <a:defRPr sz="900">
+                  <a:latin typeface="Apple SD Gothic Neo"/>
+                </a:defRPr>
+              </a:pPr>
+            </a:p>
+          </c:txPr>
+          <c:dLblPos val="outEnd"/>
+          <c:showLegendKey val="0"/>
+          <c:showVal val="1"/>
+          <c:showCatName val="0"/>
+          <c:showSerName val="0"/>
+          <c:showPercent val="0"/>
+          <c:showBubbleSize val="0"/>
+          <c:showLeaderLines val="1"/>
+        </c:dLbls>
+        <c:axId val="-2068027336"/>
+        <c:axId val="-2113994440"/>
+      </c:barChart>
+      <c:catAx>
+        <c:axId val="-2068027336"/>
+        <c:scaling>
+          <c:orientation val="maxMin"/>
+          <c:max val="100.0"/>
+          <c:min val="0.0"/>
+        </c:scaling>
+        <c:delete val="0"/>
+        <c:axPos val="l"/>
+        <c:majorGridlines/>
+        <c:majorTickMark val="out"/>
+        <c:minorTickMark val="none"/>
+        <c:tickLblPos val="nextTo"/>
+        <c:txPr>
+          <a:bodyPr/>
+          <a:lstStyle/>
+          <a:p>
+            <a:pPr>
+              <a:defRPr sz="900">
+                <a:latin typeface="Apple SD Gothic Neo"/>
+              </a:defRPr>
+            </a:pPr>
+          </a:p>
+        </c:txPr>
+        <c:crossAx val="-2113994440"/>
+        <c:crosses val="autoZero"/>
+        <c:auto val="1"/>
+        <c:lblAlgn val="ctr"/>
+        <c:lblOffset val="100"/>
+        <c:noMultiLvlLbl val="0"/>
+      </c:catAx>
+      <c:valAx>
+        <c:axId val="-2113994440"/>
+        <c:scaling/>
+        <c:delete val="0"/>
+        <c:axPos val="b"/>
+        <c:majorGridlines/>
+        <c:majorTickMark val="out"/>
+        <c:minorTickMark val="none"/>
+        <c:tickLblPos val="nextTo"/>
+        <c:txPr>
+          <a:bodyPr/>
+          <a:lstStyle/>
+          <a:p>
+            <a:pPr>
+              <a:defRPr sz="900">
+                <a:latin typeface="Apple SD Gothic Neo"/>
+              </a:defRPr>
+            </a:pPr>
+          </a:p>
+        </c:txPr>
+        <c:crossAx val="-2068027336"/>
+        <c:crosses val="autoZero"/>
+      </c:valAx>
+    </c:plotArea>
+    <c:dispBlanksAs val="gap"/>
+  </c:chart>
+  <c:txPr>
+    <a:bodyPr/>
+    <a:lstStyle/>
+    <a:p>
+      <a:pPr>
+        <a:defRPr sz="1800"/>
+      </a:pPr>
+      <a:endParaRPr lang="en-US"/>
+    </a:p>
+  </c:txPr>
+  <c:externalData r:id="rId1">
+    <c:autoUpdate val="0"/>
+  </c:externalData>
+</c:chartSpace>
+</file>
+
+<file path=ppt/charts/chart6.xml><?xml version="1.0" encoding="utf-8"?>
+<c:chartSpace xmlns:c="http://schemas.openxmlformats.org/drawingml/2006/chart" xmlns:a="http://schemas.openxmlformats.org/drawingml/2006/main" xmlns:r="http://schemas.openxmlformats.org/officeDocument/2006/relationships">
+  <c:date1904 val="0"/>
+  <c:chart>
+    <c:title>
+      <c:tx>
+        <c:rich>
+          <a:bodyPr/>
+          <a:lstStyle/>
+          <a:p>
+            <a:pPr>
+              <a:defRPr sz="1150" b="1">
+                <a:solidFill>
+                  <a:srgbClr val="142A4A"/>
+                </a:solidFill>
+                <a:latin typeface="Apple SD Gothic Neo"/>
+              </a:defRPr>
+            </a:pPr>
+            <a:r>
+              <a:t>GPQA Diamond (대학원 과학 퀴즈)</a:t>
+            </a:r>
+          </a:p>
+          <a:p>
+            <a:r>
+              <a:t>정답률</a:t>
             </a:r>
           </a:p>
         </c:rich>
@@ -463,23 +1474,23 @@
                 <c:formatCode>General</c:formatCode>
                 <c:ptCount val="4"/>
                 <c:pt idx="0">
-                  <c:v>25</c:v>
+                  <c:v>93.6</c:v>
                 </c:pt>
                 <c:pt idx="1">
-                  <c:v>30</c:v>
+                  <c:v>92.0</c:v>
                 </c:pt>
                 <c:pt idx="2">
-                  <c:v>12</c:v>
+                  <c:v>94.3</c:v>
                 </c:pt>
                 <c:pt idx="3">
-                  <c:v>2.5</c:v>
+                  <c:v>88.0</c:v>
                 </c:pt>
               </c:numCache>
             </c:numRef>
           </c:val>
         </c:ser>
         <c:dLbls>
-          <c:numFmt formatCode="0&quot;&quot;" sourceLinked="0"/>
+          <c:numFmt formatCode="0&quot;%&quot;" sourceLinked="0"/>
           <c:txPr>
             <a:bodyPr/>
             <a:lstStyle/>
@@ -507,7 +1518,7 @@
         <c:axId val="-2068027336"/>
         <c:scaling>
           <c:orientation val="maxMin"/>
-          <c:max val="35.0"/>
+          <c:max val="100.0"/>
           <c:min val="0.0"/>
         </c:scaling>
         <c:delete val="0"/>
@@ -576,7 +1587,7 @@
 </c:chartSpace>
 </file>
 
-<file path=ppt/charts/chart3.xml><?xml version="1.0" encoding="utf-8"?>
+<file path=ppt/charts/chart7.xml><?xml version="1.0" encoding="utf-8"?>
 <c:chartSpace xmlns:c="http://schemas.openxmlformats.org/drawingml/2006/chart" xmlns:a="http://schemas.openxmlformats.org/drawingml/2006/main" xmlns:r="http://schemas.openxmlformats.org/officeDocument/2006/relationships">
   <c:date1904 val="0"/>
   <c:chart>
@@ -587,7 +1598,7 @@
           <a:lstStyle/>
           <a:p>
             <a:pPr>
-              <a:defRPr sz="1300" b="1">
+              <a:defRPr sz="1150" b="1">
                 <a:solidFill>
                   <a:srgbClr val="142A4A"/>
                 </a:solidFill>
@@ -595,583 +1606,12 @@
               </a:defRPr>
             </a:pPr>
             <a:r>
-              <a:t>코딩 벤치마크 점수 (%)</a:t>
-            </a:r>
-          </a:p>
-        </c:rich>
-      </c:tx>
-      <c:layout/>
-      <c:overlay val="0"/>
-    </c:title>
-    <c:autoTitleDeleted val="0"/>
-    <c:plotArea>
-      <c:barChart>
-        <c:barDir val="col"/>
-        <c:grouping val="clustered"/>
-        <c:ser>
-          <c:idx val="0"/>
-          <c:order val="0"/>
-          <c:tx>
-            <c:strRef>
-              <c:f>Sheet1!$B$1</c:f>
-              <c:strCache>
-                <c:ptCount val="1"/>
-                <c:pt idx="0">
-                  <c:v>SWE-bench Verified</c:v>
-                </c:pt>
-              </c:strCache>
-            </c:strRef>
-          </c:tx>
-          <c:spPr>
-            <a:solidFill>
-              <a:srgbClr val="D4774A"/>
-            </a:solidFill>
-            <a:ln>
-              <a:noFill/>
-            </a:ln>
-          </c:spPr>
-          <c:cat>
-            <c:strRef>
-              <c:f>Sheet1!$A$2:$A$5</c:f>
-              <c:strCache>
-                <c:ptCount val="4"/>
-                <c:pt idx="0">
-                  <c:v>Claude
-Opus 4.8</c:v>
-                </c:pt>
-                <c:pt idx="1">
-                  <c:v>GPT-5.5</c:v>
-                </c:pt>
-                <c:pt idx="2">
-                  <c:v>Gemini
-3.1 Pro</c:v>
-                </c:pt>
-                <c:pt idx="3">
-                  <c:v>Grok 4.3</c:v>
-                </c:pt>
-              </c:strCache>
-            </c:strRef>
-          </c:cat>
-          <c:val>
-            <c:numRef>
-              <c:f>Sheet1!$B$2:$B$5</c:f>
-              <c:numCache>
-                <c:formatCode>General</c:formatCode>
-                <c:ptCount val="4"/>
-                <c:pt idx="0">
-                  <c:v>88.6</c:v>
-                </c:pt>
-                <c:pt idx="1">
-                  <c:v>75.0</c:v>
-                </c:pt>
-                <c:pt idx="2">
-                  <c:v>80.6</c:v>
-                </c:pt>
-                <c:pt idx="3">
-                  <c:v>73.5</c:v>
-                </c:pt>
-              </c:numCache>
-            </c:numRef>
-          </c:val>
-        </c:ser>
-        <c:ser>
-          <c:idx val="1"/>
-          <c:order val="1"/>
-          <c:tx>
-            <c:strRef>
-              <c:f>Sheet1!$C$1</c:f>
-              <c:strCache>
-                <c:ptCount val="1"/>
-                <c:pt idx="0">
-                  <c:v>SWE-bench Pro</c:v>
-                </c:pt>
-              </c:strCache>
-            </c:strRef>
-          </c:tx>
-          <c:spPr>
-            <a:solidFill>
-              <a:srgbClr val="10A37A"/>
-            </a:solidFill>
-            <a:ln>
-              <a:noFill/>
-            </a:ln>
-          </c:spPr>
-          <c:cat>
-            <c:strRef>
-              <c:f>Sheet1!$A$2:$A$5</c:f>
-              <c:strCache>
-                <c:ptCount val="4"/>
-                <c:pt idx="0">
-                  <c:v>Claude
-Opus 4.8</c:v>
-                </c:pt>
-                <c:pt idx="1">
-                  <c:v>GPT-5.5</c:v>
-                </c:pt>
-                <c:pt idx="2">
-                  <c:v>Gemini
-3.1 Pro</c:v>
-                </c:pt>
-                <c:pt idx="3">
-                  <c:v>Grok 4.3</c:v>
-                </c:pt>
-              </c:strCache>
-            </c:strRef>
-          </c:cat>
-          <c:val>
-            <c:numRef>
-              <c:f>Sheet1!$C$2:$C$5</c:f>
-              <c:numCache>
-                <c:formatCode>General</c:formatCode>
-                <c:ptCount val="4"/>
-                <c:pt idx="0">
-                  <c:v>69.2</c:v>
-                </c:pt>
-                <c:pt idx="1">
-                  <c:v>58.6</c:v>
-                </c:pt>
-                <c:pt idx="2">
-                  <c:v>54.2</c:v>
-                </c:pt>
-                <c:pt idx="3">
-                  <c:v>0</c:v>
-                </c:pt>
-              </c:numCache>
-            </c:numRef>
-          </c:val>
-        </c:ser>
-        <c:ser>
-          <c:idx val="2"/>
-          <c:order val="2"/>
-          <c:tx>
-            <c:strRef>
-              <c:f>Sheet1!$D$1</c:f>
-              <c:strCache>
-                <c:ptCount val="1"/>
-                <c:pt idx="0">
-                  <c:v>Terminal-Bench 2.x</c:v>
-                </c:pt>
-              </c:strCache>
-            </c:strRef>
-          </c:tx>
-          <c:spPr>
-            <a:solidFill>
-              <a:srgbClr val="4285F4"/>
-            </a:solidFill>
-            <a:ln>
-              <a:noFill/>
-            </a:ln>
-          </c:spPr>
-          <c:cat>
-            <c:strRef>
-              <c:f>Sheet1!$A$2:$A$5</c:f>
-              <c:strCache>
-                <c:ptCount val="4"/>
-                <c:pt idx="0">
-                  <c:v>Claude
-Opus 4.8</c:v>
-                </c:pt>
-                <c:pt idx="1">
-                  <c:v>GPT-5.5</c:v>
-                </c:pt>
-                <c:pt idx="2">
-                  <c:v>Gemini
-3.1 Pro</c:v>
-                </c:pt>
-                <c:pt idx="3">
-                  <c:v>Grok 4.3</c:v>
-                </c:pt>
-              </c:strCache>
-            </c:strRef>
-          </c:cat>
-          <c:val>
-            <c:numRef>
-              <c:f>Sheet1!$D$2:$D$5</c:f>
-              <c:numCache>
-                <c:formatCode>General</c:formatCode>
-                <c:ptCount val="4"/>
-                <c:pt idx="0">
-                  <c:v>69.0</c:v>
-                </c:pt>
-                <c:pt idx="1">
-                  <c:v>78.2</c:v>
-                </c:pt>
-                <c:pt idx="2">
-                  <c:v>68.5</c:v>
-                </c:pt>
-                <c:pt idx="3">
-                  <c:v>0</c:v>
-                </c:pt>
-              </c:numCache>
-            </c:numRef>
-          </c:val>
-        </c:ser>
-        <c:axId val="-2068027336"/>
-        <c:axId val="-2113994440"/>
-      </c:barChart>
-      <c:catAx>
-        <c:axId val="-2068027336"/>
-        <c:scaling>
-          <c:orientation val="minMax"/>
-        </c:scaling>
-        <c:delete val="0"/>
-        <c:axPos val="b"/>
-        <c:majorTickMark val="out"/>
-        <c:minorTickMark val="none"/>
-        <c:tickLblPos val="nextTo"/>
-        <c:txPr>
-          <a:bodyPr/>
-          <a:lstStyle/>
-          <a:p>
-            <a:pPr>
-              <a:defRPr sz="900">
-                <a:latin typeface="Apple SD Gothic Neo"/>
-              </a:defRPr>
-            </a:pPr>
-          </a:p>
-        </c:txPr>
-        <c:crossAx val="-2113994440"/>
-        <c:crosses val="autoZero"/>
-        <c:auto val="1"/>
-        <c:lblAlgn val="ctr"/>
-        <c:lblOffset val="100"/>
-        <c:noMultiLvlLbl val="0"/>
-      </c:catAx>
-      <c:valAx>
-        <c:axId val="-2113994440"/>
-        <c:scaling>
-          <c:max val="100.0"/>
-          <c:min val="0.0"/>
-        </c:scaling>
-        <c:delete val="0"/>
-        <c:axPos val="l"/>
-        <c:majorGridlines/>
-        <c:majorTickMark val="out"/>
-        <c:minorTickMark val="none"/>
-        <c:tickLblPos val="nextTo"/>
-        <c:txPr>
-          <a:bodyPr/>
-          <a:lstStyle/>
-          <a:p>
-            <a:pPr>
-              <a:defRPr sz="900">
-                <a:latin typeface="Apple SD Gothic Neo"/>
-              </a:defRPr>
-            </a:pPr>
-          </a:p>
-        </c:txPr>
-        <c:crossAx val="-2068027336"/>
-        <c:crosses val="autoZero"/>
-      </c:valAx>
-    </c:plotArea>
-    <c:legend>
-      <c:legendPos val="b"/>
-      <c:overlay val="0"/>
-      <c:txPr>
-        <a:bodyPr/>
-        <a:lstStyle/>
-        <a:p>
-          <a:pPr>
-            <a:defRPr sz="900">
-              <a:latin typeface="Apple SD Gothic Neo"/>
-            </a:defRPr>
-          </a:pPr>
-        </a:p>
-      </c:txPr>
-    </c:legend>
-    <c:dispBlanksAs val="gap"/>
-  </c:chart>
-  <c:txPr>
-    <a:bodyPr/>
-    <a:lstStyle/>
-    <a:p>
-      <a:pPr>
-        <a:defRPr sz="1800"/>
-      </a:pPr>
-      <a:endParaRPr lang="en-US"/>
-    </a:p>
-  </c:txPr>
-  <c:externalData r:id="rId1">
-    <c:autoUpdate val="0"/>
-  </c:externalData>
-</c:chartSpace>
-</file>
-
-<file path=ppt/charts/chart4.xml><?xml version="1.0" encoding="utf-8"?>
-<c:chartSpace xmlns:c="http://schemas.openxmlformats.org/drawingml/2006/chart" xmlns:a="http://schemas.openxmlformats.org/drawingml/2006/main" xmlns:r="http://schemas.openxmlformats.org/officeDocument/2006/relationships">
-  <c:date1904 val="0"/>
-  <c:chart>
-    <c:title>
-      <c:tx>
-        <c:rich>
-          <a:bodyPr/>
-          <a:lstStyle/>
-          <a:p>
-            <a:pPr>
-              <a:defRPr sz="1300" b="1">
-                <a:solidFill>
-                  <a:srgbClr val="142A4A"/>
-                </a:solidFill>
-                <a:latin typeface="Apple SD Gothic Neo"/>
-              </a:defRPr>
-            </a:pPr>
-            <a:r>
-              <a:t>추론·과학 벤치마크 (%)</a:t>
-            </a:r>
-          </a:p>
-        </c:rich>
-      </c:tx>
-      <c:layout/>
-      <c:overlay val="0"/>
-    </c:title>
-    <c:autoTitleDeleted val="0"/>
-    <c:plotArea>
-      <c:barChart>
-        <c:barDir val="col"/>
-        <c:grouping val="clustered"/>
-        <c:ser>
-          <c:idx val="0"/>
-          <c:order val="0"/>
-          <c:tx>
-            <c:strRef>
-              <c:f>Sheet1!$B$1</c:f>
-              <c:strCache>
-                <c:ptCount val="1"/>
-                <c:pt idx="0">
-                  <c:v>GPQA Diamond</c:v>
-                </c:pt>
-              </c:strCache>
-            </c:strRef>
-          </c:tx>
-          <c:spPr>
-            <a:solidFill>
-              <a:srgbClr val="D4774A"/>
-            </a:solidFill>
-            <a:ln>
-              <a:noFill/>
-            </a:ln>
-          </c:spPr>
-          <c:cat>
-            <c:strRef>
-              <c:f>Sheet1!$A$2:$A$5</c:f>
-              <c:strCache>
-                <c:ptCount val="4"/>
-                <c:pt idx="0">
-                  <c:v>Claude
-Opus 4.8</c:v>
-                </c:pt>
-                <c:pt idx="1">
-                  <c:v>GPT-5.5</c:v>
-                </c:pt>
-                <c:pt idx="2">
-                  <c:v>Gemini
-3.1 Pro</c:v>
-                </c:pt>
-                <c:pt idx="3">
-                  <c:v>Grok 4.3</c:v>
-                </c:pt>
-              </c:strCache>
-            </c:strRef>
-          </c:cat>
-          <c:val>
-            <c:numRef>
-              <c:f>Sheet1!$B$2:$B$5</c:f>
-              <c:numCache>
-                <c:formatCode>General</c:formatCode>
-                <c:ptCount val="4"/>
-                <c:pt idx="0">
-                  <c:v>93.6</c:v>
-                </c:pt>
-                <c:pt idx="1">
-                  <c:v>92.0</c:v>
-                </c:pt>
-                <c:pt idx="2">
-                  <c:v>94.3</c:v>
-                </c:pt>
-                <c:pt idx="3">
-                  <c:v>88.0</c:v>
-                </c:pt>
-              </c:numCache>
-            </c:numRef>
-          </c:val>
-        </c:ser>
-        <c:ser>
-          <c:idx val="1"/>
-          <c:order val="1"/>
-          <c:tx>
-            <c:strRef>
-              <c:f>Sheet1!$C$1</c:f>
-              <c:strCache>
-                <c:ptCount val="1"/>
-                <c:pt idx="0">
-                  <c:v>HLE (no tools)</c:v>
-                </c:pt>
-              </c:strCache>
-            </c:strRef>
-          </c:tx>
-          <c:spPr>
-            <a:solidFill>
-              <a:srgbClr val="10A37A"/>
-            </a:solidFill>
-            <a:ln>
-              <a:noFill/>
-            </a:ln>
-          </c:spPr>
-          <c:cat>
-            <c:strRef>
-              <c:f>Sheet1!$A$2:$A$5</c:f>
-              <c:strCache>
-                <c:ptCount val="4"/>
-                <c:pt idx="0">
-                  <c:v>Claude
-Opus 4.8</c:v>
-                </c:pt>
-                <c:pt idx="1">
-                  <c:v>GPT-5.5</c:v>
-                </c:pt>
-                <c:pt idx="2">
-                  <c:v>Gemini
-3.1 Pro</c:v>
-                </c:pt>
-                <c:pt idx="3">
-                  <c:v>Grok 4.3</c:v>
-                </c:pt>
-              </c:strCache>
-            </c:strRef>
-          </c:cat>
-          <c:val>
-            <c:numRef>
-              <c:f>Sheet1!$C$2:$C$5</c:f>
-              <c:numCache>
-                <c:formatCode>General</c:formatCode>
-                <c:ptCount val="4"/>
-                <c:pt idx="0">
-                  <c:v>49.8</c:v>
-                </c:pt>
-                <c:pt idx="1">
-                  <c:v>41.4</c:v>
-                </c:pt>
-                <c:pt idx="2">
-                  <c:v>44.4</c:v>
-                </c:pt>
-                <c:pt idx="3">
-                  <c:v>50.7</c:v>
-                </c:pt>
-              </c:numCache>
-            </c:numRef>
-          </c:val>
-        </c:ser>
-        <c:axId val="-2068027336"/>
-        <c:axId val="-2113994440"/>
-      </c:barChart>
-      <c:catAx>
-        <c:axId val="-2068027336"/>
-        <c:scaling>
-          <c:orientation val="minMax"/>
-        </c:scaling>
-        <c:delete val="0"/>
-        <c:axPos val="b"/>
-        <c:majorTickMark val="out"/>
-        <c:minorTickMark val="none"/>
-        <c:tickLblPos val="nextTo"/>
-        <c:txPr>
-          <a:bodyPr/>
-          <a:lstStyle/>
-          <a:p>
-            <a:pPr>
-              <a:defRPr sz="900">
-                <a:latin typeface="Apple SD Gothic Neo"/>
-              </a:defRPr>
-            </a:pPr>
-          </a:p>
-        </c:txPr>
-        <c:crossAx val="-2113994440"/>
-        <c:crosses val="autoZero"/>
-        <c:auto val="1"/>
-        <c:lblAlgn val="ctr"/>
-        <c:lblOffset val="100"/>
-        <c:noMultiLvlLbl val="0"/>
-      </c:catAx>
-      <c:valAx>
-        <c:axId val="-2113994440"/>
-        <c:scaling>
-          <c:max val="100.0"/>
-          <c:min val="0.0"/>
-        </c:scaling>
-        <c:delete val="0"/>
-        <c:axPos val="l"/>
-        <c:majorGridlines/>
-        <c:majorTickMark val="out"/>
-        <c:minorTickMark val="none"/>
-        <c:tickLblPos val="nextTo"/>
-        <c:txPr>
-          <a:bodyPr/>
-          <a:lstStyle/>
-          <a:p>
-            <a:pPr>
-              <a:defRPr sz="900">
-                <a:latin typeface="Apple SD Gothic Neo"/>
-              </a:defRPr>
-            </a:pPr>
-          </a:p>
-        </c:txPr>
-        <c:crossAx val="-2068027336"/>
-        <c:crosses val="autoZero"/>
-      </c:valAx>
-    </c:plotArea>
-    <c:legend>
-      <c:legendPos val="b"/>
-      <c:overlay val="0"/>
-      <c:txPr>
-        <a:bodyPr/>
-        <a:lstStyle/>
-        <a:p>
-          <a:pPr>
-            <a:defRPr sz="900">
-              <a:latin typeface="Apple SD Gothic Neo"/>
-            </a:defRPr>
-          </a:pPr>
-        </a:p>
-      </c:txPr>
-    </c:legend>
-    <c:dispBlanksAs val="gap"/>
-  </c:chart>
-  <c:txPr>
-    <a:bodyPr/>
-    <a:lstStyle/>
-    <a:p>
-      <a:pPr>
-        <a:defRPr sz="1800"/>
-      </a:pPr>
-      <a:endParaRPr lang="en-US"/>
-    </a:p>
-  </c:txPr>
-  <c:externalData r:id="rId1">
-    <c:autoUpdate val="0"/>
-  </c:externalData>
-</c:chartSpace>
-</file>
-
-<file path=ppt/charts/chart5.xml><?xml version="1.0" encoding="utf-8"?>
-<c:chartSpace xmlns:c="http://schemas.openxmlformats.org/drawingml/2006/chart" xmlns:a="http://schemas.openxmlformats.org/drawingml/2006/main" xmlns:r="http://schemas.openxmlformats.org/officeDocument/2006/relationships">
-  <c:date1904 val="0"/>
-  <c:chart>
-    <c:title>
-      <c:tx>
-        <c:rich>
-          <a:bodyPr/>
-          <a:lstStyle/>
-          <a:p>
-            <a:pPr>
-              <a:defRPr sz="1300" b="1">
-                <a:solidFill>
-                  <a:srgbClr val="142A4A"/>
-                </a:solidFill>
-                <a:latin typeface="Apple SD Gothic Neo"/>
-              </a:defRPr>
-            </a:pPr>
-            <a:r>
-              <a:t>에이전트 GDPval-AA (Elo, 높을수록 우수)</a:t>
+              <a:t>HLE — 도구 없이 혼자 풀기</a:t>
+            </a:r>
+          </a:p>
+          <a:p>
+            <a:r>
+              <a:t>* Grok 근사치</a:t>
             </a:r>
           </a:p>
         </c:rich>
@@ -1271,23 +1711,23 @@
                 <c:formatCode>General</c:formatCode>
                 <c:ptCount val="4"/>
                 <c:pt idx="0">
-                  <c:v>1500</c:v>
+                  <c:v>49.8</c:v>
                 </c:pt>
                 <c:pt idx="1">
-                  <c:v>1400</c:v>
+                  <c:v>41.4</c:v>
                 </c:pt>
                 <c:pt idx="2">
-                  <c:v>1317</c:v>
+                  <c:v>44.4</c:v>
                 </c:pt>
                 <c:pt idx="3">
-                  <c:v>1500</c:v>
+                  <c:v>50.7</c:v>
                 </c:pt>
               </c:numCache>
             </c:numRef>
           </c:val>
         </c:ser>
         <c:dLbls>
-          <c:numFmt formatCode="0&quot;&quot;" sourceLinked="0"/>
+          <c:numFmt formatCode="0&quot;%&quot;" sourceLinked="0"/>
           <c:txPr>
             <a:bodyPr/>
             <a:lstStyle/>
@@ -1315,7 +1755,7 @@
         <c:axId val="-2068027336"/>
         <c:scaling>
           <c:orientation val="maxMin"/>
-          <c:max val="1600.0"/>
+          <c:max val="100.0"/>
           <c:min val="0.0"/>
         </c:scaling>
         <c:delete val="0"/>
@@ -1384,7 +1824,7 @@
 </c:chartSpace>
 </file>
 
-<file path=ppt/charts/chart6.xml><?xml version="1.0" encoding="utf-8"?>
+<file path=ppt/charts/chart8.xml><?xml version="1.0" encoding="utf-8"?>
 <c:chartSpace xmlns:c="http://schemas.openxmlformats.org/drawingml/2006/chart" xmlns:a="http://schemas.openxmlformats.org/drawingml/2006/main" xmlns:r="http://schemas.openxmlformats.org/officeDocument/2006/relationships">
   <c:date1904 val="0"/>
   <c:chart>
@@ -1395,7 +1835,7 @@
           <a:lstStyle/>
           <a:p>
             <a:pPr>
-              <a:defRPr sz="1300" b="1">
+              <a:defRPr sz="1200" b="1">
                 <a:solidFill>
                   <a:srgbClr val="142A4A"/>
                 </a:solidFill>
@@ -1403,7 +1843,7 @@
               </a:defRPr>
             </a:pPr>
             <a:r>
-              <a:t>성능 · 비용 효율 (0~100, 높을수록 유리)</a:t>
+              <a:t>수학 시험 3종 비교 — 막대가 길수록 정답률 높음 (%)</a:t>
             </a:r>
           </a:p>
         </c:rich>
@@ -1425,7 +1865,73 @@
               <c:strCache>
                 <c:ptCount val="1"/>
                 <c:pt idx="0">
-                  <c:v>성능 (AA Index, 정규화)</c:v>
+                  <c:v>MATH-500 (기본~중급)</c:v>
+                </c:pt>
+              </c:strCache>
+            </c:strRef>
+          </c:tx>
+          <c:spPr>
+            <a:solidFill>
+              <a:srgbClr val="1F6FB2"/>
+            </a:solidFill>
+            <a:ln>
+              <a:noFill/>
+            </a:ln>
+          </c:spPr>
+          <c:cat>
+            <c:strRef>
+              <c:f>Sheet1!$A$2:$A$5</c:f>
+              <c:strCache>
+                <c:ptCount val="4"/>
+                <c:pt idx="0">
+                  <c:v>Claude
+Opus 4.8</c:v>
+                </c:pt>
+                <c:pt idx="1">
+                  <c:v>GPT-5.5</c:v>
+                </c:pt>
+                <c:pt idx="2">
+                  <c:v>Gemini
+3.1 Pro</c:v>
+                </c:pt>
+                <c:pt idx="3">
+                  <c:v>Grok 4.3</c:v>
+                </c:pt>
+              </c:strCache>
+            </c:strRef>
+          </c:cat>
+          <c:val>
+            <c:numRef>
+              <c:f>Sheet1!$B$2:$B$5</c:f>
+              <c:numCache>
+                <c:formatCode>General</c:formatCode>
+                <c:ptCount val="4"/>
+                <c:pt idx="0">
+                  <c:v>96.1</c:v>
+                </c:pt>
+                <c:pt idx="1">
+                  <c:v>97.0</c:v>
+                </c:pt>
+                <c:pt idx="2">
+                  <c:v>95.6</c:v>
+                </c:pt>
+                <c:pt idx="3">
+                  <c:v>94.0</c:v>
+                </c:pt>
+              </c:numCache>
+            </c:numRef>
+          </c:val>
+        </c:ser>
+        <c:ser>
+          <c:idx val="1"/>
+          <c:order val="1"/>
+          <c:tx>
+            <c:strRef>
+              <c:f>Sheet1!$C$1</c:f>
+              <c:strCache>
+                <c:ptCount val="1"/>
+                <c:pt idx="0">
+                  <c:v>AIME 2026 (올림피아드급)</c:v>
                 </c:pt>
               </c:strCache>
             </c:strRef>
@@ -1462,43 +1968,43 @@
           </c:cat>
           <c:val>
             <c:numRef>
-              <c:f>Sheet1!$B$2:$B$5</c:f>
+              <c:f>Sheet1!$C$2:$C$5</c:f>
               <c:numCache>
                 <c:formatCode>General</c:formatCode>
                 <c:ptCount val="4"/>
                 <c:pt idx="0">
-                  <c:v>87.14285714285714</c:v>
+                  <c:v>95.0</c:v>
                 </c:pt>
                 <c:pt idx="1">
-                  <c:v>85.71428571428571</c:v>
+                  <c:v>97.0</c:v>
                 </c:pt>
                 <c:pt idx="2">
-                  <c:v>81.42857142857143</c:v>
+                  <c:v>96.0</c:v>
                 </c:pt>
                 <c:pt idx="3">
-                  <c:v>75.71428571428571</c:v>
+                  <c:v>96.0</c:v>
                 </c:pt>
               </c:numCache>
             </c:numRef>
           </c:val>
         </c:ser>
         <c:ser>
-          <c:idx val="1"/>
-          <c:order val="1"/>
+          <c:idx val="2"/>
+          <c:order val="2"/>
           <c:tx>
             <c:strRef>
-              <c:f>Sheet1!$C$1</c:f>
+              <c:f>Sheet1!$D$1</c:f>
               <c:strCache>
                 <c:ptCount val="1"/>
                 <c:pt idx="0">
-                  <c:v>비용 효율 (출력가 역산, 정규화)</c:v>
+                  <c:v>FrontierMath (최고난도)</c:v>
                 </c:pt>
               </c:strCache>
             </c:strRef>
           </c:tx>
           <c:spPr>
             <a:solidFill>
-              <a:srgbClr val="10A37A"/>
+              <a:srgbClr val="F27E2E"/>
             </a:solidFill>
             <a:ln>
               <a:noFill/>
@@ -1528,21 +2034,21 @@
           </c:cat>
           <c:val>
             <c:numRef>
-              <c:f>Sheet1!$C$2:$C$5</c:f>
+              <c:f>Sheet1!$D$2:$D$5</c:f>
               <c:numCache>
                 <c:formatCode>General</c:formatCode>
                 <c:ptCount val="4"/>
                 <c:pt idx="0">
-                  <c:v>16.666666666666664</c:v>
+                  <c:v>49.0</c:v>
                 </c:pt>
                 <c:pt idx="1">
-                  <c:v>0.0</c:v>
+                  <c:v>53.0</c:v>
                 </c:pt>
                 <c:pt idx="2">
-                  <c:v>60.0</c:v>
+                  <c:v>51.0</c:v>
                 </c:pt>
                 <c:pt idx="3">
-                  <c:v>91.66666666666666</c:v>
+                  <c:v>54.0</c:v>
                 </c:pt>
               </c:numCache>
             </c:numRef>
@@ -1614,13 +2120,233 @@
         <a:lstStyle/>
         <a:p>
           <a:pPr>
-            <a:defRPr sz="900">
+            <a:defRPr sz="850">
               <a:latin typeface="Apple SD Gothic Neo"/>
             </a:defRPr>
           </a:pPr>
         </a:p>
       </c:txPr>
     </c:legend>
+    <c:dispBlanksAs val="gap"/>
+  </c:chart>
+  <c:txPr>
+    <a:bodyPr/>
+    <a:lstStyle/>
+    <a:p>
+      <a:pPr>
+        <a:defRPr sz="1800"/>
+      </a:pPr>
+      <a:endParaRPr lang="en-US"/>
+    </a:p>
+  </c:txPr>
+  <c:externalData r:id="rId1">
+    <c:autoUpdate val="0"/>
+  </c:externalData>
+</c:chartSpace>
+</file>
+
+<file path=ppt/charts/chart9.xml><?xml version="1.0" encoding="utf-8"?>
+<c:chartSpace xmlns:c="http://schemas.openxmlformats.org/drawingml/2006/chart" xmlns:a="http://schemas.openxmlformats.org/drawingml/2006/main" xmlns:r="http://schemas.openxmlformats.org/officeDocument/2006/relationships">
+  <c:date1904 val="0"/>
+  <c:chart>
+    <c:title>
+      <c:tx>
+        <c:rich>
+          <a:bodyPr/>
+          <a:lstStyle/>
+          <a:p>
+            <a:pPr>
+              <a:defRPr sz="1150" b="1">
+                <a:solidFill>
+                  <a:srgbClr val="142A4A"/>
+                </a:solidFill>
+                <a:latin typeface="Apple SD Gothic Neo"/>
+              </a:defRPr>
+            </a:pPr>
+            <a:r>
+              <a:t>HLE — 검색·계산 도구 사용 가능</a:t>
+            </a:r>
+          </a:p>
+          <a:p>
+            <a:r>
+              <a:t>도구 쓰면 점수 상승</a:t>
+            </a:r>
+          </a:p>
+        </c:rich>
+      </c:tx>
+      <c:layout/>
+      <c:overlay val="0"/>
+    </c:title>
+    <c:autoTitleDeleted val="0"/>
+    <c:plotArea>
+      <c:barChart>
+        <c:barDir val="bar"/>
+        <c:grouping val="clustered"/>
+        <c:ser>
+          <c:idx val="0"/>
+          <c:order val="0"/>
+          <c:tx>
+            <c:strRef>
+              <c:f>Sheet1!$B$1</c:f>
+              <c:strCache>
+                <c:ptCount val="1"/>
+                <c:pt idx="0">
+                  <c:v/>
+                </c:pt>
+              </c:strCache>
+            </c:strRef>
+          </c:tx>
+          <c:dPt>
+            <c:idx val="0"/>
+            <c:spPr>
+              <a:solidFill>
+                <a:srgbClr val="D4774A"/>
+              </a:solidFill>
+              <a:ln>
+                <a:noFill/>
+              </a:ln>
+            </c:spPr>
+          </c:dPt>
+          <c:dPt>
+            <c:idx val="1"/>
+            <c:spPr>
+              <a:solidFill>
+                <a:srgbClr val="10A37A"/>
+              </a:solidFill>
+              <a:ln>
+                <a:noFill/>
+              </a:ln>
+            </c:spPr>
+          </c:dPt>
+          <c:dPt>
+            <c:idx val="2"/>
+            <c:spPr>
+              <a:solidFill>
+                <a:srgbClr val="4285F4"/>
+              </a:solidFill>
+              <a:ln>
+                <a:noFill/>
+              </a:ln>
+            </c:spPr>
+          </c:dPt>
+          <c:cat>
+            <c:strRef>
+              <c:f>Sheet1!$A$2:$A$4</c:f>
+              <c:strCache>
+                <c:ptCount val="3"/>
+                <c:pt idx="0">
+                  <c:v>Claude
+Opus 4.8</c:v>
+                </c:pt>
+                <c:pt idx="1">
+                  <c:v>GPT-5.5</c:v>
+                </c:pt>
+                <c:pt idx="2">
+                  <c:v>Gemini
+3.1 Pro</c:v>
+                </c:pt>
+              </c:strCache>
+            </c:strRef>
+          </c:cat>
+          <c:val>
+            <c:numRef>
+              <c:f>Sheet1!$B$2:$B$4</c:f>
+              <c:numCache>
+                <c:formatCode>General</c:formatCode>
+                <c:ptCount val="3"/>
+                <c:pt idx="0">
+                  <c:v>57.9</c:v>
+                </c:pt>
+                <c:pt idx="1">
+                  <c:v>52.2</c:v>
+                </c:pt>
+                <c:pt idx="2">
+                  <c:v>51.4</c:v>
+                </c:pt>
+              </c:numCache>
+            </c:numRef>
+          </c:val>
+        </c:ser>
+        <c:dLbls>
+          <c:numFmt formatCode="0&quot;%&quot;" sourceLinked="0"/>
+          <c:txPr>
+            <a:bodyPr/>
+            <a:lstStyle/>
+            <a:p>
+              <a:pPr>
+                <a:defRPr sz="900">
+                  <a:latin typeface="Apple SD Gothic Neo"/>
+                </a:defRPr>
+              </a:pPr>
+            </a:p>
+          </c:txPr>
+          <c:dLblPos val="outEnd"/>
+          <c:showLegendKey val="0"/>
+          <c:showVal val="1"/>
+          <c:showCatName val="0"/>
+          <c:showSerName val="0"/>
+          <c:showPercent val="0"/>
+          <c:showBubbleSize val="0"/>
+          <c:showLeaderLines val="1"/>
+        </c:dLbls>
+        <c:axId val="-2068027336"/>
+        <c:axId val="-2113994440"/>
+      </c:barChart>
+      <c:catAx>
+        <c:axId val="-2068027336"/>
+        <c:scaling>
+          <c:orientation val="maxMin"/>
+          <c:max val="100.0"/>
+          <c:min val="0.0"/>
+        </c:scaling>
+        <c:delete val="0"/>
+        <c:axPos val="l"/>
+        <c:majorGridlines/>
+        <c:majorTickMark val="out"/>
+        <c:minorTickMark val="none"/>
+        <c:tickLblPos val="nextTo"/>
+        <c:txPr>
+          <a:bodyPr/>
+          <a:lstStyle/>
+          <a:p>
+            <a:pPr>
+              <a:defRPr sz="900">
+                <a:latin typeface="Apple SD Gothic Neo"/>
+              </a:defRPr>
+            </a:pPr>
+          </a:p>
+        </c:txPr>
+        <c:crossAx val="-2113994440"/>
+        <c:crosses val="autoZero"/>
+        <c:auto val="1"/>
+        <c:lblAlgn val="ctr"/>
+        <c:lblOffset val="100"/>
+        <c:noMultiLvlLbl val="0"/>
+      </c:catAx>
+      <c:valAx>
+        <c:axId val="-2113994440"/>
+        <c:scaling/>
+        <c:delete val="0"/>
+        <c:axPos val="b"/>
+        <c:majorGridlines/>
+        <c:majorTickMark val="out"/>
+        <c:minorTickMark val="none"/>
+        <c:tickLblPos val="nextTo"/>
+        <c:txPr>
+          <a:bodyPr/>
+          <a:lstStyle/>
+          <a:p>
+            <a:pPr>
+              <a:defRPr sz="900">
+                <a:latin typeface="Apple SD Gothic Neo"/>
+              </a:defRPr>
+            </a:pPr>
+          </a:p>
+        </c:txPr>
+        <c:crossAx val="-2068027336"/>
+        <c:crosses val="autoZero"/>
+      </c:valAx>
+    </c:plotArea>
     <c:dispBlanksAs val="gap"/>
   </c:chart>
   <c:txPr>
@@ -4636,8 +5362,8 @@
         </p:nvSpPr>
         <p:spPr>
           <a:xfrm>
-            <a:off x="868680" y="1874519"/>
-            <a:ext cx="10607040" cy="1280160"/>
+            <a:off x="868680" y="1828800"/>
+            <a:ext cx="10607040" cy="1188720"/>
           </a:xfrm>
           <a:prstGeom prst="rect">
             <a:avLst/>
@@ -4659,13 +5385,13 @@
               </a:spcAft>
             </a:pPr>
             <a:r>
-              <a:rPr sz="4000" b="1">
+              <a:rPr sz="3800" b="1">
                 <a:solidFill>
                   <a:srgbClr val="FFFFFF"/>
                 </a:solidFill>
                 <a:latin typeface="Apple SD Gothic Neo"/>
               </a:rPr>
-              <a:t>외부 AI 4종 벤치마크 비교</a:t>
+              <a:t>AI 코딩·추론 실력 비교</a:t>
             </a:r>
           </a:p>
         </p:txBody>
@@ -4678,8 +5404,8 @@
         </p:nvSpPr>
         <p:spPr>
           <a:xfrm>
-            <a:off x="886968" y="2971800"/>
-            <a:ext cx="10607040" cy="457200"/>
+            <a:off x="886968" y="2880360"/>
+            <a:ext cx="10607040" cy="502920"/>
           </a:xfrm>
           <a:prstGeom prst="rect">
             <a:avLst/>
@@ -4701,13 +5427,13 @@
               </a:spcAft>
             </a:pPr>
             <a:r>
-              <a:rPr sz="1900" b="1">
+              <a:rPr sz="1800" b="1">
                 <a:solidFill>
                   <a:srgbClr val="9FC4E8"/>
                 </a:solidFill>
                 <a:latin typeface="Apple SD Gothic Neo"/>
               </a:rPr>
-              <a:t>Claude  ·  ChatGPT  ·  Gemini  ·  Grok  (그래프 중심 요약)</a:t>
+              <a:t>Claude · ChatGPT · Gemini · Grok — 시험 점수로 보는 그래프</a:t>
             </a:r>
           </a:p>
         </p:txBody>
@@ -4720,7 +5446,7 @@
         </p:nvSpPr>
         <p:spPr>
           <a:xfrm>
-            <a:off x="886968" y="3657600"/>
+            <a:off x="886968" y="3520440"/>
             <a:ext cx="4206240" cy="50800"/>
           </a:xfrm>
           <a:prstGeom prst="rect">
@@ -4764,8 +5490,8 @@
         </p:nvSpPr>
         <p:spPr>
           <a:xfrm>
-            <a:off x="886968" y="3950208"/>
-            <a:ext cx="10607040" cy="1005840"/>
+            <a:off x="886968" y="3794760"/>
+            <a:ext cx="10607040" cy="914400"/>
           </a:xfrm>
           <a:prstGeom prst="rect">
             <a:avLst/>
@@ -4780,7 +5506,7 @@
           <a:p>
             <a:pPr algn="l">
               <a:lnSpc>
-                <a:spcPct val="130000"/>
+                <a:spcPct val="125000"/>
               </a:lnSpc>
               <a:spcAft>
                 <a:spcPts val="400"/>
@@ -4793,26 +5519,26 @@
                 </a:solidFill>
                 <a:latin typeface="Apple SD Gothic Neo"/>
               </a:rPr>
-              <a:t>NC HW 개발팀  |  2026년 6월  |  임원 보고용</a:t>
+              <a:t>NC HW 개발팀  |  2026년 6월</a:t>
             </a:r>
           </a:p>
           <a:p>
             <a:pPr algn="l">
               <a:lnSpc>
-                <a:spcPct val="130000"/>
+                <a:spcPct val="125000"/>
               </a:lnSpc>
               <a:spcAft>
                 <a:spcPts val="400"/>
               </a:spcAft>
             </a:pPr>
             <a:r>
-              <a:rPr sz="1250" b="0">
+              <a:rPr sz="1300" b="0">
                 <a:solidFill>
                   <a:srgbClr val="8A929E"/>
                 </a:solidFill>
                 <a:latin typeface="Apple SD Gothic Neo"/>
               </a:rPr>
-              <a:t>출처: 공식 Model Card + Artificial Analysis 독립 집계 교차검증</a:t>
+              <a:t>막대가 길수록 = 시험을 더 많이 맞힘 (100%가 만점)</a:t>
             </a:r>
           </a:p>
         </p:txBody>
@@ -4854,7 +5580,7 @@
                 </a:solidFill>
                 <a:latin typeface="Apple SD Gothic Neo"/>
               </a:rPr>
-              <a:t>(1/6)</a:t>
+              <a:t>(1/8)</a:t>
             </a:r>
           </a:p>
         </p:txBody>
@@ -5010,7 +5736,7 @@
                 </a:solidFill>
                 <a:latin typeface="Apple SD Gothic Neo"/>
               </a:rPr>
-              <a:t>NC HW 개발팀  |  외부 AI 4종 벤치마크 비교 (2026.6)</a:t>
+              <a:t>NC HW 개발팀  |  코딩·추론 역량 비교 (2026.6)</a:t>
             </a:r>
           </a:p>
         </p:txBody>
@@ -5046,13 +5772,13 @@
               </a:spcAft>
             </a:pPr>
             <a:r>
-              <a:rPr sz="2300" b="1">
+              <a:rPr sz="2200" b="1">
                 <a:solidFill>
                   <a:srgbClr val="FFFFFF"/>
                 </a:solidFill>
                 <a:latin typeface="Apple SD Gothic Neo"/>
               </a:rPr>
-              <a:t>[방식 A] 종합 비교 — 지능지수 · API 비용</a:t>
+              <a:t>먼저 알아두기 — '벤치마크'가 뭐예요?</a:t>
             </a:r>
           </a:p>
         </p:txBody>
@@ -5065,8 +5791,8 @@
         </p:nvSpPr>
         <p:spPr>
           <a:xfrm>
-            <a:off x="457200" y="1042415"/>
-            <a:ext cx="11247120" cy="310896"/>
+            <a:off x="457200" y="1024128"/>
+            <a:ext cx="11247120" cy="347472"/>
           </a:xfrm>
           <a:prstGeom prst="rect">
             <a:avLst/>
@@ -5088,36 +5814,38 @@
               </a:spcAft>
             </a:pPr>
             <a:r>
-              <a:rPr sz="1100" b="0">
+              <a:rPr sz="1200" b="0">
                 <a:solidFill>
                   <a:srgbClr val="444A55"/>
                 </a:solidFill>
                 <a:latin typeface="Apple SD Gothic Neo"/>
               </a:rPr>
-              <a:t>막대가 길수록 우수(지능지수) / 비용 차트는 짧을수록 저렴(출력 $/1M tokens)</a:t>
-            </a:r>
-          </a:p>
-        </p:txBody>
-      </p:sp>
-      <p:sp>
-        <p:nvSpPr>
-          <p:cNvPr id="7" name="Rectangle 6"/>
+              <a:t>벤치마크 = AI에게 내리는 표준 시험. 점수가 높을수록 그 종류 문제를 잘 푼다는 뜻입니다.</a:t>
+            </a:r>
+          </a:p>
+        </p:txBody>
+      </p:sp>
+      <p:sp>
+        <p:nvSpPr>
+          <p:cNvPr id="7" name="Rounded Rectangle 6"/>
           <p:cNvSpPr/>
           <p:nvPr/>
         </p:nvSpPr>
         <p:spPr>
           <a:xfrm>
-            <a:off x="457200" y="1353312"/>
-            <a:ext cx="164592" cy="164592"/>
-          </a:xfrm>
-          <a:prstGeom prst="rect">
+            <a:off x="457200" y="1444752"/>
+            <a:ext cx="5486400" cy="868680"/>
+          </a:xfrm>
+          <a:prstGeom prst="roundRect">
             <a:avLst/>
           </a:prstGeom>
           <a:solidFill>
-            <a:srgbClr val="D4774A"/>
+            <a:srgbClr val="E8F1FA"/>
           </a:solidFill>
-          <a:ln>
-            <a:noFill/>
+          <a:ln w="19050">
+            <a:solidFill>
+              <a:srgbClr val="1F6FB2"/>
+            </a:solidFill>
           </a:ln>
           <a:effectLst/>
         </p:spPr>
@@ -5145,62 +5873,20 @@
       </p:sp>
       <p:sp>
         <p:nvSpPr>
-          <p:cNvPr id="8" name="TextBox 7"/>
-          <p:cNvSpPr txBox="1"/>
-          <p:nvPr/>
-        </p:nvSpPr>
-        <p:spPr>
-          <a:xfrm>
-            <a:off x="676656" y="1340612"/>
-            <a:ext cx="1417320" cy="201168"/>
-          </a:xfrm>
-          <a:prstGeom prst="rect">
-            <a:avLst/>
-          </a:prstGeom>
-          <a:noFill/>
-        </p:spPr>
-        <p:txBody>
-          <a:bodyPr wrap="square" anchor="t" lIns="25400" rIns="25400" tIns="25400" bIns="25400">
-            <a:spAutoFit/>
-          </a:bodyPr>
-          <a:lstStyle/>
-          <a:p>
-            <a:pPr algn="l">
-              <a:lnSpc>
-                <a:spcPct val="100000"/>
-              </a:lnSpc>
-              <a:spcAft>
-                <a:spcPts val="400"/>
-              </a:spcAft>
-            </a:pPr>
-            <a:r>
-              <a:rPr sz="950" b="0">
-                <a:solidFill>
-                  <a:srgbClr val="444A55"/>
-                </a:solidFill>
-                <a:latin typeface="Apple SD Gothic Neo"/>
-              </a:rPr>
-              <a:t>Claude Opus 4.8</a:t>
-            </a:r>
-          </a:p>
-        </p:txBody>
-      </p:sp>
-      <p:sp>
-        <p:nvSpPr>
-          <p:cNvPr id="9" name="Rectangle 8"/>
+          <p:cNvPr id="8" name="Rectangle 7"/>
           <p:cNvSpPr/>
           <p:nvPr/>
         </p:nvSpPr>
         <p:spPr>
           <a:xfrm>
-            <a:off x="2148840" y="1353312"/>
-            <a:ext cx="164592" cy="164592"/>
+            <a:off x="566928" y="1554480"/>
+            <a:ext cx="411480" cy="38100"/>
           </a:xfrm>
           <a:prstGeom prst="rect">
             <a:avLst/>
           </a:prstGeom>
           <a:solidFill>
-            <a:srgbClr val="10A37A"/>
+            <a:srgbClr val="1F6FB2"/>
           </a:solidFill>
           <a:ln>
             <a:noFill/>
@@ -5231,14 +5917,14 @@
       </p:sp>
       <p:sp>
         <p:nvSpPr>
-          <p:cNvPr id="10" name="TextBox 9"/>
+          <p:cNvPr id="9" name="TextBox 8"/>
           <p:cNvSpPr txBox="1"/>
           <p:nvPr/>
         </p:nvSpPr>
         <p:spPr>
           <a:xfrm>
-            <a:off x="2368296" y="1340612"/>
-            <a:ext cx="1417320" cy="201168"/>
+            <a:off x="566928" y="1645920"/>
+            <a:ext cx="5266944" cy="594360"/>
           </a:xfrm>
           <a:prstGeom prst="rect">
             <a:avLst/>
@@ -5253,43 +5939,64 @@
           <a:p>
             <a:pPr algn="l">
               <a:lnSpc>
-                <a:spcPct val="100000"/>
+                <a:spcPct val="118000"/>
               </a:lnSpc>
               <a:spcAft>
                 <a:spcPts val="400"/>
               </a:spcAft>
             </a:pPr>
             <a:r>
-              <a:rPr sz="950" b="0">
+              <a:rPr sz="1150" b="1">
+                <a:solidFill>
+                  <a:srgbClr val="142A4A"/>
+                </a:solidFill>
+                <a:latin typeface="Apple SD Gothic Neo"/>
+              </a:rPr>
+              <a:t>코딩 시험</a:t>
+            </a:r>
+          </a:p>
+          <a:p>
+            <a:pPr algn="l">
+              <a:lnSpc>
+                <a:spcPct val="118000"/>
+              </a:lnSpc>
+              <a:spcAft>
+                <a:spcPts val="400"/>
+              </a:spcAft>
+            </a:pPr>
+            <a:r>
+              <a:rPr sz="1050" b="0">
                 <a:solidFill>
                   <a:srgbClr val="444A55"/>
                 </a:solidFill>
                 <a:latin typeface="Apple SD Gothic Neo"/>
               </a:rPr>
-              <a:t>GPT-5.5</a:t>
-            </a:r>
-          </a:p>
-        </p:txBody>
-      </p:sp>
-      <p:sp>
-        <p:nvSpPr>
-          <p:cNvPr id="11" name="Rectangle 10"/>
+              <a:t>프로그램 버그 고치기, 터미널 명령, 컴퓨터 조작</a:t>
+            </a:r>
+          </a:p>
+        </p:txBody>
+      </p:sp>
+      <p:sp>
+        <p:nvSpPr>
+          <p:cNvPr id="10" name="Rounded Rectangle 9"/>
           <p:cNvSpPr/>
           <p:nvPr/>
         </p:nvSpPr>
         <p:spPr>
           <a:xfrm>
-            <a:off x="3840480" y="1353312"/>
-            <a:ext cx="164592" cy="164592"/>
-          </a:xfrm>
-          <a:prstGeom prst="rect">
+            <a:off x="6263640" y="1444752"/>
+            <a:ext cx="5486400" cy="868680"/>
+          </a:xfrm>
+          <a:prstGeom prst="roundRect">
             <a:avLst/>
           </a:prstGeom>
           <a:solidFill>
-            <a:srgbClr val="4285F4"/>
+            <a:srgbClr val="E8F1FA"/>
           </a:solidFill>
-          <a:ln>
-            <a:noFill/>
+          <a:ln w="19050">
+            <a:solidFill>
+              <a:srgbClr val="F27E2E"/>
+            </a:solidFill>
           </a:ln>
           <a:effectLst/>
         </p:spPr>
@@ -5317,62 +6024,20 @@
       </p:sp>
       <p:sp>
         <p:nvSpPr>
-          <p:cNvPr id="12" name="TextBox 11"/>
-          <p:cNvSpPr txBox="1"/>
-          <p:nvPr/>
-        </p:nvSpPr>
-        <p:spPr>
-          <a:xfrm>
-            <a:off x="4059936" y="1340612"/>
-            <a:ext cx="1417320" cy="201168"/>
-          </a:xfrm>
-          <a:prstGeom prst="rect">
-            <a:avLst/>
-          </a:prstGeom>
-          <a:noFill/>
-        </p:spPr>
-        <p:txBody>
-          <a:bodyPr wrap="square" anchor="t" lIns="25400" rIns="25400" tIns="25400" bIns="25400">
-            <a:spAutoFit/>
-          </a:bodyPr>
-          <a:lstStyle/>
-          <a:p>
-            <a:pPr algn="l">
-              <a:lnSpc>
-                <a:spcPct val="100000"/>
-              </a:lnSpc>
-              <a:spcAft>
-                <a:spcPts val="400"/>
-              </a:spcAft>
-            </a:pPr>
-            <a:r>
-              <a:rPr sz="950" b="0">
-                <a:solidFill>
-                  <a:srgbClr val="444A55"/>
-                </a:solidFill>
-                <a:latin typeface="Apple SD Gothic Neo"/>
-              </a:rPr>
-              <a:t>Gemini 3.1 Pro</a:t>
-            </a:r>
-          </a:p>
-        </p:txBody>
-      </p:sp>
-      <p:sp>
-        <p:nvSpPr>
-          <p:cNvPr id="13" name="Rectangle 12"/>
+          <p:cNvPr id="11" name="Rectangle 10"/>
           <p:cNvSpPr/>
           <p:nvPr/>
         </p:nvSpPr>
         <p:spPr>
           <a:xfrm>
-            <a:off x="5532120" y="1353312"/>
-            <a:ext cx="164592" cy="164592"/>
+            <a:off x="6373368" y="1554480"/>
+            <a:ext cx="411480" cy="38100"/>
           </a:xfrm>
           <a:prstGeom prst="rect">
             <a:avLst/>
           </a:prstGeom>
           <a:solidFill>
-            <a:srgbClr val="6B7B8C"/>
+            <a:srgbClr val="F27E2E"/>
           </a:solidFill>
           <a:ln>
             <a:noFill/>
@@ -5403,14 +6068,14 @@
       </p:sp>
       <p:sp>
         <p:nvSpPr>
-          <p:cNvPr id="14" name="TextBox 13"/>
+          <p:cNvPr id="12" name="TextBox 11"/>
           <p:cNvSpPr txBox="1"/>
           <p:nvPr/>
         </p:nvSpPr>
         <p:spPr>
           <a:xfrm>
-            <a:off x="5751576" y="1340612"/>
-            <a:ext cx="1417320" cy="201168"/>
+            <a:off x="6373368" y="1645920"/>
+            <a:ext cx="5266944" cy="594360"/>
           </a:xfrm>
           <a:prstGeom prst="rect">
             <a:avLst/>
@@ -5425,76 +6090,59 @@
           <a:p>
             <a:pPr algn="l">
               <a:lnSpc>
-                <a:spcPct val="100000"/>
+                <a:spcPct val="118000"/>
               </a:lnSpc>
               <a:spcAft>
                 <a:spcPts val="400"/>
               </a:spcAft>
             </a:pPr>
             <a:r>
-              <a:rPr sz="950" b="0">
+              <a:rPr sz="1150" b="1">
+                <a:solidFill>
+                  <a:srgbClr val="142A4A"/>
+                </a:solidFill>
+                <a:latin typeface="Apple SD Gothic Neo"/>
+              </a:rPr>
+              <a:t>추론 시험</a:t>
+            </a:r>
+          </a:p>
+          <a:p>
+            <a:pPr algn="l">
+              <a:lnSpc>
+                <a:spcPct val="118000"/>
+              </a:lnSpc>
+              <a:spcAft>
+                <a:spcPts val="400"/>
+              </a:spcAft>
+            </a:pPr>
+            <a:r>
+              <a:rPr sz="1050" b="0">
                 <a:solidFill>
                   <a:srgbClr val="444A55"/>
                 </a:solidFill>
                 <a:latin typeface="Apple SD Gothic Neo"/>
               </a:rPr>
-              <a:t>Grok 4.3</a:t>
-            </a:r>
-          </a:p>
-        </p:txBody>
-      </p:sp>
-      <p:graphicFrame>
-        <p:nvGraphicFramePr>
-          <p:cNvPr id="15" name="Chart 14"/>
-          <p:cNvGraphicFramePr>
-            <a:graphicFrameLocks noGrp="1"/>
-          </p:cNvGraphicFramePr>
-          <p:nvPr/>
-        </p:nvGraphicFramePr>
-        <p:xfrm>
-          <a:off x="411480" y="1627632"/>
-          <a:ext cx="5440680" cy="4160520"/>
-        </p:xfrm>
-        <a:graphic>
-          <a:graphicData uri="http://schemas.openxmlformats.org/drawingml/2006/chart">
-            <c:chart xmlns:c="http://schemas.openxmlformats.org/drawingml/2006/chart" r:id="rId2"/>
-          </a:graphicData>
-        </a:graphic>
-      </p:graphicFrame>
-      <p:graphicFrame>
-        <p:nvGraphicFramePr>
-          <p:cNvPr id="16" name="Chart 15"/>
-          <p:cNvGraphicFramePr>
-            <a:graphicFrameLocks noGrp="1"/>
-          </p:cNvGraphicFramePr>
-          <p:nvPr/>
-        </p:nvGraphicFramePr>
-        <p:xfrm>
-          <a:off x="6263640" y="1627632"/>
-          <a:ext cx="5440680" cy="4160520"/>
-        </p:xfrm>
-        <a:graphic>
-          <a:graphicData uri="http://schemas.openxmlformats.org/drawingml/2006/chart">
-            <c:chart xmlns:c="http://schemas.openxmlformats.org/drawingml/2006/chart" r:id="rId3"/>
-          </a:graphicData>
-        </a:graphic>
-      </p:graphicFrame>
-      <p:sp>
-        <p:nvSpPr>
-          <p:cNvPr id="17" name="Rounded Rectangle 16"/>
+              <a:t>어려운 생각, 과학·수학 문제 풀기</a:t>
+            </a:r>
+          </a:p>
+        </p:txBody>
+      </p:sp>
+      <p:sp>
+        <p:nvSpPr>
+          <p:cNvPr id="13" name="Rectangle 12"/>
           <p:cNvSpPr/>
           <p:nvPr/>
         </p:nvSpPr>
         <p:spPr>
           <a:xfrm>
-            <a:off x="457200" y="5870448"/>
-            <a:ext cx="11292840" cy="749808"/>
-          </a:xfrm>
-          <a:prstGeom prst="roundRect">
+            <a:off x="457200" y="2487168"/>
+            <a:ext cx="146304" cy="146304"/>
+          </a:xfrm>
+          <a:prstGeom prst="rect">
             <a:avLst/>
           </a:prstGeom>
           <a:solidFill>
-            <a:srgbClr val="142A4A"/>
+            <a:srgbClr val="D4774A"/>
           </a:solidFill>
           <a:ln>
             <a:noFill/>
@@ -5525,14 +6173,14 @@
       </p:sp>
       <p:sp>
         <p:nvSpPr>
-          <p:cNvPr id="18" name="TextBox 17"/>
+          <p:cNvPr id="14" name="TextBox 13"/>
           <p:cNvSpPr txBox="1"/>
           <p:nvPr/>
         </p:nvSpPr>
         <p:spPr>
           <a:xfrm>
-            <a:off x="658368" y="5870448"/>
-            <a:ext cx="10890504" cy="749808"/>
+            <a:off x="658368" y="2474468"/>
+            <a:ext cx="1097280" cy="182880"/>
           </a:xfrm>
           <a:prstGeom prst="rect">
             <a:avLst/>
@@ -5540,6 +6188,410 @@
           <a:noFill/>
         </p:spPr>
         <p:txBody>
+          <a:bodyPr wrap="square" anchor="t" lIns="25400" rIns="25400" tIns="25400" bIns="25400">
+            <a:spAutoFit/>
+          </a:bodyPr>
+          <a:lstStyle/>
+          <a:p>
+            <a:pPr algn="l">
+              <a:lnSpc>
+                <a:spcPct val="100000"/>
+              </a:lnSpc>
+              <a:spcAft>
+                <a:spcPts val="400"/>
+              </a:spcAft>
+            </a:pPr>
+            <a:r>
+              <a:rPr sz="950" b="0">
+                <a:solidFill>
+                  <a:srgbClr val="444A55"/>
+                </a:solidFill>
+                <a:latin typeface="Apple SD Gothic Neo"/>
+              </a:rPr>
+              <a:t>Claude</a:t>
+            </a:r>
+          </a:p>
+        </p:txBody>
+      </p:sp>
+      <p:sp>
+        <p:nvSpPr>
+          <p:cNvPr id="15" name="Rectangle 14"/>
+          <p:cNvSpPr/>
+          <p:nvPr/>
+        </p:nvSpPr>
+        <p:spPr>
+          <a:xfrm>
+            <a:off x="1783080" y="2487168"/>
+            <a:ext cx="146304" cy="146304"/>
+          </a:xfrm>
+          <a:prstGeom prst="rect">
+            <a:avLst/>
+          </a:prstGeom>
+          <a:solidFill>
+            <a:srgbClr val="10A37A"/>
+          </a:solidFill>
+          <a:ln>
+            <a:noFill/>
+          </a:ln>
+          <a:effectLst/>
+        </p:spPr>
+        <p:style>
+          <a:lnRef idx="1">
+            <a:schemeClr val="accent1"/>
+          </a:lnRef>
+          <a:fillRef idx="3">
+            <a:schemeClr val="accent1"/>
+          </a:fillRef>
+          <a:effectRef idx="2">
+            <a:schemeClr val="accent1"/>
+          </a:effectRef>
+          <a:fontRef idx="minor">
+            <a:schemeClr val="lt1"/>
+          </a:fontRef>
+        </p:style>
+        <p:txBody>
+          <a:bodyPr rtlCol="0" anchor="ctr"/>
+          <a:lstStyle/>
+          <a:p>
+            <a:pPr algn="ctr"/>
+          </a:p>
+        </p:txBody>
+      </p:sp>
+      <p:sp>
+        <p:nvSpPr>
+          <p:cNvPr id="16" name="TextBox 15"/>
+          <p:cNvSpPr txBox="1"/>
+          <p:nvPr/>
+        </p:nvSpPr>
+        <p:spPr>
+          <a:xfrm>
+            <a:off x="1984248" y="2474468"/>
+            <a:ext cx="1097280" cy="182880"/>
+          </a:xfrm>
+          <a:prstGeom prst="rect">
+            <a:avLst/>
+          </a:prstGeom>
+          <a:noFill/>
+        </p:spPr>
+        <p:txBody>
+          <a:bodyPr wrap="square" anchor="t" lIns="25400" rIns="25400" tIns="25400" bIns="25400">
+            <a:spAutoFit/>
+          </a:bodyPr>
+          <a:lstStyle/>
+          <a:p>
+            <a:pPr algn="l">
+              <a:lnSpc>
+                <a:spcPct val="100000"/>
+              </a:lnSpc>
+              <a:spcAft>
+                <a:spcPts val="400"/>
+              </a:spcAft>
+            </a:pPr>
+            <a:r>
+              <a:rPr sz="950" b="0">
+                <a:solidFill>
+                  <a:srgbClr val="444A55"/>
+                </a:solidFill>
+                <a:latin typeface="Apple SD Gothic Neo"/>
+              </a:rPr>
+              <a:t>GPT</a:t>
+            </a:r>
+          </a:p>
+        </p:txBody>
+      </p:sp>
+      <p:sp>
+        <p:nvSpPr>
+          <p:cNvPr id="17" name="Rectangle 16"/>
+          <p:cNvSpPr/>
+          <p:nvPr/>
+        </p:nvSpPr>
+        <p:spPr>
+          <a:xfrm>
+            <a:off x="3108960" y="2487168"/>
+            <a:ext cx="146304" cy="146304"/>
+          </a:xfrm>
+          <a:prstGeom prst="rect">
+            <a:avLst/>
+          </a:prstGeom>
+          <a:solidFill>
+            <a:srgbClr val="4285F4"/>
+          </a:solidFill>
+          <a:ln>
+            <a:noFill/>
+          </a:ln>
+          <a:effectLst/>
+        </p:spPr>
+        <p:style>
+          <a:lnRef idx="1">
+            <a:schemeClr val="accent1"/>
+          </a:lnRef>
+          <a:fillRef idx="3">
+            <a:schemeClr val="accent1"/>
+          </a:fillRef>
+          <a:effectRef idx="2">
+            <a:schemeClr val="accent1"/>
+          </a:effectRef>
+          <a:fontRef idx="minor">
+            <a:schemeClr val="lt1"/>
+          </a:fontRef>
+        </p:style>
+        <p:txBody>
+          <a:bodyPr rtlCol="0" anchor="ctr"/>
+          <a:lstStyle/>
+          <a:p>
+            <a:pPr algn="ctr"/>
+          </a:p>
+        </p:txBody>
+      </p:sp>
+      <p:sp>
+        <p:nvSpPr>
+          <p:cNvPr id="18" name="TextBox 17"/>
+          <p:cNvSpPr txBox="1"/>
+          <p:nvPr/>
+        </p:nvSpPr>
+        <p:spPr>
+          <a:xfrm>
+            <a:off x="3310128" y="2474468"/>
+            <a:ext cx="1097280" cy="182880"/>
+          </a:xfrm>
+          <a:prstGeom prst="rect">
+            <a:avLst/>
+          </a:prstGeom>
+          <a:noFill/>
+        </p:spPr>
+        <p:txBody>
+          <a:bodyPr wrap="square" anchor="t" lIns="25400" rIns="25400" tIns="25400" bIns="25400">
+            <a:spAutoFit/>
+          </a:bodyPr>
+          <a:lstStyle/>
+          <a:p>
+            <a:pPr algn="l">
+              <a:lnSpc>
+                <a:spcPct val="100000"/>
+              </a:lnSpc>
+              <a:spcAft>
+                <a:spcPts val="400"/>
+              </a:spcAft>
+            </a:pPr>
+            <a:r>
+              <a:rPr sz="950" b="0">
+                <a:solidFill>
+                  <a:srgbClr val="444A55"/>
+                </a:solidFill>
+                <a:latin typeface="Apple SD Gothic Neo"/>
+              </a:rPr>
+              <a:t>Gemini</a:t>
+            </a:r>
+          </a:p>
+        </p:txBody>
+      </p:sp>
+      <p:sp>
+        <p:nvSpPr>
+          <p:cNvPr id="19" name="Rectangle 18"/>
+          <p:cNvSpPr/>
+          <p:nvPr/>
+        </p:nvSpPr>
+        <p:spPr>
+          <a:xfrm>
+            <a:off x="4434840" y="2487168"/>
+            <a:ext cx="146304" cy="146304"/>
+          </a:xfrm>
+          <a:prstGeom prst="rect">
+            <a:avLst/>
+          </a:prstGeom>
+          <a:solidFill>
+            <a:srgbClr val="6B7B8C"/>
+          </a:solidFill>
+          <a:ln>
+            <a:noFill/>
+          </a:ln>
+          <a:effectLst/>
+        </p:spPr>
+        <p:style>
+          <a:lnRef idx="1">
+            <a:schemeClr val="accent1"/>
+          </a:lnRef>
+          <a:fillRef idx="3">
+            <a:schemeClr val="accent1"/>
+          </a:fillRef>
+          <a:effectRef idx="2">
+            <a:schemeClr val="accent1"/>
+          </a:effectRef>
+          <a:fontRef idx="minor">
+            <a:schemeClr val="lt1"/>
+          </a:fontRef>
+        </p:style>
+        <p:txBody>
+          <a:bodyPr rtlCol="0" anchor="ctr"/>
+          <a:lstStyle/>
+          <a:p>
+            <a:pPr algn="ctr"/>
+          </a:p>
+        </p:txBody>
+      </p:sp>
+      <p:sp>
+        <p:nvSpPr>
+          <p:cNvPr id="20" name="TextBox 19"/>
+          <p:cNvSpPr txBox="1"/>
+          <p:nvPr/>
+        </p:nvSpPr>
+        <p:spPr>
+          <a:xfrm>
+            <a:off x="4636008" y="2474468"/>
+            <a:ext cx="1097280" cy="182880"/>
+          </a:xfrm>
+          <a:prstGeom prst="rect">
+            <a:avLst/>
+          </a:prstGeom>
+          <a:noFill/>
+        </p:spPr>
+        <p:txBody>
+          <a:bodyPr wrap="square" anchor="t" lIns="25400" rIns="25400" tIns="25400" bIns="25400">
+            <a:spAutoFit/>
+          </a:bodyPr>
+          <a:lstStyle/>
+          <a:p>
+            <a:pPr algn="l">
+              <a:lnSpc>
+                <a:spcPct val="100000"/>
+              </a:lnSpc>
+              <a:spcAft>
+                <a:spcPts val="400"/>
+              </a:spcAft>
+            </a:pPr>
+            <a:r>
+              <a:rPr sz="950" b="0">
+                <a:solidFill>
+                  <a:srgbClr val="444A55"/>
+                </a:solidFill>
+                <a:latin typeface="Apple SD Gothic Neo"/>
+              </a:rPr>
+              <a:t>Grok</a:t>
+            </a:r>
+          </a:p>
+        </p:txBody>
+      </p:sp>
+      <p:sp>
+        <p:nvSpPr>
+          <p:cNvPr id="21" name="TextBox 20"/>
+          <p:cNvSpPr txBox="1"/>
+          <p:nvPr/>
+        </p:nvSpPr>
+        <p:spPr>
+          <a:xfrm>
+            <a:off x="457200" y="2788920"/>
+            <a:ext cx="11247120" cy="292608"/>
+          </a:xfrm>
+          <a:prstGeom prst="rect">
+            <a:avLst/>
+          </a:prstGeom>
+          <a:noFill/>
+        </p:spPr>
+        <p:txBody>
+          <a:bodyPr wrap="square" anchor="t" lIns="25400" rIns="25400" tIns="25400" bIns="25400">
+            <a:spAutoFit/>
+          </a:bodyPr>
+          <a:lstStyle/>
+          <a:p>
+            <a:pPr algn="l">
+              <a:lnSpc>
+                <a:spcPct val="100000"/>
+              </a:lnSpc>
+              <a:spcAft>
+                <a:spcPts val="400"/>
+              </a:spcAft>
+            </a:pPr>
+            <a:r>
+              <a:rPr sz="1050" b="0">
+                <a:solidFill>
+                  <a:srgbClr val="8A929E"/>
+                </a:solidFill>
+                <a:latin typeface="Apple SD Gothic Neo"/>
+              </a:rPr>
+              <a:t>아래 그래프는 같은 시험을 4개 AI가 친 점수입니다. (* 표시는 공식 미공개 → 근사치)</a:t>
+            </a:r>
+          </a:p>
+        </p:txBody>
+      </p:sp>
+      <p:graphicFrame>
+        <p:nvGraphicFramePr>
+          <p:cNvPr id="22" name="Chart 21"/>
+          <p:cNvGraphicFramePr>
+            <a:graphicFrameLocks noGrp="1"/>
+          </p:cNvGraphicFramePr>
+          <p:nvPr/>
+        </p:nvGraphicFramePr>
+        <p:xfrm>
+          <a:off x="457200" y="3127248"/>
+          <a:ext cx="11247120" cy="2331720"/>
+        </p:xfrm>
+        <a:graphic>
+          <a:graphicData uri="http://schemas.openxmlformats.org/drawingml/2006/chart">
+            <c:chart xmlns:c="http://schemas.openxmlformats.org/drawingml/2006/chart" r:id="rId2"/>
+          </a:graphicData>
+        </a:graphic>
+      </p:graphicFrame>
+      <p:sp>
+        <p:nvSpPr>
+          <p:cNvPr id="23" name="Rounded Rectangle 22"/>
+          <p:cNvSpPr/>
+          <p:nvPr/>
+        </p:nvSpPr>
+        <p:spPr>
+          <a:xfrm>
+            <a:off x="457200" y="5650992"/>
+            <a:ext cx="11292840" cy="804672"/>
+          </a:xfrm>
+          <a:prstGeom prst="roundRect">
+            <a:avLst/>
+          </a:prstGeom>
+          <a:solidFill>
+            <a:srgbClr val="142A4A"/>
+          </a:solidFill>
+          <a:ln>
+            <a:noFill/>
+          </a:ln>
+          <a:effectLst/>
+        </p:spPr>
+        <p:style>
+          <a:lnRef idx="1">
+            <a:schemeClr val="accent1"/>
+          </a:lnRef>
+          <a:fillRef idx="3">
+            <a:schemeClr val="accent1"/>
+          </a:fillRef>
+          <a:effectRef idx="2">
+            <a:schemeClr val="accent1"/>
+          </a:effectRef>
+          <a:fontRef idx="minor">
+            <a:schemeClr val="lt1"/>
+          </a:fontRef>
+        </p:style>
+        <p:txBody>
+          <a:bodyPr rtlCol="0" anchor="ctr"/>
+          <a:lstStyle/>
+          <a:p>
+            <a:pPr algn="ctr"/>
+          </a:p>
+        </p:txBody>
+      </p:sp>
+      <p:sp>
+        <p:nvSpPr>
+          <p:cNvPr id="24" name="TextBox 23"/>
+          <p:cNvSpPr txBox="1"/>
+          <p:nvPr/>
+        </p:nvSpPr>
+        <p:spPr>
+          <a:xfrm>
+            <a:off x="640080" y="5650992"/>
+            <a:ext cx="10927080" cy="804672"/>
+          </a:xfrm>
+          <a:prstGeom prst="rect">
+            <a:avLst/>
+          </a:prstGeom>
+          <a:noFill/>
+        </p:spPr>
+        <p:txBody>
           <a:bodyPr wrap="square" anchor="ctr" lIns="25400" rIns="25400" tIns="25400" bIns="25400">
             <a:spAutoFit/>
           </a:bodyPr>
@@ -5547,26 +6599,26 @@
           <a:p>
             <a:pPr algn="l">
               <a:lnSpc>
-                <a:spcPct val="114000"/>
+                <a:spcPct val="115000"/>
               </a:lnSpc>
               <a:spcAft>
                 <a:spcPts val="200"/>
               </a:spcAft>
             </a:pPr>
             <a:r>
-              <a:rPr sz="1250" b="1">
+              <a:rPr sz="1200" b="1">
                 <a:solidFill>
                   <a:srgbClr val="9FC4E8"/>
                 </a:solidFill>
                 <a:latin typeface="Apple SD Gothic Neo"/>
               </a:rPr>
-              <a:t>한눈에 보기</a:t>
+              <a:t>쉽게 말하면</a:t>
             </a:r>
           </a:p>
           <a:p>
             <a:pPr algn="l">
               <a:lnSpc>
-                <a:spcPct val="114000"/>
+                <a:spcPct val="115000"/>
               </a:lnSpc>
               <a:spcAft>
                 <a:spcPts val="200"/>
@@ -5579,13 +6631,13 @@
                 </a:solidFill>
                 <a:latin typeface="Apple SD Gothic Neo"/>
               </a:rPr>
-              <a:t>상위 3종(Claude·GPT·Gemini) 지능지수 57~61 — 성능 격차 작음</a:t>
+              <a:t>코딩 = 코드·명령어 잘 다루는지  |  추론 = 머리 쓰는 문제·수학·과학 잘 푸는지</a:t>
             </a:r>
           </a:p>
           <a:p>
             <a:pPr algn="l">
               <a:lnSpc>
-                <a:spcPct val="114000"/>
+                <a:spcPct val="115000"/>
               </a:lnSpc>
               <a:spcAft>
                 <a:spcPts val="200"/>
@@ -5598,14 +6650,14 @@
                 </a:solidFill>
                 <a:latin typeface="Apple SD Gothic Neo"/>
               </a:rPr>
-              <a:t>Grok은 지능지수 53이나 출력가 $2.50/1M — 대량·저비용 작업에 유리</a:t>
-            </a:r>
-          </a:p>
-        </p:txBody>
-      </p:sp>
-      <p:sp>
-        <p:nvSpPr>
-          <p:cNvPr id="19" name="TextBox 18"/>
+              <a:t>한 AI가 모든 시험 1등은 아님 → 우리 팀 업무에 맞는 시험 점수를 보면 됨</a:t>
+            </a:r>
+          </a:p>
+        </p:txBody>
+      </p:sp>
+      <p:sp>
+        <p:nvSpPr>
+          <p:cNvPr id="25" name="TextBox 24"/>
           <p:cNvSpPr txBox="1"/>
           <p:nvPr/>
         </p:nvSpPr>
@@ -5640,7 +6692,7 @@
                 </a:solidFill>
                 <a:latin typeface="Apple SD Gothic Neo"/>
               </a:rPr>
-              <a:t>(2/6)</a:t>
+              <a:t>(2/8)</a:t>
             </a:r>
           </a:p>
         </p:txBody>
@@ -5796,7 +6848,7 @@
                 </a:solidFill>
                 <a:latin typeface="Apple SD Gothic Neo"/>
               </a:rPr>
-              <a:t>NC HW 개발팀  |  외부 AI 4종 벤치마크 비교 (2026.6)</a:t>
+              <a:t>NC HW 개발팀  |  코딩·추론 역량 비교 (2026.6)</a:t>
             </a:r>
           </a:p>
         </p:txBody>
@@ -5832,13 +6884,13 @@
               </a:spcAft>
             </a:pPr>
             <a:r>
-              <a:rPr sz="2300" b="1">
+              <a:rPr sz="2200" b="1">
                 <a:solidFill>
                   <a:srgbClr val="FFFFFF"/>
                 </a:solidFill>
                 <a:latin typeface="Apple SD Gothic Neo"/>
               </a:rPr>
-              <a:t>[방식 B-1] 코딩 역량 — SWE-bench · Terminal-Bench</a:t>
+              <a:t>코딩 ① — 실제 프로그램 고치기</a:t>
             </a:r>
           </a:p>
         </p:txBody>
@@ -5851,8 +6903,8 @@
         </p:nvSpPr>
         <p:spPr>
           <a:xfrm>
-            <a:off x="457200" y="1042415"/>
-            <a:ext cx="11247120" cy="310896"/>
+            <a:off x="457200" y="1024128"/>
+            <a:ext cx="11247120" cy="502920"/>
           </a:xfrm>
           <a:prstGeom prst="rect">
             <a:avLst/>
@@ -5874,13 +6926,32 @@
               </a:spcAft>
             </a:pPr>
             <a:r>
-              <a:rPr sz="1100" b="0">
+              <a:rPr sz="1150" b="0">
                 <a:solidFill>
                   <a:srgbClr val="444A55"/>
                 </a:solidFill>
                 <a:latin typeface="Apple SD Gothic Neo"/>
               </a:rPr>
-              <a:t>실제 소프트웨어·터미널 작업 해결률(%). * GPT SWE Verified·Grok SWE는 근사치</a:t>
+              <a:t>SWE-bench = GitHub에 올라온 진짜 버그를 AI가 고칠 수 있는지 보는 시험</a:t>
+            </a:r>
+          </a:p>
+          <a:p>
+            <a:pPr algn="l">
+              <a:lnSpc>
+                <a:spcPct val="100000"/>
+              </a:lnSpc>
+              <a:spcAft>
+                <a:spcPts val="400"/>
+              </a:spcAft>
+            </a:pPr>
+            <a:r>
+              <a:rPr sz="1150" b="0">
+                <a:solidFill>
+                  <a:srgbClr val="444A55"/>
+                </a:solidFill>
+                <a:latin typeface="Apple SD Gothic Neo"/>
+              </a:rPr>
+              <a:t>Verified = 보통 난이도  |  Pro = 더 어려운 버전 (실무에 더 가까움)</a:t>
             </a:r>
           </a:p>
         </p:txBody>
@@ -5894,8 +6965,8 @@
           <p:nvPr/>
         </p:nvGraphicFramePr>
         <p:xfrm>
-          <a:off x="457200" y="1417320"/>
-          <a:ext cx="11247120" cy="4434840"/>
+          <a:off x="411480" y="1664208"/>
+          <a:ext cx="5440680" cy="3246120"/>
         </p:xfrm>
         <a:graphic>
           <a:graphicData uri="http://schemas.openxmlformats.org/drawingml/2006/chart">
@@ -5903,16 +6974,34 @@
           </a:graphicData>
         </a:graphic>
       </p:graphicFrame>
-      <p:sp>
-        <p:nvSpPr>
-          <p:cNvPr id="8" name="Rounded Rectangle 7"/>
+      <p:graphicFrame>
+        <p:nvGraphicFramePr>
+          <p:cNvPr id="8" name="Chart 7"/>
+          <p:cNvGraphicFramePr>
+            <a:graphicFrameLocks noGrp="1"/>
+          </p:cNvGraphicFramePr>
+          <p:nvPr/>
+        </p:nvGraphicFramePr>
+        <p:xfrm>
+          <a:off x="6263640" y="1664208"/>
+          <a:ext cx="5440680" cy="3246120"/>
+        </p:xfrm>
+        <a:graphic>
+          <a:graphicData uri="http://schemas.openxmlformats.org/drawingml/2006/chart">
+            <c:chart xmlns:c="http://schemas.openxmlformats.org/drawingml/2006/chart" r:id="rId3"/>
+          </a:graphicData>
+        </a:graphic>
+      </p:graphicFrame>
+      <p:sp>
+        <p:nvSpPr>
+          <p:cNvPr id="9" name="Rounded Rectangle 8"/>
           <p:cNvSpPr/>
           <p:nvPr/>
         </p:nvSpPr>
         <p:spPr>
           <a:xfrm>
-            <a:off x="457200" y="5961888"/>
-            <a:ext cx="11292840" cy="658368"/>
+            <a:off x="457200" y="5074920"/>
+            <a:ext cx="11292840" cy="960120"/>
           </a:xfrm>
           <a:prstGeom prst="roundRect">
             <a:avLst/>
@@ -5949,14 +7038,14 @@
       </p:sp>
       <p:sp>
         <p:nvSpPr>
-          <p:cNvPr id="9" name="TextBox 8"/>
+          <p:cNvPr id="10" name="TextBox 9"/>
           <p:cNvSpPr txBox="1"/>
           <p:nvPr/>
         </p:nvSpPr>
         <p:spPr>
           <a:xfrm>
-            <a:off x="658368" y="5961888"/>
-            <a:ext cx="10890504" cy="658368"/>
+            <a:off x="640080" y="5074920"/>
+            <a:ext cx="10927080" cy="960120"/>
           </a:xfrm>
           <a:prstGeom prst="rect">
             <a:avLst/>
@@ -5971,26 +7060,26 @@
           <a:p>
             <a:pPr algn="l">
               <a:lnSpc>
-                <a:spcPct val="114000"/>
+                <a:spcPct val="115000"/>
               </a:lnSpc>
               <a:spcAft>
                 <a:spcPts val="200"/>
               </a:spcAft>
             </a:pPr>
             <a:r>
-              <a:rPr sz="1250" b="1">
+              <a:rPr sz="1200" b="1">
                 <a:solidFill>
                   <a:srgbClr val="9FC4E8"/>
                 </a:solidFill>
                 <a:latin typeface="Apple SD Gothic Neo"/>
               </a:rPr>
-              <a:t>코딩 우위</a:t>
+              <a:t>코딩 ① 결론</a:t>
             </a:r>
           </a:p>
           <a:p>
             <a:pPr algn="l">
               <a:lnSpc>
-                <a:spcPct val="114000"/>
+                <a:spcPct val="115000"/>
               </a:lnSpc>
               <a:spcAft>
                 <a:spcPts val="200"/>
@@ -6003,13 +7092,13 @@
                 </a:solidFill>
                 <a:latin typeface="Apple SD Gothic Neo"/>
               </a:rPr>
-              <a:t>SWE-bench(일반 코딩): Claude 1위  |  Terminal-Bench(터미널): GPT 1위</a:t>
+              <a:t>보통·어려운 버그 고치기 모두 Claude 1위 (88.6% → 69.2%)</a:t>
             </a:r>
           </a:p>
           <a:p>
             <a:pPr algn="l">
               <a:lnSpc>
-                <a:spcPct val="114000"/>
+                <a:spcPct val="115000"/>
               </a:lnSpc>
               <a:spcAft>
                 <a:spcPts val="200"/>
@@ -6022,14 +7111,14 @@
                 </a:solidFill>
                 <a:latin typeface="Apple SD Gothic Neo"/>
               </a:rPr>
-              <a:t>Grok·SWE Pro 미공개 구간은 차트에서 0 처리</a:t>
-            </a:r>
-          </a:p>
-        </p:txBody>
-      </p:sp>
-      <p:sp>
-        <p:nvSpPr>
-          <p:cNvPr id="10" name="TextBox 9"/>
+              <a:t>GPT·Gemini도 50% 넘음 = 쓸 만한 수준  |  실무 코드 수정은 Claude가 가장 유리</a:t>
+            </a:r>
+          </a:p>
+        </p:txBody>
+      </p:sp>
+      <p:sp>
+        <p:nvSpPr>
+          <p:cNvPr id="11" name="TextBox 10"/>
           <p:cNvSpPr txBox="1"/>
           <p:nvPr/>
         </p:nvSpPr>
@@ -6064,7 +7153,7 @@
                 </a:solidFill>
                 <a:latin typeface="Apple SD Gothic Neo"/>
               </a:rPr>
-              <a:t>(3/6)</a:t>
+              <a:t>(3/8)</a:t>
             </a:r>
           </a:p>
         </p:txBody>
@@ -6220,7 +7309,7 @@
                 </a:solidFill>
                 <a:latin typeface="Apple SD Gothic Neo"/>
               </a:rPr>
-              <a:t>NC HW 개발팀  |  외부 AI 4종 벤치마크 비교 (2026.6)</a:t>
+              <a:t>NC HW 개발팀  |  코딩·추론 역량 비교 (2026.6)</a:t>
             </a:r>
           </a:p>
         </p:txBody>
@@ -6256,13 +7345,13 @@
               </a:spcAft>
             </a:pPr>
             <a:r>
-              <a:rPr sz="2300" b="1">
+              <a:rPr sz="2200" b="1">
                 <a:solidFill>
                   <a:srgbClr val="FFFFFF"/>
                 </a:solidFill>
                 <a:latin typeface="Apple SD Gothic Neo"/>
               </a:rPr>
-              <a:t>[방식 B-2] 추론 · 과학 지식 — GPQA · HLE</a:t>
+              <a:t>코딩 ② — 터미널·컴퓨터 직접 조작</a:t>
             </a:r>
           </a:p>
         </p:txBody>
@@ -6275,8 +7364,8 @@
         </p:nvSpPr>
         <p:spPr>
           <a:xfrm>
-            <a:off x="457200" y="1042415"/>
-            <a:ext cx="11247120" cy="310896"/>
+            <a:off x="457200" y="1024128"/>
+            <a:ext cx="11247120" cy="502920"/>
           </a:xfrm>
           <a:prstGeom prst="rect">
             <a:avLst/>
@@ -6298,13 +7387,32 @@
               </a:spcAft>
             </a:pPr>
             <a:r>
-              <a:rPr sz="1100" b="0">
+              <a:rPr sz="1150" b="0">
                 <a:solidFill>
                   <a:srgbClr val="444A55"/>
                 </a:solidFill>
                 <a:latin typeface="Apple SD Gothic Neo"/>
               </a:rPr>
-              <a:t>GPQA는 상위권 포화(90%대) → HLE(최난도)가 실질 변별 지표. * Grok HLE 근사치</a:t>
+              <a:t>Terminal-Bench = 명령어(터미널)로 서버·스크립트 조작 시험</a:t>
+            </a:r>
+          </a:p>
+          <a:p>
+            <a:pPr algn="l">
+              <a:lnSpc>
+                <a:spcPct val="100000"/>
+              </a:lnSpc>
+              <a:spcAft>
+                <a:spcPts val="400"/>
+              </a:spcAft>
+            </a:pPr>
+            <a:r>
+              <a:rPr sz="1150" b="0">
+                <a:solidFill>
+                  <a:srgbClr val="444A55"/>
+                </a:solidFill>
+                <a:latin typeface="Apple SD Gothic Neo"/>
+              </a:rPr>
+              <a:t>OSWorld = 마우스·키보드로 PC 화면을 직접 조작하는 시험 (자동화·RPA)</a:t>
             </a:r>
           </a:p>
         </p:txBody>
@@ -6318,8 +7426,8 @@
           <p:nvPr/>
         </p:nvGraphicFramePr>
         <p:xfrm>
-          <a:off x="457200" y="1417320"/>
-          <a:ext cx="7132320" cy="4434840"/>
+          <a:off x="411480" y="1664208"/>
+          <a:ext cx="5440680" cy="3246120"/>
         </p:xfrm>
         <a:graphic>
           <a:graphicData uri="http://schemas.openxmlformats.org/drawingml/2006/chart">
@@ -6336,8 +7444,8 @@
           <p:nvPr/>
         </p:nvGraphicFramePr>
         <p:xfrm>
-          <a:off x="7818120" y="1417320"/>
-          <a:ext cx="3886200" cy="4434840"/>
+          <a:off x="6263640" y="1664208"/>
+          <a:ext cx="5440680" cy="3246120"/>
         </p:xfrm>
         <a:graphic>
           <a:graphicData uri="http://schemas.openxmlformats.org/drawingml/2006/chart">
@@ -6353,8 +7461,8 @@
         </p:nvSpPr>
         <p:spPr>
           <a:xfrm>
-            <a:off x="457200" y="5961888"/>
-            <a:ext cx="11292840" cy="658368"/>
+            <a:off x="457200" y="5074920"/>
+            <a:ext cx="11292840" cy="960120"/>
           </a:xfrm>
           <a:prstGeom prst="roundRect">
             <a:avLst/>
@@ -6397,8 +7505,8 @@
         </p:nvSpPr>
         <p:spPr>
           <a:xfrm>
-            <a:off x="658368" y="5961888"/>
-            <a:ext cx="10890504" cy="658368"/>
+            <a:off x="640080" y="5074920"/>
+            <a:ext cx="10927080" cy="960120"/>
           </a:xfrm>
           <a:prstGeom prst="rect">
             <a:avLst/>
@@ -6413,26 +7521,26 @@
           <a:p>
             <a:pPr algn="l">
               <a:lnSpc>
-                <a:spcPct val="114000"/>
+                <a:spcPct val="115000"/>
               </a:lnSpc>
               <a:spcAft>
                 <a:spcPts val="200"/>
               </a:spcAft>
             </a:pPr>
             <a:r>
-              <a:rPr sz="1250" b="1">
+              <a:rPr sz="1200" b="1">
                 <a:solidFill>
                   <a:srgbClr val="9FC4E8"/>
                 </a:solidFill>
                 <a:latin typeface="Apple SD Gothic Neo"/>
               </a:rPr>
-              <a:t>추론·에이전트</a:t>
+              <a:t>코딩 ② 결론</a:t>
             </a:r>
           </a:p>
           <a:p>
             <a:pPr algn="l">
               <a:lnSpc>
-                <a:spcPct val="114000"/>
+                <a:spcPct val="115000"/>
               </a:lnSpc>
               <a:spcAft>
                 <a:spcPts val="200"/>
@@ -6445,13 +7553,13 @@
                 </a:solidFill>
                 <a:latin typeface="Apple SD Gothic Neo"/>
               </a:rPr>
-              <a:t>과학(GPQA): Gemini 1위  |  최난도 추론(HLE): Grok·Claude 상위</a:t>
+              <a:t>명령어·스크립트 작업 → GPT 1위 (78.2%)</a:t>
             </a:r>
           </a:p>
           <a:p>
             <a:pPr algn="l">
               <a:lnSpc>
-                <a:spcPct val="114000"/>
+                <a:spcPct val="115000"/>
               </a:lnSpc>
               <a:spcAft>
                 <a:spcPts val="200"/>
@@ -6464,7 +7572,7 @@
                 </a:solidFill>
                 <a:latin typeface="Apple SD Gothic Neo"/>
               </a:rPr>
-              <a:t>에이전트(GDPval): Grok 1500 Elo — 저비용 다단계 작업 강점</a:t>
+              <a:t>PC 화면 직접 조작 → Claude 1위 (83.4%)  |  HW팀: 터미널·자동화는 GPT, GUI 작업은 Claude</a:t>
             </a:r>
           </a:p>
         </p:txBody>
@@ -6506,7 +7614,7 @@
                 </a:solidFill>
                 <a:latin typeface="Apple SD Gothic Neo"/>
               </a:rPr>
-              <a:t>(4/6)</a:t>
+              <a:t>(4/8)</a:t>
             </a:r>
           </a:p>
         </p:txBody>
@@ -6662,7 +7770,7 @@
                 </a:solidFill>
                 <a:latin typeface="Apple SD Gothic Neo"/>
               </a:rPr>
-              <a:t>NC HW 개발팀  |  외부 AI 4종 벤치마크 비교 (2026.6)</a:t>
+              <a:t>NC HW 개발팀  |  코딩·추론 역량 비교 (2026.6)</a:t>
             </a:r>
           </a:p>
         </p:txBody>
@@ -6698,13 +7806,13 @@
               </a:spcAft>
             </a:pPr>
             <a:r>
-              <a:rPr sz="2300" b="1">
+              <a:rPr sz="2200" b="1">
                 <a:solidFill>
                   <a:srgbClr val="FFFFFF"/>
                 </a:solidFill>
                 <a:latin typeface="Apple SD Gothic Neo"/>
               </a:rPr>
-              <a:t>성능 vs 비용 — 도입 관점 요약</a:t>
+              <a:t>추론 ① — 과학 퀴즈 · 최난도 생각력</a:t>
             </a:r>
           </a:p>
         </p:txBody>
@@ -6717,8 +7825,8 @@
         </p:nvSpPr>
         <p:spPr>
           <a:xfrm>
-            <a:off x="457200" y="1042415"/>
-            <a:ext cx="11247120" cy="310896"/>
+            <a:off x="457200" y="1024128"/>
+            <a:ext cx="11247120" cy="502920"/>
           </a:xfrm>
           <a:prstGeom prst="rect">
             <a:avLst/>
@@ -6740,13 +7848,32 @@
               </a:spcAft>
             </a:pPr>
             <a:r>
-              <a:rPr sz="1100" b="0">
+              <a:rPr sz="1150" b="0">
                 <a:solidFill>
                   <a:srgbClr val="444A55"/>
                 </a:solidFill>
                 <a:latin typeface="Apple SD Gothic Neo"/>
               </a:rPr>
-              <a:t>종합 지능지수(성능)와 출력 API 단가(비용)를 동일 축에서 비교 — 우상단=고성능·고비용</a:t>
+              <a:t>GPQA = 대학원 수준 과학(물리·화학·생물) 퀴즈 — 상위권은 90%대로 비슷함</a:t>
+            </a:r>
+          </a:p>
+          <a:p>
+            <a:pPr algn="l">
+              <a:lnSpc>
+                <a:spcPct val="100000"/>
+              </a:lnSpc>
+              <a:spcAft>
+                <a:spcPts val="400"/>
+              </a:spcAft>
+            </a:pPr>
+            <a:r>
+              <a:rPr sz="1150" b="0">
+                <a:solidFill>
+                  <a:srgbClr val="444A55"/>
+                </a:solidFill>
+                <a:latin typeface="Apple SD Gothic Neo"/>
+              </a:rPr>
+              <a:t>HLE = '인류 최후의 시험' — 도구 없이 혼자 푸는 초난도 종합 사고 시험</a:t>
             </a:r>
           </a:p>
         </p:txBody>
@@ -6760,8 +7887,8 @@
           <p:nvPr/>
         </p:nvGraphicFramePr>
         <p:xfrm>
-          <a:off x="457200" y="1417320"/>
-          <a:ext cx="6858000" cy="4480560"/>
+          <a:off x="411480" y="1664208"/>
+          <a:ext cx="5440680" cy="3246120"/>
         </p:xfrm>
         <a:graphic>
           <a:graphicData uri="http://schemas.openxmlformats.org/drawingml/2006/chart">
@@ -6769,27 +7896,43 @@
           </a:graphicData>
         </a:graphic>
       </p:graphicFrame>
-      <p:sp>
-        <p:nvSpPr>
-          <p:cNvPr id="8" name="Rounded Rectangle 7"/>
+      <p:graphicFrame>
+        <p:nvGraphicFramePr>
+          <p:cNvPr id="8" name="Chart 7"/>
+          <p:cNvGraphicFramePr>
+            <a:graphicFrameLocks noGrp="1"/>
+          </p:cNvGraphicFramePr>
+          <p:nvPr/>
+        </p:nvGraphicFramePr>
+        <p:xfrm>
+          <a:off x="6263640" y="1664208"/>
+          <a:ext cx="5440680" cy="3246120"/>
+        </p:xfrm>
+        <a:graphic>
+          <a:graphicData uri="http://schemas.openxmlformats.org/drawingml/2006/chart">
+            <c:chart xmlns:c="http://schemas.openxmlformats.org/drawingml/2006/chart" r:id="rId3"/>
+          </a:graphicData>
+        </a:graphic>
+      </p:graphicFrame>
+      <p:sp>
+        <p:nvSpPr>
+          <p:cNvPr id="9" name="Rounded Rectangle 8"/>
           <p:cNvSpPr/>
           <p:nvPr/>
         </p:nvSpPr>
         <p:spPr>
           <a:xfrm>
-            <a:off x="7635240" y="1572768"/>
-            <a:ext cx="2148840" cy="1965960"/>
+            <a:off x="457200" y="5074920"/>
+            <a:ext cx="11292840" cy="960120"/>
           </a:xfrm>
           <a:prstGeom prst="roundRect">
             <a:avLst/>
           </a:prstGeom>
           <a:solidFill>
-            <a:srgbClr val="E8F1FA"/>
+            <a:srgbClr val="142A4A"/>
           </a:solidFill>
-          <a:ln w="25400">
-            <a:solidFill>
-              <a:srgbClr val="D4774A"/>
-            </a:solidFill>
+          <a:ln>
+            <a:noFill/>
           </a:ln>
           <a:effectLst/>
         </p:spPr>
@@ -6817,58 +7960,14 @@
       </p:sp>
       <p:sp>
         <p:nvSpPr>
-          <p:cNvPr id="9" name="Rectangle 8"/>
-          <p:cNvSpPr/>
-          <p:nvPr/>
-        </p:nvSpPr>
-        <p:spPr>
-          <a:xfrm>
-            <a:off x="7772400" y="1709928"/>
-            <a:ext cx="502920" cy="50800"/>
-          </a:xfrm>
-          <a:prstGeom prst="rect">
-            <a:avLst/>
-          </a:prstGeom>
-          <a:solidFill>
-            <a:srgbClr val="D4774A"/>
-          </a:solidFill>
-          <a:ln>
-            <a:noFill/>
-          </a:ln>
-          <a:effectLst/>
-        </p:spPr>
-        <p:style>
-          <a:lnRef idx="1">
-            <a:schemeClr val="accent1"/>
-          </a:lnRef>
-          <a:fillRef idx="3">
-            <a:schemeClr val="accent1"/>
-          </a:fillRef>
-          <a:effectRef idx="2">
-            <a:schemeClr val="accent1"/>
-          </a:effectRef>
-          <a:fontRef idx="minor">
-            <a:schemeClr val="lt1"/>
-          </a:fontRef>
-        </p:style>
-        <p:txBody>
-          <a:bodyPr rtlCol="0" anchor="ctr"/>
-          <a:lstStyle/>
-          <a:p>
-            <a:pPr algn="ctr"/>
-          </a:p>
-        </p:txBody>
-      </p:sp>
-      <p:sp>
-        <p:nvSpPr>
           <p:cNvPr id="10" name="TextBox 9"/>
           <p:cNvSpPr txBox="1"/>
           <p:nvPr/>
         </p:nvSpPr>
         <p:spPr>
           <a:xfrm>
-            <a:off x="7772400" y="1828800"/>
-            <a:ext cx="1874519" cy="320040"/>
+            <a:off x="640080" y="5074920"/>
+            <a:ext cx="10927080" cy="960120"/>
           </a:xfrm>
           <a:prstGeom prst="rect">
             <a:avLst/>
@@ -6876,736 +7975,6 @@
           <a:noFill/>
         </p:spPr>
         <p:txBody>
-          <a:bodyPr wrap="square" anchor="t" lIns="25400" rIns="25400" tIns="25400" bIns="25400">
-            <a:spAutoFit/>
-          </a:bodyPr>
-          <a:lstStyle/>
-          <a:p>
-            <a:pPr algn="l">
-              <a:lnSpc>
-                <a:spcPct val="100000"/>
-              </a:lnSpc>
-              <a:spcAft>
-                <a:spcPts val="400"/>
-              </a:spcAft>
-            </a:pPr>
-            <a:r>
-              <a:rPr sz="1150" b="1">
-                <a:solidFill>
-                  <a:srgbClr val="142A4A"/>
-                </a:solidFill>
-                <a:latin typeface="Apple SD Gothic Neo"/>
-              </a:rPr>
-              <a:t>Claude Opus 4.8</a:t>
-            </a:r>
-          </a:p>
-        </p:txBody>
-      </p:sp>
-      <p:sp>
-        <p:nvSpPr>
-          <p:cNvPr id="11" name="TextBox 10"/>
-          <p:cNvSpPr txBox="1"/>
-          <p:nvPr/>
-        </p:nvSpPr>
-        <p:spPr>
-          <a:xfrm>
-            <a:off x="7772400" y="2231136"/>
-            <a:ext cx="1874519" cy="822960"/>
-          </a:xfrm>
-          <a:prstGeom prst="rect">
-            <a:avLst/>
-          </a:prstGeom>
-          <a:noFill/>
-        </p:spPr>
-        <p:txBody>
-          <a:bodyPr wrap="square" anchor="t" lIns="25400" rIns="25400" tIns="25400" bIns="25400">
-            <a:spAutoFit/>
-          </a:bodyPr>
-          <a:lstStyle/>
-          <a:p>
-            <a:pPr algn="l">
-              <a:lnSpc>
-                <a:spcPct val="120000"/>
-              </a:lnSpc>
-              <a:spcAft>
-                <a:spcPts val="400"/>
-              </a:spcAft>
-            </a:pPr>
-            <a:r>
-              <a:rPr sz="1100" b="1">
-                <a:solidFill>
-                  <a:srgbClr val="444A55"/>
-                </a:solidFill>
-                <a:latin typeface="Apple SD Gothic Neo"/>
-              </a:rPr>
-              <a:t>코딩·에이전트
-최상위</a:t>
-            </a:r>
-          </a:p>
-          <a:p>
-            <a:pPr algn="l">
-              <a:lnSpc>
-                <a:spcPct val="120000"/>
-              </a:lnSpc>
-              <a:spcAft>
-                <a:spcPts val="400"/>
-              </a:spcAft>
-            </a:pPr>
-            <a:r>
-              <a:rPr sz="1000" b="0">
-                <a:solidFill>
-                  <a:srgbClr val="D4774A"/>
-                </a:solidFill>
-                <a:latin typeface="Apple SD Gothic Neo"/>
-              </a:rPr>
-              <a:t>고성능·고비용</a:t>
-            </a:r>
-          </a:p>
-        </p:txBody>
-      </p:sp>
-      <p:sp>
-        <p:nvSpPr>
-          <p:cNvPr id="12" name="Rounded Rectangle 11"/>
-          <p:cNvSpPr/>
-          <p:nvPr/>
-        </p:nvSpPr>
-        <p:spPr>
-          <a:xfrm>
-            <a:off x="9966960" y="1572768"/>
-            <a:ext cx="2148840" cy="1965960"/>
-          </a:xfrm>
-          <a:prstGeom prst="roundRect">
-            <a:avLst/>
-          </a:prstGeom>
-          <a:solidFill>
-            <a:srgbClr val="E8F1FA"/>
-          </a:solidFill>
-          <a:ln w="25400">
-            <a:solidFill>
-              <a:srgbClr val="10A37A"/>
-            </a:solidFill>
-          </a:ln>
-          <a:effectLst/>
-        </p:spPr>
-        <p:style>
-          <a:lnRef idx="1">
-            <a:schemeClr val="accent1"/>
-          </a:lnRef>
-          <a:fillRef idx="3">
-            <a:schemeClr val="accent1"/>
-          </a:fillRef>
-          <a:effectRef idx="2">
-            <a:schemeClr val="accent1"/>
-          </a:effectRef>
-          <a:fontRef idx="minor">
-            <a:schemeClr val="lt1"/>
-          </a:fontRef>
-        </p:style>
-        <p:txBody>
-          <a:bodyPr rtlCol="0" anchor="ctr"/>
-          <a:lstStyle/>
-          <a:p>
-            <a:pPr algn="ctr"/>
-          </a:p>
-        </p:txBody>
-      </p:sp>
-      <p:sp>
-        <p:nvSpPr>
-          <p:cNvPr id="13" name="Rectangle 12"/>
-          <p:cNvSpPr/>
-          <p:nvPr/>
-        </p:nvSpPr>
-        <p:spPr>
-          <a:xfrm>
-            <a:off x="10104120" y="1709928"/>
-            <a:ext cx="502920" cy="50800"/>
-          </a:xfrm>
-          <a:prstGeom prst="rect">
-            <a:avLst/>
-          </a:prstGeom>
-          <a:solidFill>
-            <a:srgbClr val="10A37A"/>
-          </a:solidFill>
-          <a:ln>
-            <a:noFill/>
-          </a:ln>
-          <a:effectLst/>
-        </p:spPr>
-        <p:style>
-          <a:lnRef idx="1">
-            <a:schemeClr val="accent1"/>
-          </a:lnRef>
-          <a:fillRef idx="3">
-            <a:schemeClr val="accent1"/>
-          </a:fillRef>
-          <a:effectRef idx="2">
-            <a:schemeClr val="accent1"/>
-          </a:effectRef>
-          <a:fontRef idx="minor">
-            <a:schemeClr val="lt1"/>
-          </a:fontRef>
-        </p:style>
-        <p:txBody>
-          <a:bodyPr rtlCol="0" anchor="ctr"/>
-          <a:lstStyle/>
-          <a:p>
-            <a:pPr algn="ctr"/>
-          </a:p>
-        </p:txBody>
-      </p:sp>
-      <p:sp>
-        <p:nvSpPr>
-          <p:cNvPr id="14" name="TextBox 13"/>
-          <p:cNvSpPr txBox="1"/>
-          <p:nvPr/>
-        </p:nvSpPr>
-        <p:spPr>
-          <a:xfrm>
-            <a:off x="10104120" y="1828800"/>
-            <a:ext cx="1874519" cy="320040"/>
-          </a:xfrm>
-          <a:prstGeom prst="rect">
-            <a:avLst/>
-          </a:prstGeom>
-          <a:noFill/>
-        </p:spPr>
-        <p:txBody>
-          <a:bodyPr wrap="square" anchor="t" lIns="25400" rIns="25400" tIns="25400" bIns="25400">
-            <a:spAutoFit/>
-          </a:bodyPr>
-          <a:lstStyle/>
-          <a:p>
-            <a:pPr algn="l">
-              <a:lnSpc>
-                <a:spcPct val="100000"/>
-              </a:lnSpc>
-              <a:spcAft>
-                <a:spcPts val="400"/>
-              </a:spcAft>
-            </a:pPr>
-            <a:r>
-              <a:rPr sz="1150" b="1">
-                <a:solidFill>
-                  <a:srgbClr val="142A4A"/>
-                </a:solidFill>
-                <a:latin typeface="Apple SD Gothic Neo"/>
-              </a:rPr>
-              <a:t>GPT-5.5</a:t>
-            </a:r>
-          </a:p>
-        </p:txBody>
-      </p:sp>
-      <p:sp>
-        <p:nvSpPr>
-          <p:cNvPr id="15" name="TextBox 14"/>
-          <p:cNvSpPr txBox="1"/>
-          <p:nvPr/>
-        </p:nvSpPr>
-        <p:spPr>
-          <a:xfrm>
-            <a:off x="10104120" y="2231136"/>
-            <a:ext cx="1874519" cy="822960"/>
-          </a:xfrm>
-          <a:prstGeom prst="rect">
-            <a:avLst/>
-          </a:prstGeom>
-          <a:noFill/>
-        </p:spPr>
-        <p:txBody>
-          <a:bodyPr wrap="square" anchor="t" lIns="25400" rIns="25400" tIns="25400" bIns="25400">
-            <a:spAutoFit/>
-          </a:bodyPr>
-          <a:lstStyle/>
-          <a:p>
-            <a:pPr algn="l">
-              <a:lnSpc>
-                <a:spcPct val="120000"/>
-              </a:lnSpc>
-              <a:spcAft>
-                <a:spcPts val="400"/>
-              </a:spcAft>
-            </a:pPr>
-            <a:r>
-              <a:rPr sz="1100" b="1">
-                <a:solidFill>
-                  <a:srgbClr val="444A55"/>
-                </a:solidFill>
-                <a:latin typeface="Apple SD Gothic Neo"/>
-              </a:rPr>
-              <a:t>터미널·범용
-코딩</a:t>
-            </a:r>
-          </a:p>
-          <a:p>
-            <a:pPr algn="l">
-              <a:lnSpc>
-                <a:spcPct val="120000"/>
-              </a:lnSpc>
-              <a:spcAft>
-                <a:spcPts val="400"/>
-              </a:spcAft>
-            </a:pPr>
-            <a:r>
-              <a:rPr sz="1000" b="0">
-                <a:solidFill>
-                  <a:srgbClr val="10A37A"/>
-                </a:solidFill>
-                <a:latin typeface="Apple SD Gothic Neo"/>
-              </a:rPr>
-              <a:t>고성능·최고비용</a:t>
-            </a:r>
-          </a:p>
-        </p:txBody>
-      </p:sp>
-      <p:sp>
-        <p:nvSpPr>
-          <p:cNvPr id="16" name="Rounded Rectangle 15"/>
-          <p:cNvSpPr/>
-          <p:nvPr/>
-        </p:nvSpPr>
-        <p:spPr>
-          <a:xfrm>
-            <a:off x="7635240" y="3813048"/>
-            <a:ext cx="2148840" cy="1965960"/>
-          </a:xfrm>
-          <a:prstGeom prst="roundRect">
-            <a:avLst/>
-          </a:prstGeom>
-          <a:solidFill>
-            <a:srgbClr val="E8F1FA"/>
-          </a:solidFill>
-          <a:ln w="25400">
-            <a:solidFill>
-              <a:srgbClr val="4285F4"/>
-            </a:solidFill>
-          </a:ln>
-          <a:effectLst/>
-        </p:spPr>
-        <p:style>
-          <a:lnRef idx="1">
-            <a:schemeClr val="accent1"/>
-          </a:lnRef>
-          <a:fillRef idx="3">
-            <a:schemeClr val="accent1"/>
-          </a:fillRef>
-          <a:effectRef idx="2">
-            <a:schemeClr val="accent1"/>
-          </a:effectRef>
-          <a:fontRef idx="minor">
-            <a:schemeClr val="lt1"/>
-          </a:fontRef>
-        </p:style>
-        <p:txBody>
-          <a:bodyPr rtlCol="0" anchor="ctr"/>
-          <a:lstStyle/>
-          <a:p>
-            <a:pPr algn="ctr"/>
-          </a:p>
-        </p:txBody>
-      </p:sp>
-      <p:sp>
-        <p:nvSpPr>
-          <p:cNvPr id="17" name="Rectangle 16"/>
-          <p:cNvSpPr/>
-          <p:nvPr/>
-        </p:nvSpPr>
-        <p:spPr>
-          <a:xfrm>
-            <a:off x="7772400" y="3950208"/>
-            <a:ext cx="502920" cy="50800"/>
-          </a:xfrm>
-          <a:prstGeom prst="rect">
-            <a:avLst/>
-          </a:prstGeom>
-          <a:solidFill>
-            <a:srgbClr val="4285F4"/>
-          </a:solidFill>
-          <a:ln>
-            <a:noFill/>
-          </a:ln>
-          <a:effectLst/>
-        </p:spPr>
-        <p:style>
-          <a:lnRef idx="1">
-            <a:schemeClr val="accent1"/>
-          </a:lnRef>
-          <a:fillRef idx="3">
-            <a:schemeClr val="accent1"/>
-          </a:fillRef>
-          <a:effectRef idx="2">
-            <a:schemeClr val="accent1"/>
-          </a:effectRef>
-          <a:fontRef idx="minor">
-            <a:schemeClr val="lt1"/>
-          </a:fontRef>
-        </p:style>
-        <p:txBody>
-          <a:bodyPr rtlCol="0" anchor="ctr"/>
-          <a:lstStyle/>
-          <a:p>
-            <a:pPr algn="ctr"/>
-          </a:p>
-        </p:txBody>
-      </p:sp>
-      <p:sp>
-        <p:nvSpPr>
-          <p:cNvPr id="18" name="TextBox 17"/>
-          <p:cNvSpPr txBox="1"/>
-          <p:nvPr/>
-        </p:nvSpPr>
-        <p:spPr>
-          <a:xfrm>
-            <a:off x="7772400" y="4069080"/>
-            <a:ext cx="1874519" cy="320040"/>
-          </a:xfrm>
-          <a:prstGeom prst="rect">
-            <a:avLst/>
-          </a:prstGeom>
-          <a:noFill/>
-        </p:spPr>
-        <p:txBody>
-          <a:bodyPr wrap="square" anchor="t" lIns="25400" rIns="25400" tIns="25400" bIns="25400">
-            <a:spAutoFit/>
-          </a:bodyPr>
-          <a:lstStyle/>
-          <a:p>
-            <a:pPr algn="l">
-              <a:lnSpc>
-                <a:spcPct val="100000"/>
-              </a:lnSpc>
-              <a:spcAft>
-                <a:spcPts val="400"/>
-              </a:spcAft>
-            </a:pPr>
-            <a:r>
-              <a:rPr sz="1150" b="1">
-                <a:solidFill>
-                  <a:srgbClr val="142A4A"/>
-                </a:solidFill>
-                <a:latin typeface="Apple SD Gothic Neo"/>
-              </a:rPr>
-              <a:t>Gemini 3.1 Pro</a:t>
-            </a:r>
-          </a:p>
-        </p:txBody>
-      </p:sp>
-      <p:sp>
-        <p:nvSpPr>
-          <p:cNvPr id="19" name="TextBox 18"/>
-          <p:cNvSpPr txBox="1"/>
-          <p:nvPr/>
-        </p:nvSpPr>
-        <p:spPr>
-          <a:xfrm>
-            <a:off x="7772400" y="4471416"/>
-            <a:ext cx="1874519" cy="822960"/>
-          </a:xfrm>
-          <a:prstGeom prst="rect">
-            <a:avLst/>
-          </a:prstGeom>
-          <a:noFill/>
-        </p:spPr>
-        <p:txBody>
-          <a:bodyPr wrap="square" anchor="t" lIns="25400" rIns="25400" tIns="25400" bIns="25400">
-            <a:spAutoFit/>
-          </a:bodyPr>
-          <a:lstStyle/>
-          <a:p>
-            <a:pPr algn="l">
-              <a:lnSpc>
-                <a:spcPct val="120000"/>
-              </a:lnSpc>
-              <a:spcAft>
-                <a:spcPts val="400"/>
-              </a:spcAft>
-            </a:pPr>
-            <a:r>
-              <a:rPr sz="1100" b="1">
-                <a:solidFill>
-                  <a:srgbClr val="444A55"/>
-                </a:solidFill>
-                <a:latin typeface="Apple SD Gothic Neo"/>
-              </a:rPr>
-              <a:t>과학추론·
-가성비</a:t>
-            </a:r>
-          </a:p>
-          <a:p>
-            <a:pPr algn="l">
-              <a:lnSpc>
-                <a:spcPct val="120000"/>
-              </a:lnSpc>
-              <a:spcAft>
-                <a:spcPts val="400"/>
-              </a:spcAft>
-            </a:pPr>
-            <a:r>
-              <a:rPr sz="1000" b="0">
-                <a:solidFill>
-                  <a:srgbClr val="4285F4"/>
-                </a:solidFill>
-                <a:latin typeface="Apple SD Gothic Neo"/>
-              </a:rPr>
-              <a:t>중간성능·중간비용</a:t>
-            </a:r>
-          </a:p>
-        </p:txBody>
-      </p:sp>
-      <p:sp>
-        <p:nvSpPr>
-          <p:cNvPr id="20" name="Rounded Rectangle 19"/>
-          <p:cNvSpPr/>
-          <p:nvPr/>
-        </p:nvSpPr>
-        <p:spPr>
-          <a:xfrm>
-            <a:off x="9966960" y="3813048"/>
-            <a:ext cx="2148840" cy="1965960"/>
-          </a:xfrm>
-          <a:prstGeom prst="roundRect">
-            <a:avLst/>
-          </a:prstGeom>
-          <a:solidFill>
-            <a:srgbClr val="E8F1FA"/>
-          </a:solidFill>
-          <a:ln w="25400">
-            <a:solidFill>
-              <a:srgbClr val="6B7B8C"/>
-            </a:solidFill>
-          </a:ln>
-          <a:effectLst/>
-        </p:spPr>
-        <p:style>
-          <a:lnRef idx="1">
-            <a:schemeClr val="accent1"/>
-          </a:lnRef>
-          <a:fillRef idx="3">
-            <a:schemeClr val="accent1"/>
-          </a:fillRef>
-          <a:effectRef idx="2">
-            <a:schemeClr val="accent1"/>
-          </a:effectRef>
-          <a:fontRef idx="minor">
-            <a:schemeClr val="lt1"/>
-          </a:fontRef>
-        </p:style>
-        <p:txBody>
-          <a:bodyPr rtlCol="0" anchor="ctr"/>
-          <a:lstStyle/>
-          <a:p>
-            <a:pPr algn="ctr"/>
-          </a:p>
-        </p:txBody>
-      </p:sp>
-      <p:sp>
-        <p:nvSpPr>
-          <p:cNvPr id="21" name="Rectangle 20"/>
-          <p:cNvSpPr/>
-          <p:nvPr/>
-        </p:nvSpPr>
-        <p:spPr>
-          <a:xfrm>
-            <a:off x="10104120" y="3950208"/>
-            <a:ext cx="502920" cy="50800"/>
-          </a:xfrm>
-          <a:prstGeom prst="rect">
-            <a:avLst/>
-          </a:prstGeom>
-          <a:solidFill>
-            <a:srgbClr val="6B7B8C"/>
-          </a:solidFill>
-          <a:ln>
-            <a:noFill/>
-          </a:ln>
-          <a:effectLst/>
-        </p:spPr>
-        <p:style>
-          <a:lnRef idx="1">
-            <a:schemeClr val="accent1"/>
-          </a:lnRef>
-          <a:fillRef idx="3">
-            <a:schemeClr val="accent1"/>
-          </a:fillRef>
-          <a:effectRef idx="2">
-            <a:schemeClr val="accent1"/>
-          </a:effectRef>
-          <a:fontRef idx="minor">
-            <a:schemeClr val="lt1"/>
-          </a:fontRef>
-        </p:style>
-        <p:txBody>
-          <a:bodyPr rtlCol="0" anchor="ctr"/>
-          <a:lstStyle/>
-          <a:p>
-            <a:pPr algn="ctr"/>
-          </a:p>
-        </p:txBody>
-      </p:sp>
-      <p:sp>
-        <p:nvSpPr>
-          <p:cNvPr id="22" name="TextBox 21"/>
-          <p:cNvSpPr txBox="1"/>
-          <p:nvPr/>
-        </p:nvSpPr>
-        <p:spPr>
-          <a:xfrm>
-            <a:off x="10104120" y="4069080"/>
-            <a:ext cx="1874519" cy="320040"/>
-          </a:xfrm>
-          <a:prstGeom prst="rect">
-            <a:avLst/>
-          </a:prstGeom>
-          <a:noFill/>
-        </p:spPr>
-        <p:txBody>
-          <a:bodyPr wrap="square" anchor="t" lIns="25400" rIns="25400" tIns="25400" bIns="25400">
-            <a:spAutoFit/>
-          </a:bodyPr>
-          <a:lstStyle/>
-          <a:p>
-            <a:pPr algn="l">
-              <a:lnSpc>
-                <a:spcPct val="100000"/>
-              </a:lnSpc>
-              <a:spcAft>
-                <a:spcPts val="400"/>
-              </a:spcAft>
-            </a:pPr>
-            <a:r>
-              <a:rPr sz="1150" b="1">
-                <a:solidFill>
-                  <a:srgbClr val="142A4A"/>
-                </a:solidFill>
-                <a:latin typeface="Apple SD Gothic Neo"/>
-              </a:rPr>
-              <a:t>Grok 4.3</a:t>
-            </a:r>
-          </a:p>
-        </p:txBody>
-      </p:sp>
-      <p:sp>
-        <p:nvSpPr>
-          <p:cNvPr id="23" name="TextBox 22"/>
-          <p:cNvSpPr txBox="1"/>
-          <p:nvPr/>
-        </p:nvSpPr>
-        <p:spPr>
-          <a:xfrm>
-            <a:off x="10104120" y="4471416"/>
-            <a:ext cx="1874519" cy="822960"/>
-          </a:xfrm>
-          <a:prstGeom prst="rect">
-            <a:avLst/>
-          </a:prstGeom>
-          <a:noFill/>
-        </p:spPr>
-        <p:txBody>
-          <a:bodyPr wrap="square" anchor="t" lIns="25400" rIns="25400" tIns="25400" bIns="25400">
-            <a:spAutoFit/>
-          </a:bodyPr>
-          <a:lstStyle/>
-          <a:p>
-            <a:pPr algn="l">
-              <a:lnSpc>
-                <a:spcPct val="120000"/>
-              </a:lnSpc>
-              <a:spcAft>
-                <a:spcPts val="400"/>
-              </a:spcAft>
-            </a:pPr>
-            <a:r>
-              <a:rPr sz="1100" b="1">
-                <a:solidFill>
-                  <a:srgbClr val="444A55"/>
-                </a:solidFill>
-                <a:latin typeface="Apple SD Gothic Neo"/>
-              </a:rPr>
-              <a:t>저비용
-에이전트</a:t>
-            </a:r>
-          </a:p>
-          <a:p>
-            <a:pPr algn="l">
-              <a:lnSpc>
-                <a:spcPct val="120000"/>
-              </a:lnSpc>
-              <a:spcAft>
-                <a:spcPts val="400"/>
-              </a:spcAft>
-            </a:pPr>
-            <a:r>
-              <a:rPr sz="1000" b="0">
-                <a:solidFill>
-                  <a:srgbClr val="6B7B8C"/>
-                </a:solidFill>
-                <a:latin typeface="Apple SD Gothic Neo"/>
-              </a:rPr>
-              <a:t>준수능·초저비용</a:t>
-            </a:r>
-          </a:p>
-        </p:txBody>
-      </p:sp>
-      <p:sp>
-        <p:nvSpPr>
-          <p:cNvPr id="24" name="Rounded Rectangle 23"/>
-          <p:cNvSpPr/>
-          <p:nvPr/>
-        </p:nvSpPr>
-        <p:spPr>
-          <a:xfrm>
-            <a:off x="457200" y="5961888"/>
-            <a:ext cx="11292840" cy="658368"/>
-          </a:xfrm>
-          <a:prstGeom prst="roundRect">
-            <a:avLst/>
-          </a:prstGeom>
-          <a:solidFill>
-            <a:srgbClr val="142A4A"/>
-          </a:solidFill>
-          <a:ln>
-            <a:noFill/>
-          </a:ln>
-          <a:effectLst/>
-        </p:spPr>
-        <p:style>
-          <a:lnRef idx="1">
-            <a:schemeClr val="accent1"/>
-          </a:lnRef>
-          <a:fillRef idx="3">
-            <a:schemeClr val="accent1"/>
-          </a:fillRef>
-          <a:effectRef idx="2">
-            <a:schemeClr val="accent1"/>
-          </a:effectRef>
-          <a:fontRef idx="minor">
-            <a:schemeClr val="lt1"/>
-          </a:fontRef>
-        </p:style>
-        <p:txBody>
-          <a:bodyPr rtlCol="0" anchor="ctr"/>
-          <a:lstStyle/>
-          <a:p>
-            <a:pPr algn="ctr"/>
-          </a:p>
-        </p:txBody>
-      </p:sp>
-      <p:sp>
-        <p:nvSpPr>
-          <p:cNvPr id="25" name="TextBox 24"/>
-          <p:cNvSpPr txBox="1"/>
-          <p:nvPr/>
-        </p:nvSpPr>
-        <p:spPr>
-          <a:xfrm>
-            <a:off x="658368" y="5961888"/>
-            <a:ext cx="10890504" cy="658368"/>
-          </a:xfrm>
-          <a:prstGeom prst="rect">
-            <a:avLst/>
-          </a:prstGeom>
-          <a:noFill/>
-        </p:spPr>
-        <p:txBody>
           <a:bodyPr wrap="square" anchor="ctr" lIns="25400" rIns="25400" tIns="25400" bIns="25400">
             <a:spAutoFit/>
           </a:bodyPr>
@@ -7613,26 +7982,26 @@
           <a:p>
             <a:pPr algn="l">
               <a:lnSpc>
-                <a:spcPct val="114000"/>
+                <a:spcPct val="115000"/>
               </a:lnSpc>
               <a:spcAft>
                 <a:spcPts val="200"/>
               </a:spcAft>
             </a:pPr>
             <a:r>
-              <a:rPr sz="1250" b="1">
+              <a:rPr sz="1200" b="1">
                 <a:solidFill>
                   <a:srgbClr val="9FC4E8"/>
                 </a:solidFill>
                 <a:latin typeface="Apple SD Gothic Neo"/>
               </a:rPr>
-              <a:t>도입 시사점</a:t>
+              <a:t>추론 ① 결론</a:t>
             </a:r>
           </a:p>
           <a:p>
             <a:pPr algn="l">
               <a:lnSpc>
-                <a:spcPct val="114000"/>
+                <a:spcPct val="115000"/>
               </a:lnSpc>
               <a:spcAft>
                 <a:spcPts val="200"/>
@@ -7645,14 +8014,33 @@
                 </a:solidFill>
                 <a:latin typeface="Apple SD Gothic Neo"/>
               </a:rPr>
-              <a:t>코딩 중심 → Claude  |  터미널·OpenAI 생태계 → GPT  |  가성비 → Gemini  |  대량 에이전트 → Grok</a:t>
-            </a:r>
-          </a:p>
-        </p:txBody>
-      </p:sp>
-      <p:sp>
-        <p:nvSpPr>
-          <p:cNvPr id="26" name="TextBox 25"/>
+              <a:t>과학 퀴즈(GPQA)는 4종 모두 88~94% — 격차 작음 (거의 비슷)</a:t>
+            </a:r>
+          </a:p>
+          <a:p>
+            <a:pPr algn="l">
+              <a:lnSpc>
+                <a:spcPct val="115000"/>
+              </a:lnSpc>
+              <a:spcAft>
+                <a:spcPts val="200"/>
+              </a:spcAft>
+            </a:pPr>
+            <a:r>
+              <a:rPr sz="1100" b="0">
+                <a:solidFill>
+                  <a:srgbClr val="FFFFFF"/>
+                </a:solidFill>
+                <a:latin typeface="Apple SD Gothic Neo"/>
+              </a:rPr>
+              <a:t>진짜 어려운 생각(HLE)에서는 Claude·Grok 상위 — '막히는 문제'는 Claude가 유리</a:t>
+            </a:r>
+          </a:p>
+        </p:txBody>
+      </p:sp>
+      <p:sp>
+        <p:nvSpPr>
+          <p:cNvPr id="11" name="TextBox 10"/>
           <p:cNvSpPr txBox="1"/>
           <p:nvPr/>
         </p:nvSpPr>
@@ -7687,7 +8075,7 @@
                 </a:solidFill>
                 <a:latin typeface="Apple SD Gothic Neo"/>
               </a:rPr>
-              <a:t>(5/6)</a:t>
+              <a:t>(5/8)</a:t>
             </a:r>
           </a:p>
         </p:txBody>
@@ -7843,7 +8231,7 @@
                 </a:solidFill>
                 <a:latin typeface="Apple SD Gothic Neo"/>
               </a:rPr>
-              <a:t>NC HW 개발팀  |  외부 AI 4종 벤치마크 비교 (2026.6)</a:t>
+              <a:t>NC HW 개발팀  |  코딩·추론 역량 비교 (2026.6)</a:t>
             </a:r>
           </a:p>
         </p:txBody>
@@ -7879,13 +8267,13 @@
               </a:spcAft>
             </a:pPr>
             <a:r>
-              <a:rPr sz="2300" b="1">
+              <a:rPr sz="2200" b="1">
                 <a:solidFill>
                   <a:srgbClr val="FFFFFF"/>
                 </a:solidFill>
                 <a:latin typeface="Apple SD Gothic Neo"/>
               </a:rPr>
-              <a:t>출처 및 검증 방법</a:t>
+              <a:t>추론 ② — 수학 문제 (난이도별)</a:t>
             </a:r>
           </a:p>
         </p:txBody>
@@ -7898,8 +8286,8 @@
         </p:nvSpPr>
         <p:spPr>
           <a:xfrm>
-            <a:off x="640080" y="1417320"/>
-            <a:ext cx="10972800" cy="2011680"/>
+            <a:off x="457200" y="1024128"/>
+            <a:ext cx="11247120" cy="502920"/>
           </a:xfrm>
           <a:prstGeom prst="rect">
             <a:avLst/>
@@ -7914,26 +8302,26 @@
           <a:p>
             <a:pPr algn="l">
               <a:lnSpc>
-                <a:spcPct val="135000"/>
+                <a:spcPct val="100000"/>
               </a:lnSpc>
               <a:spcAft>
                 <a:spcPts val="400"/>
               </a:spcAft>
             </a:pPr>
             <a:r>
-              <a:rPr sz="1400" b="1">
-                <a:solidFill>
-                  <a:srgbClr val="142A4A"/>
+              <a:rPr sz="1150" b="0">
+                <a:solidFill>
+                  <a:srgbClr val="444A55"/>
                 </a:solidFill>
                 <a:latin typeface="Apple SD Gothic Neo"/>
               </a:rPr>
-              <a:t>1차 — 공식 Model / System Card</a:t>
+              <a:t>MATH-500 = 중·고등~대학 초급 수학  |  AIME = 올림피아드급  |  FrontierMath = 연구자도 어려운 최고난도</a:t>
             </a:r>
           </a:p>
           <a:p>
             <a:pPr algn="l">
               <a:lnSpc>
-                <a:spcPct val="135000"/>
+                <a:spcPct val="100000"/>
               </a:lnSpc>
               <a:spcAft>
                 <a:spcPts val="400"/>
@@ -7946,109 +8334,156 @@
                 </a:solidFill>
                 <a:latin typeface="Apple SD Gothic Neo"/>
               </a:rPr>
-              <a:t>Anthropic Claude Opus 4.8  ·  OpenAI GPT-5.5  ·  Google Gemini 3.1 Pro  ·  xAI Grok 4.3</a:t>
-            </a:r>
-          </a:p>
+              <a:t>쉬운 수학은 GPT·Gemini·Grok도 94%↑  |  어려울수록 점수 차이가 커짐</a:t>
+            </a:r>
+          </a:p>
+        </p:txBody>
+      </p:sp>
+      <p:graphicFrame>
+        <p:nvGraphicFramePr>
+          <p:cNvPr id="7" name="Chart 6"/>
+          <p:cNvGraphicFramePr>
+            <a:graphicFrameLocks noGrp="1"/>
+          </p:cNvGraphicFramePr>
+          <p:nvPr/>
+        </p:nvGraphicFramePr>
+        <p:xfrm>
+          <a:off x="457200" y="1627632"/>
+          <a:ext cx="11247120" cy="3337560"/>
+        </p:xfrm>
+        <a:graphic>
+          <a:graphicData uri="http://schemas.openxmlformats.org/drawingml/2006/chart">
+            <c:chart xmlns:c="http://schemas.openxmlformats.org/drawingml/2006/chart" r:id="rId2"/>
+          </a:graphicData>
+        </a:graphic>
+      </p:graphicFrame>
+      <p:sp>
+        <p:nvSpPr>
+          <p:cNvPr id="8" name="Rounded Rectangle 7"/>
+          <p:cNvSpPr/>
+          <p:nvPr/>
+        </p:nvSpPr>
+        <p:spPr>
+          <a:xfrm>
+            <a:off x="457200" y="5074920"/>
+            <a:ext cx="11292840" cy="960120"/>
+          </a:xfrm>
+          <a:prstGeom prst="roundRect">
+            <a:avLst/>
+          </a:prstGeom>
+          <a:solidFill>
+            <a:srgbClr val="142A4A"/>
+          </a:solidFill>
+          <a:ln>
+            <a:noFill/>
+          </a:ln>
+          <a:effectLst/>
+        </p:spPr>
+        <p:style>
+          <a:lnRef idx="1">
+            <a:schemeClr val="accent1"/>
+          </a:lnRef>
+          <a:fillRef idx="3">
+            <a:schemeClr val="accent1"/>
+          </a:fillRef>
+          <a:effectRef idx="2">
+            <a:schemeClr val="accent1"/>
+          </a:effectRef>
+          <a:fontRef idx="minor">
+            <a:schemeClr val="lt1"/>
+          </a:fontRef>
+        </p:style>
+        <p:txBody>
+          <a:bodyPr rtlCol="0" anchor="ctr"/>
+          <a:lstStyle/>
+          <a:p>
+            <a:pPr algn="ctr"/>
+          </a:p>
+        </p:txBody>
+      </p:sp>
+      <p:sp>
+        <p:nvSpPr>
+          <p:cNvPr id="9" name="TextBox 8"/>
+          <p:cNvSpPr txBox="1"/>
+          <p:nvPr/>
+        </p:nvSpPr>
+        <p:spPr>
+          <a:xfrm>
+            <a:off x="640080" y="5074920"/>
+            <a:ext cx="10927080" cy="960120"/>
+          </a:xfrm>
+          <a:prstGeom prst="rect">
+            <a:avLst/>
+          </a:prstGeom>
+          <a:noFill/>
+        </p:spPr>
+        <p:txBody>
+          <a:bodyPr wrap="square" anchor="ctr" lIns="25400" rIns="25400" tIns="25400" bIns="25400">
+            <a:spAutoFit/>
+          </a:bodyPr>
+          <a:lstStyle/>
           <a:p>
             <a:pPr algn="l">
               <a:lnSpc>
-                <a:spcPct val="135000"/>
+                <a:spcPct val="115000"/>
               </a:lnSpc>
               <a:spcAft>
-                <a:spcPts val="400"/>
+                <a:spcPts val="200"/>
               </a:spcAft>
             </a:pPr>
             <a:r>
-              <a:rPr sz="600" b="0">
-                <a:solidFill>
-                  <a:srgbClr val="444A55"/>
+              <a:rPr sz="1200" b="1">
+                <a:solidFill>
+                  <a:srgbClr val="9FC4E8"/>
                 </a:solidFill>
                 <a:latin typeface="Apple SD Gothic Neo"/>
               </a:rPr>
-              <a:t/>
+              <a:t>추론 ② 결론</a:t>
             </a:r>
           </a:p>
           <a:p>
             <a:pPr algn="l">
               <a:lnSpc>
-                <a:spcPct val="135000"/>
+                <a:spcPct val="115000"/>
               </a:lnSpc>
               <a:spcAft>
-                <a:spcPts val="400"/>
+                <a:spcPts val="200"/>
               </a:spcAft>
             </a:pPr>
             <a:r>
-              <a:rPr sz="1400" b="1">
-                <a:solidFill>
-                  <a:srgbClr val="142A4A"/>
+              <a:rPr sz="1100" b="0">
+                <a:solidFill>
+                  <a:srgbClr val="FFFFFF"/>
                 </a:solidFill>
                 <a:latin typeface="Apple SD Gothic Neo"/>
               </a:rPr>
-              <a:t>2차 — 독립 집계 (벤더 중립)</a:t>
+              <a:t>일반·올림피아드 수학 → GPT·Grok·Gemini 앞섬 (95~97%)</a:t>
             </a:r>
           </a:p>
           <a:p>
             <a:pPr algn="l">
               <a:lnSpc>
-                <a:spcPct val="135000"/>
+                <a:spcPct val="115000"/>
               </a:lnSpc>
               <a:spcAft>
-                <a:spcPts val="400"/>
+                <a:spcPts val="200"/>
               </a:spcAft>
             </a:pPr>
             <a:r>
-              <a:rPr sz="1150" b="0">
-                <a:solidFill>
-                  <a:srgbClr val="444A55"/>
+              <a:rPr sz="1100" b="0">
+                <a:solidFill>
+                  <a:srgbClr val="FFFFFF"/>
                 </a:solidFill>
                 <a:latin typeface="Apple SD Gothic Neo"/>
               </a:rPr>
-              <a:t>Artificial Analysis Intelligence Index  ·  Vellum  ·  LMArena  ·  Stanford HELM</a:t>
-            </a:r>
-          </a:p>
-          <a:p>
-            <a:pPr algn="l">
-              <a:lnSpc>
-                <a:spcPct val="135000"/>
-              </a:lnSpc>
-              <a:spcAft>
-                <a:spcPts val="400"/>
-              </a:spcAft>
-            </a:pPr>
-            <a:r>
-              <a:rPr sz="600" b="0">
-                <a:solidFill>
-                  <a:srgbClr val="444A55"/>
-                </a:solidFill>
-                <a:latin typeface="Apple SD Gothic Neo"/>
-              </a:rPr>
-              <a:t/>
-            </a:r>
-          </a:p>
-          <a:p>
-            <a:pPr algn="l">
-              <a:lnSpc>
-                <a:spcPct val="135000"/>
-              </a:lnSpc>
-              <a:spcAft>
-                <a:spcPts val="400"/>
-              </a:spcAft>
-            </a:pPr>
-            <a:r>
-              <a:rPr sz="1100" b="1">
-                <a:solidFill>
-                  <a:srgbClr val="F27E2E"/>
-                </a:solidFill>
-                <a:latin typeface="Apple SD Gothic Neo"/>
-              </a:rPr>
-              <a:t>유의: 공식 수치는 self-reported · harness 차이로 직접 비교 주의 · * 근사치 별도 표기</a:t>
-            </a:r>
-          </a:p>
-        </p:txBody>
-      </p:sp>
-      <p:sp>
-        <p:nvSpPr>
-          <p:cNvPr id="7" name="TextBox 6"/>
+              <a:t>최고난도 수학(FrontierMath) → Grok 54% 1위  |  HW팀: 계산·수식 많은 업무는 GPT, 초난도는 Grok도 검토</a:t>
+            </a:r>
+          </a:p>
+        </p:txBody>
+      </p:sp>
+      <p:sp>
+        <p:nvSpPr>
+          <p:cNvPr id="10" name="TextBox 9"/>
           <p:cNvSpPr txBox="1"/>
           <p:nvPr/>
         </p:nvSpPr>
@@ -8083,7 +8518,1604 @@
                 </a:solidFill>
                 <a:latin typeface="Apple SD Gothic Neo"/>
               </a:rPr>
-              <a:t>(6/6)</a:t>
+              <a:t>(6/8)</a:t>
+            </a:r>
+          </a:p>
+        </p:txBody>
+      </p:sp>
+    </p:spTree>
+  </p:cSld>
+  <p:clrMapOvr>
+    <a:masterClrMapping/>
+  </p:clrMapOvr>
+</p:sld>
+</file>
+
+<file path=ppt/slides/slide7.xml><?xml version="1.0" encoding="utf-8"?>
+<p:sld xmlns:a="http://schemas.openxmlformats.org/drawingml/2006/main" xmlns:p="http://schemas.openxmlformats.org/presentationml/2006/main" xmlns:r="http://schemas.openxmlformats.org/officeDocument/2006/relationships">
+  <p:cSld>
+    <p:bg>
+      <p:bgPr>
+        <a:solidFill>
+          <a:srgbClr val="FFFFFF"/>
+        </a:solidFill>
+        <a:effectLst/>
+      </p:bgPr>
+    </p:bg>
+    <p:spTree>
+      <p:nvGrpSpPr>
+        <p:cNvPr id="1" name=""/>
+        <p:cNvGrpSpPr/>
+        <p:nvPr/>
+      </p:nvGrpSpPr>
+      <p:grpSpPr/>
+      <p:sp>
+        <p:nvSpPr>
+          <p:cNvPr id="2" name="Rectangle 1"/>
+          <p:cNvSpPr/>
+          <p:nvPr/>
+        </p:nvSpPr>
+        <p:spPr>
+          <a:xfrm>
+            <a:off x="0" y="0"/>
+            <a:ext cx="12191695" cy="914400"/>
+          </a:xfrm>
+          <a:prstGeom prst="rect">
+            <a:avLst/>
+          </a:prstGeom>
+          <a:solidFill>
+            <a:srgbClr val="142A4A"/>
+          </a:solidFill>
+          <a:ln>
+            <a:noFill/>
+          </a:ln>
+          <a:effectLst/>
+        </p:spPr>
+        <p:style>
+          <a:lnRef idx="1">
+            <a:schemeClr val="accent1"/>
+          </a:lnRef>
+          <a:fillRef idx="3">
+            <a:schemeClr val="accent1"/>
+          </a:fillRef>
+          <a:effectRef idx="2">
+            <a:schemeClr val="accent1"/>
+          </a:effectRef>
+          <a:fontRef idx="minor">
+            <a:schemeClr val="lt1"/>
+          </a:fontRef>
+        </p:style>
+        <p:txBody>
+          <a:bodyPr rtlCol="0" anchor="ctr"/>
+          <a:lstStyle/>
+          <a:p>
+            <a:pPr algn="ctr"/>
+          </a:p>
+        </p:txBody>
+      </p:sp>
+      <p:sp>
+        <p:nvSpPr>
+          <p:cNvPr id="3" name="Rectangle 2"/>
+          <p:cNvSpPr/>
+          <p:nvPr/>
+        </p:nvSpPr>
+        <p:spPr>
+          <a:xfrm>
+            <a:off x="0" y="914400"/>
+            <a:ext cx="12191695" cy="38100"/>
+          </a:xfrm>
+          <a:prstGeom prst="rect">
+            <a:avLst/>
+          </a:prstGeom>
+          <a:solidFill>
+            <a:srgbClr val="F27E2E"/>
+          </a:solidFill>
+          <a:ln>
+            <a:noFill/>
+          </a:ln>
+          <a:effectLst/>
+        </p:spPr>
+        <p:style>
+          <a:lnRef idx="1">
+            <a:schemeClr val="accent1"/>
+          </a:lnRef>
+          <a:fillRef idx="3">
+            <a:schemeClr val="accent1"/>
+          </a:fillRef>
+          <a:effectRef idx="2">
+            <a:schemeClr val="accent1"/>
+          </a:effectRef>
+          <a:fontRef idx="minor">
+            <a:schemeClr val="lt1"/>
+          </a:fontRef>
+        </p:style>
+        <p:txBody>
+          <a:bodyPr rtlCol="0" anchor="ctr"/>
+          <a:lstStyle/>
+          <a:p>
+            <a:pPr algn="ctr"/>
+          </a:p>
+        </p:txBody>
+      </p:sp>
+      <p:sp>
+        <p:nvSpPr>
+          <p:cNvPr id="4" name="TextBox 3"/>
+          <p:cNvSpPr txBox="1"/>
+          <p:nvPr/>
+        </p:nvSpPr>
+        <p:spPr>
+          <a:xfrm>
+            <a:off x="502920" y="118872"/>
+            <a:ext cx="10972800" cy="274320"/>
+          </a:xfrm>
+          <a:prstGeom prst="rect">
+            <a:avLst/>
+          </a:prstGeom>
+          <a:noFill/>
+        </p:spPr>
+        <p:txBody>
+          <a:bodyPr wrap="square" anchor="t" lIns="25400" rIns="25400" tIns="25400" bIns="25400">
+            <a:spAutoFit/>
+          </a:bodyPr>
+          <a:lstStyle/>
+          <a:p>
+            <a:pPr algn="l">
+              <a:lnSpc>
+                <a:spcPct val="100000"/>
+              </a:lnSpc>
+              <a:spcAft>
+                <a:spcPts val="400"/>
+              </a:spcAft>
+            </a:pPr>
+            <a:r>
+              <a:rPr sz="1100" b="1">
+                <a:solidFill>
+                  <a:srgbClr val="9FC4E8"/>
+                </a:solidFill>
+                <a:latin typeface="Apple SD Gothic Neo"/>
+              </a:rPr>
+              <a:t>NC HW 개발팀  |  코딩·추론 역량 비교 (2026.6)</a:t>
+            </a:r>
+          </a:p>
+        </p:txBody>
+      </p:sp>
+      <p:sp>
+        <p:nvSpPr>
+          <p:cNvPr id="5" name="TextBox 4"/>
+          <p:cNvSpPr txBox="1"/>
+          <p:nvPr/>
+        </p:nvSpPr>
+        <p:spPr>
+          <a:xfrm>
+            <a:off x="502920" y="365760"/>
+            <a:ext cx="11155680" cy="502920"/>
+          </a:xfrm>
+          <a:prstGeom prst="rect">
+            <a:avLst/>
+          </a:prstGeom>
+          <a:noFill/>
+        </p:spPr>
+        <p:txBody>
+          <a:bodyPr wrap="square" anchor="t" lIns="25400" rIns="25400" tIns="25400" bIns="25400">
+            <a:spAutoFit/>
+          </a:bodyPr>
+          <a:lstStyle/>
+          <a:p>
+            <a:pPr algn="l">
+              <a:lnSpc>
+                <a:spcPct val="100000"/>
+              </a:lnSpc>
+              <a:spcAft>
+                <a:spcPts val="400"/>
+              </a:spcAft>
+            </a:pPr>
+            <a:r>
+              <a:rPr sz="2200" b="1">
+                <a:solidFill>
+                  <a:srgbClr val="FFFFFF"/>
+                </a:solidFill>
+                <a:latin typeface="Apple SD Gothic Neo"/>
+              </a:rPr>
+              <a:t>추론 ③ — 도구 쓰면 더 잘 푸는지 · 종합 정리</a:t>
+            </a:r>
+          </a:p>
+        </p:txBody>
+      </p:sp>
+      <p:graphicFrame>
+        <p:nvGraphicFramePr>
+          <p:cNvPr id="6" name="Chart 5"/>
+          <p:cNvGraphicFramePr>
+            <a:graphicFrameLocks noGrp="1"/>
+          </p:cNvGraphicFramePr>
+          <p:nvPr/>
+        </p:nvGraphicFramePr>
+        <p:xfrm>
+          <a:off x="411480" y="1417320"/>
+          <a:ext cx="5486400" cy="2926080"/>
+        </p:xfrm>
+        <a:graphic>
+          <a:graphicData uri="http://schemas.openxmlformats.org/drawingml/2006/chart">
+            <c:chart xmlns:c="http://schemas.openxmlformats.org/drawingml/2006/chart" r:id="rId2"/>
+          </a:graphicData>
+        </a:graphic>
+      </p:graphicFrame>
+      <p:sp>
+        <p:nvSpPr>
+          <p:cNvPr id="7" name="Rounded Rectangle 6"/>
+          <p:cNvSpPr/>
+          <p:nvPr/>
+        </p:nvSpPr>
+        <p:spPr>
+          <a:xfrm>
+            <a:off x="6263640" y="1417320"/>
+            <a:ext cx="1737360" cy="1691640"/>
+          </a:xfrm>
+          <a:prstGeom prst="roundRect">
+            <a:avLst/>
+          </a:prstGeom>
+          <a:solidFill>
+            <a:srgbClr val="E8F1FA"/>
+          </a:solidFill>
+          <a:ln w="25400">
+            <a:solidFill>
+              <a:srgbClr val="D4774A"/>
+            </a:solidFill>
+          </a:ln>
+          <a:effectLst/>
+        </p:spPr>
+        <p:style>
+          <a:lnRef idx="1">
+            <a:schemeClr val="accent1"/>
+          </a:lnRef>
+          <a:fillRef idx="3">
+            <a:schemeClr val="accent1"/>
+          </a:fillRef>
+          <a:effectRef idx="2">
+            <a:schemeClr val="accent1"/>
+          </a:effectRef>
+          <a:fontRef idx="minor">
+            <a:schemeClr val="lt1"/>
+          </a:fontRef>
+        </p:style>
+        <p:txBody>
+          <a:bodyPr rtlCol="0" anchor="ctr"/>
+          <a:lstStyle/>
+          <a:p>
+            <a:pPr algn="ctr"/>
+          </a:p>
+        </p:txBody>
+      </p:sp>
+      <p:sp>
+        <p:nvSpPr>
+          <p:cNvPr id="8" name="TextBox 7"/>
+          <p:cNvSpPr txBox="1"/>
+          <p:nvPr/>
+        </p:nvSpPr>
+        <p:spPr>
+          <a:xfrm>
+            <a:off x="6373368" y="1554480"/>
+            <a:ext cx="1508760" cy="1417320"/>
+          </a:xfrm>
+          <a:prstGeom prst="rect">
+            <a:avLst/>
+          </a:prstGeom>
+          <a:noFill/>
+        </p:spPr>
+        <p:txBody>
+          <a:bodyPr wrap="square" anchor="t" lIns="25400" rIns="25400" tIns="25400" bIns="25400">
+            <a:spAutoFit/>
+          </a:bodyPr>
+          <a:lstStyle/>
+          <a:p>
+            <a:pPr algn="ctr">
+              <a:lnSpc>
+                <a:spcPct val="115000"/>
+              </a:lnSpc>
+              <a:spcAft>
+                <a:spcPts val="400"/>
+              </a:spcAft>
+            </a:pPr>
+            <a:r>
+              <a:rPr sz="1050" b="1">
+                <a:solidFill>
+                  <a:srgbClr val="142A4A"/>
+                </a:solidFill>
+                <a:latin typeface="Apple SD Gothic Neo"/>
+              </a:rPr>
+              <a:t>코딩
+버그 수정</a:t>
+            </a:r>
+          </a:p>
+          <a:p>
+            <a:pPr algn="ctr">
+              <a:lnSpc>
+                <a:spcPct val="115000"/>
+              </a:lnSpc>
+              <a:spcAft>
+                <a:spcPts val="400"/>
+              </a:spcAft>
+            </a:pPr>
+            <a:r>
+              <a:rPr sz="1400" b="1">
+                <a:solidFill>
+                  <a:srgbClr val="D4774A"/>
+                </a:solidFill>
+                <a:latin typeface="Apple SD Gothic Neo"/>
+              </a:rPr>
+              <a:t>Claude</a:t>
+            </a:r>
+          </a:p>
+          <a:p>
+            <a:pPr algn="ctr">
+              <a:lnSpc>
+                <a:spcPct val="115000"/>
+              </a:lnSpc>
+              <a:spcAft>
+                <a:spcPts val="400"/>
+              </a:spcAft>
+            </a:pPr>
+            <a:r>
+              <a:rPr sz="950" b="0">
+                <a:solidFill>
+                  <a:srgbClr val="444A55"/>
+                </a:solidFill>
+                <a:latin typeface="Apple SD Gothic Neo"/>
+              </a:rPr>
+              <a:t>SWE Pro 69%</a:t>
+            </a:r>
+          </a:p>
+        </p:txBody>
+      </p:sp>
+      <p:sp>
+        <p:nvSpPr>
+          <p:cNvPr id="9" name="Rounded Rectangle 8"/>
+          <p:cNvSpPr/>
+          <p:nvPr/>
+        </p:nvSpPr>
+        <p:spPr>
+          <a:xfrm>
+            <a:off x="8138159" y="1417320"/>
+            <a:ext cx="1737360" cy="1691640"/>
+          </a:xfrm>
+          <a:prstGeom prst="roundRect">
+            <a:avLst/>
+          </a:prstGeom>
+          <a:solidFill>
+            <a:srgbClr val="E8F1FA"/>
+          </a:solidFill>
+          <a:ln w="25400">
+            <a:solidFill>
+              <a:srgbClr val="10A37A"/>
+            </a:solidFill>
+          </a:ln>
+          <a:effectLst/>
+        </p:spPr>
+        <p:style>
+          <a:lnRef idx="1">
+            <a:schemeClr val="accent1"/>
+          </a:lnRef>
+          <a:fillRef idx="3">
+            <a:schemeClr val="accent1"/>
+          </a:fillRef>
+          <a:effectRef idx="2">
+            <a:schemeClr val="accent1"/>
+          </a:effectRef>
+          <a:fontRef idx="minor">
+            <a:schemeClr val="lt1"/>
+          </a:fontRef>
+        </p:style>
+        <p:txBody>
+          <a:bodyPr rtlCol="0" anchor="ctr"/>
+          <a:lstStyle/>
+          <a:p>
+            <a:pPr algn="ctr"/>
+          </a:p>
+        </p:txBody>
+      </p:sp>
+      <p:sp>
+        <p:nvSpPr>
+          <p:cNvPr id="10" name="TextBox 9"/>
+          <p:cNvSpPr txBox="1"/>
+          <p:nvPr/>
+        </p:nvSpPr>
+        <p:spPr>
+          <a:xfrm>
+            <a:off x="8247887" y="1554480"/>
+            <a:ext cx="1508760" cy="1417320"/>
+          </a:xfrm>
+          <a:prstGeom prst="rect">
+            <a:avLst/>
+          </a:prstGeom>
+          <a:noFill/>
+        </p:spPr>
+        <p:txBody>
+          <a:bodyPr wrap="square" anchor="t" lIns="25400" rIns="25400" tIns="25400" bIns="25400">
+            <a:spAutoFit/>
+          </a:bodyPr>
+          <a:lstStyle/>
+          <a:p>
+            <a:pPr algn="ctr">
+              <a:lnSpc>
+                <a:spcPct val="115000"/>
+              </a:lnSpc>
+              <a:spcAft>
+                <a:spcPts val="400"/>
+              </a:spcAft>
+            </a:pPr>
+            <a:r>
+              <a:rPr sz="1050" b="1">
+                <a:solidFill>
+                  <a:srgbClr val="142A4A"/>
+                </a:solidFill>
+                <a:latin typeface="Apple SD Gothic Neo"/>
+              </a:rPr>
+              <a:t>터미널
+명령어</a:t>
+            </a:r>
+          </a:p>
+          <a:p>
+            <a:pPr algn="ctr">
+              <a:lnSpc>
+                <a:spcPct val="115000"/>
+              </a:lnSpc>
+              <a:spcAft>
+                <a:spcPts val="400"/>
+              </a:spcAft>
+            </a:pPr>
+            <a:r>
+              <a:rPr sz="1400" b="1">
+                <a:solidFill>
+                  <a:srgbClr val="10A37A"/>
+                </a:solidFill>
+                <a:latin typeface="Apple SD Gothic Neo"/>
+              </a:rPr>
+              <a:t>GPT</a:t>
+            </a:r>
+          </a:p>
+          <a:p>
+            <a:pPr algn="ctr">
+              <a:lnSpc>
+                <a:spcPct val="115000"/>
+              </a:lnSpc>
+              <a:spcAft>
+                <a:spcPts val="400"/>
+              </a:spcAft>
+            </a:pPr>
+            <a:r>
+              <a:rPr sz="950" b="0">
+                <a:solidFill>
+                  <a:srgbClr val="444A55"/>
+                </a:solidFill>
+                <a:latin typeface="Apple SD Gothic Neo"/>
+              </a:rPr>
+              <a:t>Terminal 78%</a:t>
+            </a:r>
+          </a:p>
+        </p:txBody>
+      </p:sp>
+      <p:sp>
+        <p:nvSpPr>
+          <p:cNvPr id="11" name="Rounded Rectangle 10"/>
+          <p:cNvSpPr/>
+          <p:nvPr/>
+        </p:nvSpPr>
+        <p:spPr>
+          <a:xfrm>
+            <a:off x="10012678" y="1417320"/>
+            <a:ext cx="1737360" cy="1691640"/>
+          </a:xfrm>
+          <a:prstGeom prst="roundRect">
+            <a:avLst/>
+          </a:prstGeom>
+          <a:solidFill>
+            <a:srgbClr val="E8F1FA"/>
+          </a:solidFill>
+          <a:ln w="25400">
+            <a:solidFill>
+              <a:srgbClr val="D4774A"/>
+            </a:solidFill>
+          </a:ln>
+          <a:effectLst/>
+        </p:spPr>
+        <p:style>
+          <a:lnRef idx="1">
+            <a:schemeClr val="accent1"/>
+          </a:lnRef>
+          <a:fillRef idx="3">
+            <a:schemeClr val="accent1"/>
+          </a:fillRef>
+          <a:effectRef idx="2">
+            <a:schemeClr val="accent1"/>
+          </a:effectRef>
+          <a:fontRef idx="minor">
+            <a:schemeClr val="lt1"/>
+          </a:fontRef>
+        </p:style>
+        <p:txBody>
+          <a:bodyPr rtlCol="0" anchor="ctr"/>
+          <a:lstStyle/>
+          <a:p>
+            <a:pPr algn="ctr"/>
+          </a:p>
+        </p:txBody>
+      </p:sp>
+      <p:sp>
+        <p:nvSpPr>
+          <p:cNvPr id="12" name="TextBox 11"/>
+          <p:cNvSpPr txBox="1"/>
+          <p:nvPr/>
+        </p:nvSpPr>
+        <p:spPr>
+          <a:xfrm>
+            <a:off x="10122406" y="1554480"/>
+            <a:ext cx="1508760" cy="1417320"/>
+          </a:xfrm>
+          <a:prstGeom prst="rect">
+            <a:avLst/>
+          </a:prstGeom>
+          <a:noFill/>
+        </p:spPr>
+        <p:txBody>
+          <a:bodyPr wrap="square" anchor="t" lIns="25400" rIns="25400" tIns="25400" bIns="25400">
+            <a:spAutoFit/>
+          </a:bodyPr>
+          <a:lstStyle/>
+          <a:p>
+            <a:pPr algn="ctr">
+              <a:lnSpc>
+                <a:spcPct val="115000"/>
+              </a:lnSpc>
+              <a:spcAft>
+                <a:spcPts val="400"/>
+              </a:spcAft>
+            </a:pPr>
+            <a:r>
+              <a:rPr sz="1050" b="1">
+                <a:solidFill>
+                  <a:srgbClr val="142A4A"/>
+                </a:solidFill>
+                <a:latin typeface="Apple SD Gothic Neo"/>
+              </a:rPr>
+              <a:t>PC
+직접 조작</a:t>
+            </a:r>
+          </a:p>
+          <a:p>
+            <a:pPr algn="ctr">
+              <a:lnSpc>
+                <a:spcPct val="115000"/>
+              </a:lnSpc>
+              <a:spcAft>
+                <a:spcPts val="400"/>
+              </a:spcAft>
+            </a:pPr>
+            <a:r>
+              <a:rPr sz="1400" b="1">
+                <a:solidFill>
+                  <a:srgbClr val="D4774A"/>
+                </a:solidFill>
+                <a:latin typeface="Apple SD Gothic Neo"/>
+              </a:rPr>
+              <a:t>Claude</a:t>
+            </a:r>
+          </a:p>
+          <a:p>
+            <a:pPr algn="ctr">
+              <a:lnSpc>
+                <a:spcPct val="115000"/>
+              </a:lnSpc>
+              <a:spcAft>
+                <a:spcPts val="400"/>
+              </a:spcAft>
+            </a:pPr>
+            <a:r>
+              <a:rPr sz="950" b="0">
+                <a:solidFill>
+                  <a:srgbClr val="444A55"/>
+                </a:solidFill>
+                <a:latin typeface="Apple SD Gothic Neo"/>
+              </a:rPr>
+              <a:t>OSWorld 83%</a:t>
+            </a:r>
+          </a:p>
+        </p:txBody>
+      </p:sp>
+      <p:sp>
+        <p:nvSpPr>
+          <p:cNvPr id="13" name="Rounded Rectangle 12"/>
+          <p:cNvSpPr/>
+          <p:nvPr/>
+        </p:nvSpPr>
+        <p:spPr>
+          <a:xfrm>
+            <a:off x="6263640" y="3291839"/>
+            <a:ext cx="1737360" cy="1691640"/>
+          </a:xfrm>
+          <a:prstGeom prst="roundRect">
+            <a:avLst/>
+          </a:prstGeom>
+          <a:solidFill>
+            <a:srgbClr val="E8F1FA"/>
+          </a:solidFill>
+          <a:ln w="25400">
+            <a:solidFill>
+              <a:srgbClr val="D4774A"/>
+            </a:solidFill>
+          </a:ln>
+          <a:effectLst/>
+        </p:spPr>
+        <p:style>
+          <a:lnRef idx="1">
+            <a:schemeClr val="accent1"/>
+          </a:lnRef>
+          <a:fillRef idx="3">
+            <a:schemeClr val="accent1"/>
+          </a:fillRef>
+          <a:effectRef idx="2">
+            <a:schemeClr val="accent1"/>
+          </a:effectRef>
+          <a:fontRef idx="minor">
+            <a:schemeClr val="lt1"/>
+          </a:fontRef>
+        </p:style>
+        <p:txBody>
+          <a:bodyPr rtlCol="0" anchor="ctr"/>
+          <a:lstStyle/>
+          <a:p>
+            <a:pPr algn="ctr"/>
+          </a:p>
+        </p:txBody>
+      </p:sp>
+      <p:sp>
+        <p:nvSpPr>
+          <p:cNvPr id="14" name="TextBox 13"/>
+          <p:cNvSpPr txBox="1"/>
+          <p:nvPr/>
+        </p:nvSpPr>
+        <p:spPr>
+          <a:xfrm>
+            <a:off x="6373368" y="3428999"/>
+            <a:ext cx="1508760" cy="1417320"/>
+          </a:xfrm>
+          <a:prstGeom prst="rect">
+            <a:avLst/>
+          </a:prstGeom>
+          <a:noFill/>
+        </p:spPr>
+        <p:txBody>
+          <a:bodyPr wrap="square" anchor="t" lIns="25400" rIns="25400" tIns="25400" bIns="25400">
+            <a:spAutoFit/>
+          </a:bodyPr>
+          <a:lstStyle/>
+          <a:p>
+            <a:pPr algn="ctr">
+              <a:lnSpc>
+                <a:spcPct val="115000"/>
+              </a:lnSpc>
+              <a:spcAft>
+                <a:spcPts val="400"/>
+              </a:spcAft>
+            </a:pPr>
+            <a:r>
+              <a:rPr sz="1050" b="1">
+                <a:solidFill>
+                  <a:srgbClr val="142A4A"/>
+                </a:solidFill>
+                <a:latin typeface="Apple SD Gothic Neo"/>
+              </a:rPr>
+              <a:t>어려운
+생각</a:t>
+            </a:r>
+          </a:p>
+          <a:p>
+            <a:pPr algn="ctr">
+              <a:lnSpc>
+                <a:spcPct val="115000"/>
+              </a:lnSpc>
+              <a:spcAft>
+                <a:spcPts val="400"/>
+              </a:spcAft>
+            </a:pPr>
+            <a:r>
+              <a:rPr sz="1400" b="1">
+                <a:solidFill>
+                  <a:srgbClr val="D4774A"/>
+                </a:solidFill>
+                <a:latin typeface="Apple SD Gothic Neo"/>
+              </a:rPr>
+              <a:t>Claude</a:t>
+            </a:r>
+          </a:p>
+          <a:p>
+            <a:pPr algn="ctr">
+              <a:lnSpc>
+                <a:spcPct val="115000"/>
+              </a:lnSpc>
+              <a:spcAft>
+                <a:spcPts val="400"/>
+              </a:spcAft>
+            </a:pPr>
+            <a:r>
+              <a:rPr sz="950" b="0">
+                <a:solidFill>
+                  <a:srgbClr val="444A55"/>
+                </a:solidFill>
+                <a:latin typeface="Apple SD Gothic Neo"/>
+              </a:rPr>
+              <a:t>HLE 50~58%</a:t>
+            </a:r>
+          </a:p>
+        </p:txBody>
+      </p:sp>
+      <p:sp>
+        <p:nvSpPr>
+          <p:cNvPr id="15" name="Rounded Rectangle 14"/>
+          <p:cNvSpPr/>
+          <p:nvPr/>
+        </p:nvSpPr>
+        <p:spPr>
+          <a:xfrm>
+            <a:off x="8138159" y="3291839"/>
+            <a:ext cx="1737360" cy="1691640"/>
+          </a:xfrm>
+          <a:prstGeom prst="roundRect">
+            <a:avLst/>
+          </a:prstGeom>
+          <a:solidFill>
+            <a:srgbClr val="E8F1FA"/>
+          </a:solidFill>
+          <a:ln w="25400">
+            <a:solidFill>
+              <a:srgbClr val="4285F4"/>
+            </a:solidFill>
+          </a:ln>
+          <a:effectLst/>
+        </p:spPr>
+        <p:style>
+          <a:lnRef idx="1">
+            <a:schemeClr val="accent1"/>
+          </a:lnRef>
+          <a:fillRef idx="3">
+            <a:schemeClr val="accent1"/>
+          </a:fillRef>
+          <a:effectRef idx="2">
+            <a:schemeClr val="accent1"/>
+          </a:effectRef>
+          <a:fontRef idx="minor">
+            <a:schemeClr val="lt1"/>
+          </a:fontRef>
+        </p:style>
+        <p:txBody>
+          <a:bodyPr rtlCol="0" anchor="ctr"/>
+          <a:lstStyle/>
+          <a:p>
+            <a:pPr algn="ctr"/>
+          </a:p>
+        </p:txBody>
+      </p:sp>
+      <p:sp>
+        <p:nvSpPr>
+          <p:cNvPr id="16" name="TextBox 15"/>
+          <p:cNvSpPr txBox="1"/>
+          <p:nvPr/>
+        </p:nvSpPr>
+        <p:spPr>
+          <a:xfrm>
+            <a:off x="8247887" y="3428999"/>
+            <a:ext cx="1508760" cy="1417320"/>
+          </a:xfrm>
+          <a:prstGeom prst="rect">
+            <a:avLst/>
+          </a:prstGeom>
+          <a:noFill/>
+        </p:spPr>
+        <p:txBody>
+          <a:bodyPr wrap="square" anchor="t" lIns="25400" rIns="25400" tIns="25400" bIns="25400">
+            <a:spAutoFit/>
+          </a:bodyPr>
+          <a:lstStyle/>
+          <a:p>
+            <a:pPr algn="ctr">
+              <a:lnSpc>
+                <a:spcPct val="115000"/>
+              </a:lnSpc>
+              <a:spcAft>
+                <a:spcPts val="400"/>
+              </a:spcAft>
+            </a:pPr>
+            <a:r>
+              <a:rPr sz="1050" b="1">
+                <a:solidFill>
+                  <a:srgbClr val="142A4A"/>
+                </a:solidFill>
+                <a:latin typeface="Apple SD Gothic Neo"/>
+              </a:rPr>
+              <a:t>과학
+퀴즈</a:t>
+            </a:r>
+          </a:p>
+          <a:p>
+            <a:pPr algn="ctr">
+              <a:lnSpc>
+                <a:spcPct val="115000"/>
+              </a:lnSpc>
+              <a:spcAft>
+                <a:spcPts val="400"/>
+              </a:spcAft>
+            </a:pPr>
+            <a:r>
+              <a:rPr sz="1400" b="1">
+                <a:solidFill>
+                  <a:srgbClr val="4285F4"/>
+                </a:solidFill>
+                <a:latin typeface="Apple SD Gothic Neo"/>
+              </a:rPr>
+              <a:t>Gemini</a:t>
+            </a:r>
+          </a:p>
+          <a:p>
+            <a:pPr algn="ctr">
+              <a:lnSpc>
+                <a:spcPct val="115000"/>
+              </a:lnSpc>
+              <a:spcAft>
+                <a:spcPts val="400"/>
+              </a:spcAft>
+            </a:pPr>
+            <a:r>
+              <a:rPr sz="950" b="0">
+                <a:solidFill>
+                  <a:srgbClr val="444A55"/>
+                </a:solidFill>
+                <a:latin typeface="Apple SD Gothic Neo"/>
+              </a:rPr>
+              <a:t>GPQA 94%</a:t>
+            </a:r>
+          </a:p>
+        </p:txBody>
+      </p:sp>
+      <p:sp>
+        <p:nvSpPr>
+          <p:cNvPr id="17" name="Rounded Rectangle 16"/>
+          <p:cNvSpPr/>
+          <p:nvPr/>
+        </p:nvSpPr>
+        <p:spPr>
+          <a:xfrm>
+            <a:off x="10012678" y="3291839"/>
+            <a:ext cx="1737360" cy="1691640"/>
+          </a:xfrm>
+          <a:prstGeom prst="roundRect">
+            <a:avLst/>
+          </a:prstGeom>
+          <a:solidFill>
+            <a:srgbClr val="E8F1FA"/>
+          </a:solidFill>
+          <a:ln w="25400">
+            <a:solidFill>
+              <a:srgbClr val="6B7B8C"/>
+            </a:solidFill>
+          </a:ln>
+          <a:effectLst/>
+        </p:spPr>
+        <p:style>
+          <a:lnRef idx="1">
+            <a:schemeClr val="accent1"/>
+          </a:lnRef>
+          <a:fillRef idx="3">
+            <a:schemeClr val="accent1"/>
+          </a:fillRef>
+          <a:effectRef idx="2">
+            <a:schemeClr val="accent1"/>
+          </a:effectRef>
+          <a:fontRef idx="minor">
+            <a:schemeClr val="lt1"/>
+          </a:fontRef>
+        </p:style>
+        <p:txBody>
+          <a:bodyPr rtlCol="0" anchor="ctr"/>
+          <a:lstStyle/>
+          <a:p>
+            <a:pPr algn="ctr"/>
+          </a:p>
+        </p:txBody>
+      </p:sp>
+      <p:sp>
+        <p:nvSpPr>
+          <p:cNvPr id="18" name="TextBox 17"/>
+          <p:cNvSpPr txBox="1"/>
+          <p:nvPr/>
+        </p:nvSpPr>
+        <p:spPr>
+          <a:xfrm>
+            <a:off x="10122406" y="3428999"/>
+            <a:ext cx="1508760" cy="1417320"/>
+          </a:xfrm>
+          <a:prstGeom prst="rect">
+            <a:avLst/>
+          </a:prstGeom>
+          <a:noFill/>
+        </p:spPr>
+        <p:txBody>
+          <a:bodyPr wrap="square" anchor="t" lIns="25400" rIns="25400" tIns="25400" bIns="25400">
+            <a:spAutoFit/>
+          </a:bodyPr>
+          <a:lstStyle/>
+          <a:p>
+            <a:pPr algn="ctr">
+              <a:lnSpc>
+                <a:spcPct val="115000"/>
+              </a:lnSpc>
+              <a:spcAft>
+                <a:spcPts val="400"/>
+              </a:spcAft>
+            </a:pPr>
+            <a:r>
+              <a:rPr sz="1050" b="1">
+                <a:solidFill>
+                  <a:srgbClr val="142A4A"/>
+                </a:solidFill>
+                <a:latin typeface="Apple SD Gothic Neo"/>
+              </a:rPr>
+              <a:t>최고난도
+수학</a:t>
+            </a:r>
+          </a:p>
+          <a:p>
+            <a:pPr algn="ctr">
+              <a:lnSpc>
+                <a:spcPct val="115000"/>
+              </a:lnSpc>
+              <a:spcAft>
+                <a:spcPts val="400"/>
+              </a:spcAft>
+            </a:pPr>
+            <a:r>
+              <a:rPr sz="1400" b="1">
+                <a:solidFill>
+                  <a:srgbClr val="6B7B8C"/>
+                </a:solidFill>
+                <a:latin typeface="Apple SD Gothic Neo"/>
+              </a:rPr>
+              <a:t>Grok</a:t>
+            </a:r>
+          </a:p>
+          <a:p>
+            <a:pPr algn="ctr">
+              <a:lnSpc>
+                <a:spcPct val="115000"/>
+              </a:lnSpc>
+              <a:spcAft>
+                <a:spcPts val="400"/>
+              </a:spcAft>
+            </a:pPr>
+            <a:r>
+              <a:rPr sz="950" b="0">
+                <a:solidFill>
+                  <a:srgbClr val="444A55"/>
+                </a:solidFill>
+                <a:latin typeface="Apple SD Gothic Neo"/>
+              </a:rPr>
+              <a:t>Frontier 54%</a:t>
+            </a:r>
+          </a:p>
+        </p:txBody>
+      </p:sp>
+      <p:sp>
+        <p:nvSpPr>
+          <p:cNvPr id="19" name="Rounded Rectangle 18"/>
+          <p:cNvSpPr/>
+          <p:nvPr/>
+        </p:nvSpPr>
+        <p:spPr>
+          <a:xfrm>
+            <a:off x="457200" y="5230368"/>
+            <a:ext cx="11292840" cy="868680"/>
+          </a:xfrm>
+          <a:prstGeom prst="roundRect">
+            <a:avLst/>
+          </a:prstGeom>
+          <a:solidFill>
+            <a:srgbClr val="142A4A"/>
+          </a:solidFill>
+          <a:ln>
+            <a:noFill/>
+          </a:ln>
+          <a:effectLst/>
+        </p:spPr>
+        <p:style>
+          <a:lnRef idx="1">
+            <a:schemeClr val="accent1"/>
+          </a:lnRef>
+          <a:fillRef idx="3">
+            <a:schemeClr val="accent1"/>
+          </a:fillRef>
+          <a:effectRef idx="2">
+            <a:schemeClr val="accent1"/>
+          </a:effectRef>
+          <a:fontRef idx="minor">
+            <a:schemeClr val="lt1"/>
+          </a:fontRef>
+        </p:style>
+        <p:txBody>
+          <a:bodyPr rtlCol="0" anchor="ctr"/>
+          <a:lstStyle/>
+          <a:p>
+            <a:pPr algn="ctr"/>
+          </a:p>
+        </p:txBody>
+      </p:sp>
+      <p:sp>
+        <p:nvSpPr>
+          <p:cNvPr id="20" name="TextBox 19"/>
+          <p:cNvSpPr txBox="1"/>
+          <p:nvPr/>
+        </p:nvSpPr>
+        <p:spPr>
+          <a:xfrm>
+            <a:off x="640080" y="5230368"/>
+            <a:ext cx="10927080" cy="868680"/>
+          </a:xfrm>
+          <a:prstGeom prst="rect">
+            <a:avLst/>
+          </a:prstGeom>
+          <a:noFill/>
+        </p:spPr>
+        <p:txBody>
+          <a:bodyPr wrap="square" anchor="ctr" lIns="25400" rIns="25400" tIns="25400" bIns="25400">
+            <a:spAutoFit/>
+          </a:bodyPr>
+          <a:lstStyle/>
+          <a:p>
+            <a:pPr algn="l">
+              <a:lnSpc>
+                <a:spcPct val="115000"/>
+              </a:lnSpc>
+              <a:spcAft>
+                <a:spcPts val="200"/>
+              </a:spcAft>
+            </a:pPr>
+            <a:r>
+              <a:rPr sz="1200" b="1">
+                <a:solidFill>
+                  <a:srgbClr val="9FC4E8"/>
+                </a:solidFill>
+                <a:latin typeface="Apple SD Gothic Neo"/>
+              </a:rPr>
+              <a:t>한 줄 요약</a:t>
+            </a:r>
+          </a:p>
+          <a:p>
+            <a:pPr algn="l">
+              <a:lnSpc>
+                <a:spcPct val="115000"/>
+              </a:lnSpc>
+              <a:spcAft>
+                <a:spcPts val="200"/>
+              </a:spcAft>
+            </a:pPr>
+            <a:r>
+              <a:rPr sz="1100" b="0">
+                <a:solidFill>
+                  <a:srgbClr val="FFFFFF"/>
+                </a:solidFill>
+                <a:latin typeface="Apple SD Gothic Neo"/>
+              </a:rPr>
+              <a:t>코딩·복잡한 생각 → Claude  |  터미널·수학 → GPT  |  과학 → Gemini  |  초난도 수학·저비용 → Grok</a:t>
+            </a:r>
+          </a:p>
+          <a:p>
+            <a:pPr algn="l">
+              <a:lnSpc>
+                <a:spcPct val="115000"/>
+              </a:lnSpc>
+              <a:spcAft>
+                <a:spcPts val="200"/>
+              </a:spcAft>
+            </a:pPr>
+            <a:r>
+              <a:rPr sz="1100" b="0">
+                <a:solidFill>
+                  <a:srgbClr val="FFFFFF"/>
+                </a:solidFill>
+                <a:latin typeface="Apple SD Gothic Neo"/>
+              </a:rPr>
+              <a:t>시험마다 1등이 다름 → '우리 팀이 자주 하는 일'과 같은 시험 점수를 보면 선택이 쉬움</a:t>
+            </a:r>
+          </a:p>
+        </p:txBody>
+      </p:sp>
+      <p:sp>
+        <p:nvSpPr>
+          <p:cNvPr id="21" name="TextBox 20"/>
+          <p:cNvSpPr txBox="1"/>
+          <p:nvPr/>
+        </p:nvSpPr>
+        <p:spPr>
+          <a:xfrm>
+            <a:off x="11338560" y="6492240"/>
+            <a:ext cx="731520" cy="274320"/>
+          </a:xfrm>
+          <a:prstGeom prst="rect">
+            <a:avLst/>
+          </a:prstGeom>
+          <a:noFill/>
+        </p:spPr>
+        <p:txBody>
+          <a:bodyPr wrap="square" anchor="t" lIns="25400" rIns="25400" tIns="25400" bIns="25400">
+            <a:spAutoFit/>
+          </a:bodyPr>
+          <a:lstStyle/>
+          <a:p>
+            <a:pPr algn="r">
+              <a:lnSpc>
+                <a:spcPct val="100000"/>
+              </a:lnSpc>
+              <a:spcAft>
+                <a:spcPts val="400"/>
+              </a:spcAft>
+            </a:pPr>
+            <a:r>
+              <a:rPr sz="1000" b="0">
+                <a:solidFill>
+                  <a:srgbClr val="8A929E"/>
+                </a:solidFill>
+                <a:latin typeface="Apple SD Gothic Neo"/>
+              </a:rPr>
+              <a:t>(7/8)</a:t>
+            </a:r>
+          </a:p>
+        </p:txBody>
+      </p:sp>
+    </p:spTree>
+  </p:cSld>
+  <p:clrMapOvr>
+    <a:masterClrMapping/>
+  </p:clrMapOvr>
+</p:sld>
+</file>
+
+<file path=ppt/slides/slide8.xml><?xml version="1.0" encoding="utf-8"?>
+<p:sld xmlns:a="http://schemas.openxmlformats.org/drawingml/2006/main" xmlns:p="http://schemas.openxmlformats.org/presentationml/2006/main" xmlns:r="http://schemas.openxmlformats.org/officeDocument/2006/relationships">
+  <p:cSld>
+    <p:bg>
+      <p:bgPr>
+        <a:solidFill>
+          <a:srgbClr val="FFFFFF"/>
+        </a:solidFill>
+        <a:effectLst/>
+      </p:bgPr>
+    </p:bg>
+    <p:spTree>
+      <p:nvGrpSpPr>
+        <p:cNvPr id="1" name=""/>
+        <p:cNvGrpSpPr/>
+        <p:nvPr/>
+      </p:nvGrpSpPr>
+      <p:grpSpPr/>
+      <p:sp>
+        <p:nvSpPr>
+          <p:cNvPr id="2" name="Rectangle 1"/>
+          <p:cNvSpPr/>
+          <p:nvPr/>
+        </p:nvSpPr>
+        <p:spPr>
+          <a:xfrm>
+            <a:off x="0" y="0"/>
+            <a:ext cx="12191695" cy="914400"/>
+          </a:xfrm>
+          <a:prstGeom prst="rect">
+            <a:avLst/>
+          </a:prstGeom>
+          <a:solidFill>
+            <a:srgbClr val="142A4A"/>
+          </a:solidFill>
+          <a:ln>
+            <a:noFill/>
+          </a:ln>
+          <a:effectLst/>
+        </p:spPr>
+        <p:style>
+          <a:lnRef idx="1">
+            <a:schemeClr val="accent1"/>
+          </a:lnRef>
+          <a:fillRef idx="3">
+            <a:schemeClr val="accent1"/>
+          </a:fillRef>
+          <a:effectRef idx="2">
+            <a:schemeClr val="accent1"/>
+          </a:effectRef>
+          <a:fontRef idx="minor">
+            <a:schemeClr val="lt1"/>
+          </a:fontRef>
+        </p:style>
+        <p:txBody>
+          <a:bodyPr rtlCol="0" anchor="ctr"/>
+          <a:lstStyle/>
+          <a:p>
+            <a:pPr algn="ctr"/>
+          </a:p>
+        </p:txBody>
+      </p:sp>
+      <p:sp>
+        <p:nvSpPr>
+          <p:cNvPr id="3" name="Rectangle 2"/>
+          <p:cNvSpPr/>
+          <p:nvPr/>
+        </p:nvSpPr>
+        <p:spPr>
+          <a:xfrm>
+            <a:off x="0" y="914400"/>
+            <a:ext cx="12191695" cy="38100"/>
+          </a:xfrm>
+          <a:prstGeom prst="rect">
+            <a:avLst/>
+          </a:prstGeom>
+          <a:solidFill>
+            <a:srgbClr val="F27E2E"/>
+          </a:solidFill>
+          <a:ln>
+            <a:noFill/>
+          </a:ln>
+          <a:effectLst/>
+        </p:spPr>
+        <p:style>
+          <a:lnRef idx="1">
+            <a:schemeClr val="accent1"/>
+          </a:lnRef>
+          <a:fillRef idx="3">
+            <a:schemeClr val="accent1"/>
+          </a:fillRef>
+          <a:effectRef idx="2">
+            <a:schemeClr val="accent1"/>
+          </a:effectRef>
+          <a:fontRef idx="minor">
+            <a:schemeClr val="lt1"/>
+          </a:fontRef>
+        </p:style>
+        <p:txBody>
+          <a:bodyPr rtlCol="0" anchor="ctr"/>
+          <a:lstStyle/>
+          <a:p>
+            <a:pPr algn="ctr"/>
+          </a:p>
+        </p:txBody>
+      </p:sp>
+      <p:sp>
+        <p:nvSpPr>
+          <p:cNvPr id="4" name="TextBox 3"/>
+          <p:cNvSpPr txBox="1"/>
+          <p:nvPr/>
+        </p:nvSpPr>
+        <p:spPr>
+          <a:xfrm>
+            <a:off x="502920" y="118872"/>
+            <a:ext cx="10972800" cy="274320"/>
+          </a:xfrm>
+          <a:prstGeom prst="rect">
+            <a:avLst/>
+          </a:prstGeom>
+          <a:noFill/>
+        </p:spPr>
+        <p:txBody>
+          <a:bodyPr wrap="square" anchor="t" lIns="25400" rIns="25400" tIns="25400" bIns="25400">
+            <a:spAutoFit/>
+          </a:bodyPr>
+          <a:lstStyle/>
+          <a:p>
+            <a:pPr algn="l">
+              <a:lnSpc>
+                <a:spcPct val="100000"/>
+              </a:lnSpc>
+              <a:spcAft>
+                <a:spcPts val="400"/>
+              </a:spcAft>
+            </a:pPr>
+            <a:r>
+              <a:rPr sz="1100" b="1">
+                <a:solidFill>
+                  <a:srgbClr val="9FC4E8"/>
+                </a:solidFill>
+                <a:latin typeface="Apple SD Gothic Neo"/>
+              </a:rPr>
+              <a:t>NC HW 개발팀  |  코딩·추론 역량 비교 (2026.6)</a:t>
+            </a:r>
+          </a:p>
+        </p:txBody>
+      </p:sp>
+      <p:sp>
+        <p:nvSpPr>
+          <p:cNvPr id="5" name="TextBox 4"/>
+          <p:cNvSpPr txBox="1"/>
+          <p:nvPr/>
+        </p:nvSpPr>
+        <p:spPr>
+          <a:xfrm>
+            <a:off x="502920" y="365760"/>
+            <a:ext cx="11155680" cy="502920"/>
+          </a:xfrm>
+          <a:prstGeom prst="rect">
+            <a:avLst/>
+          </a:prstGeom>
+          <a:noFill/>
+        </p:spPr>
+        <p:txBody>
+          <a:bodyPr wrap="square" anchor="t" lIns="25400" rIns="25400" tIns="25400" bIns="25400">
+            <a:spAutoFit/>
+          </a:bodyPr>
+          <a:lstStyle/>
+          <a:p>
+            <a:pPr algn="l">
+              <a:lnSpc>
+                <a:spcPct val="100000"/>
+              </a:lnSpc>
+              <a:spcAft>
+                <a:spcPts val="400"/>
+              </a:spcAft>
+            </a:pPr>
+            <a:r>
+              <a:rPr sz="2200" b="1">
+                <a:solidFill>
+                  <a:srgbClr val="FFFFFF"/>
+                </a:solidFill>
+                <a:latin typeface="Apple SD Gothic Neo"/>
+              </a:rPr>
+              <a:t>점수는 어디서 가져왔나요?</a:t>
+            </a:r>
+          </a:p>
+        </p:txBody>
+      </p:sp>
+      <p:sp>
+        <p:nvSpPr>
+          <p:cNvPr id="6" name="TextBox 5"/>
+          <p:cNvSpPr txBox="1"/>
+          <p:nvPr/>
+        </p:nvSpPr>
+        <p:spPr>
+          <a:xfrm>
+            <a:off x="594360" y="1417320"/>
+            <a:ext cx="10972800" cy="4114800"/>
+          </a:xfrm>
+          <a:prstGeom prst="rect">
+            <a:avLst/>
+          </a:prstGeom>
+          <a:noFill/>
+        </p:spPr>
+        <p:txBody>
+          <a:bodyPr wrap="square" anchor="t" lIns="25400" rIns="25400" tIns="25400" bIns="25400">
+            <a:spAutoFit/>
+          </a:bodyPr>
+          <a:lstStyle/>
+          <a:p>
+            <a:pPr algn="l">
+              <a:lnSpc>
+                <a:spcPct val="130000"/>
+              </a:lnSpc>
+              <a:spcAft>
+                <a:spcPts val="400"/>
+              </a:spcAft>
+            </a:pPr>
+            <a:r>
+              <a:rPr sz="1400" b="1">
+                <a:solidFill>
+                  <a:srgbClr val="142A4A"/>
+                </a:solidFill>
+                <a:latin typeface="Apple SD Gothic Neo"/>
+              </a:rPr>
+              <a:t>공식 자료 (각 AI 회사가 직접 공개한 시험 점수)</a:t>
+            </a:r>
+          </a:p>
+          <a:p>
+            <a:pPr algn="l">
+              <a:lnSpc>
+                <a:spcPct val="130000"/>
+              </a:lnSpc>
+              <a:spcAft>
+                <a:spcPts val="400"/>
+              </a:spcAft>
+            </a:pPr>
+            <a:r>
+              <a:rPr sz="1150" b="0">
+                <a:solidFill>
+                  <a:srgbClr val="444A55"/>
+                </a:solidFill>
+                <a:latin typeface="Apple SD Gothic Neo"/>
+              </a:rPr>
+              <a:t>Anthropic Claude Opus 4.8 System Card  ·  OpenAI GPT-5.5  ·  Google Gemini 3.1 Pro  ·  xAI Grok 4.3</a:t>
+            </a:r>
+          </a:p>
+          <a:p>
+            <a:pPr algn="l">
+              <a:lnSpc>
+                <a:spcPct val="130000"/>
+              </a:lnSpc>
+              <a:spcAft>
+                <a:spcPts val="400"/>
+              </a:spcAft>
+            </a:pPr>
+            <a:r>
+              <a:rPr sz="800" b="0">
+                <a:solidFill>
+                  <a:srgbClr val="444A55"/>
+                </a:solidFill>
+                <a:latin typeface="Apple SD Gothic Neo"/>
+              </a:rPr>
+              <a:t/>
+            </a:r>
+          </a:p>
+          <a:p>
+            <a:pPr algn="l">
+              <a:lnSpc>
+                <a:spcPct val="130000"/>
+              </a:lnSpc>
+              <a:spcAft>
+                <a:spcPts val="400"/>
+              </a:spcAft>
+            </a:pPr>
+            <a:r>
+              <a:rPr sz="1400" b="1">
+                <a:solidFill>
+                  <a:srgbClr val="142A4A"/>
+                </a:solidFill>
+                <a:latin typeface="Apple SD Gothic Neo"/>
+              </a:rPr>
+              <a:t>독립 검증 (회사 말만 믿지 않고 다른 기관이 모아둔 자료)</a:t>
+            </a:r>
+          </a:p>
+          <a:p>
+            <a:pPr algn="l">
+              <a:lnSpc>
+                <a:spcPct val="130000"/>
+              </a:lnSpc>
+              <a:spcAft>
+                <a:spcPts val="400"/>
+              </a:spcAft>
+            </a:pPr>
+            <a:r>
+              <a:rPr sz="1150" b="0">
+                <a:solidFill>
+                  <a:srgbClr val="444A55"/>
+                </a:solidFill>
+                <a:latin typeface="Apple SD Gothic Neo"/>
+              </a:rPr>
+              <a:t>Artificial Analysis  ·  Vellum  ·  Weights &amp; Biases ml-news</a:t>
+            </a:r>
+          </a:p>
+          <a:p>
+            <a:pPr algn="l">
+              <a:lnSpc>
+                <a:spcPct val="130000"/>
+              </a:lnSpc>
+              <a:spcAft>
+                <a:spcPts val="400"/>
+              </a:spcAft>
+            </a:pPr>
+            <a:r>
+              <a:rPr sz="800" b="0">
+                <a:solidFill>
+                  <a:srgbClr val="444A55"/>
+                </a:solidFill>
+                <a:latin typeface="Apple SD Gothic Neo"/>
+              </a:rPr>
+              <a:t/>
+            </a:r>
+          </a:p>
+          <a:p>
+            <a:pPr algn="l">
+              <a:lnSpc>
+                <a:spcPct val="130000"/>
+              </a:lnSpc>
+              <a:spcAft>
+                <a:spcPts val="400"/>
+              </a:spcAft>
+            </a:pPr>
+            <a:r>
+              <a:rPr sz="1400" b="1">
+                <a:solidFill>
+                  <a:srgbClr val="F27E2E"/>
+                </a:solidFill>
+                <a:latin typeface="Apple SD Gothic Neo"/>
+              </a:rPr>
+              <a:t>꼭 기억할 점</a:t>
+            </a:r>
+          </a:p>
+          <a:p>
+            <a:pPr algn="l">
+              <a:lnSpc>
+                <a:spcPct val="130000"/>
+              </a:lnSpc>
+              <a:spcAft>
+                <a:spcPts val="400"/>
+              </a:spcAft>
+            </a:pPr>
+            <a:r>
+              <a:rPr sz="1150" b="0">
+                <a:solidFill>
+                  <a:srgbClr val="444A55"/>
+                </a:solidFill>
+                <a:latin typeface="Apple SD Gothic Neo"/>
+              </a:rPr>
+              <a:t>① 같은 시험이어도 측정 방법이 다르면 점수가 달라질 수 있음</a:t>
+            </a:r>
+          </a:p>
+          <a:p>
+            <a:pPr algn="l">
+              <a:lnSpc>
+                <a:spcPct val="130000"/>
+              </a:lnSpc>
+              <a:spcAft>
+                <a:spcPts val="400"/>
+              </a:spcAft>
+            </a:pPr>
+            <a:r>
+              <a:rPr sz="1150" b="0">
+                <a:solidFill>
+                  <a:srgbClr val="444A55"/>
+                </a:solidFill>
+                <a:latin typeface="Apple SD Gothic Neo"/>
+              </a:rPr>
+              <a:t>② * 표시는 공식 미공개라 근사치 — 보고 시 '약' 또는 '추정'으로 말하면 됨</a:t>
+            </a:r>
+          </a:p>
+          <a:p>
+            <a:pPr algn="l">
+              <a:lnSpc>
+                <a:spcPct val="130000"/>
+              </a:lnSpc>
+              <a:spcAft>
+                <a:spcPts val="400"/>
+              </a:spcAft>
+            </a:pPr>
+            <a:r>
+              <a:rPr sz="1150" b="0">
+                <a:solidFill>
+                  <a:srgbClr val="444A55"/>
+                </a:solidFill>
+                <a:latin typeface="Apple SD Gothic Neo"/>
+              </a:rPr>
+              <a:t>③ 2~3% 차이는 오차 범위 — '비슷하다'고 봐도 됨</a:t>
+            </a:r>
+          </a:p>
+        </p:txBody>
+      </p:sp>
+      <p:sp>
+        <p:nvSpPr>
+          <p:cNvPr id="7" name="TextBox 6"/>
+          <p:cNvSpPr txBox="1"/>
+          <p:nvPr/>
+        </p:nvSpPr>
+        <p:spPr>
+          <a:xfrm>
+            <a:off x="11338560" y="6492240"/>
+            <a:ext cx="731520" cy="274320"/>
+          </a:xfrm>
+          <a:prstGeom prst="rect">
+            <a:avLst/>
+          </a:prstGeom>
+          <a:noFill/>
+        </p:spPr>
+        <p:txBody>
+          <a:bodyPr wrap="square" anchor="t" lIns="25400" rIns="25400" tIns="25400" bIns="25400">
+            <a:spAutoFit/>
+          </a:bodyPr>
+          <a:lstStyle/>
+          <a:p>
+            <a:pPr algn="r">
+              <a:lnSpc>
+                <a:spcPct val="100000"/>
+              </a:lnSpc>
+              <a:spcAft>
+                <a:spcPts val="400"/>
+              </a:spcAft>
+            </a:pPr>
+            <a:r>
+              <a:rPr sz="1000" b="0">
+                <a:solidFill>
+                  <a:srgbClr val="8A929E"/>
+                </a:solidFill>
+                <a:latin typeface="Apple SD Gothic Neo"/>
+              </a:rPr>
+              <a:t>(8/8)</a:t>
             </a:r>
           </a:p>
         </p:txBody>

--- a/외부AI_4종_벤치마크_비교.pptx
+++ b/외부AI_4종_벤치마크_비교.pptx
@@ -133,7 +133,7 @@
               </a:defRPr>
             </a:pPr>
             <a:r>
-              <a:t>영역별 평균 점수 — 어디가 강한지 큰 그림 (%)</a:t>
+              <a:t>영역별 평균 점수 (%)</a:t>
             </a:r>
           </a:p>
         </c:rich>
@@ -174,12 +174,10 @@
               <c:strCache>
                 <c:ptCount val="2"/>
                 <c:pt idx="0">
-                  <c:v>코딩
-(평균)</c:v>
+                  <c:v>코딩 (평균)</c:v>
                 </c:pt>
                 <c:pt idx="1">
-                  <c:v>추론
-(평균)</c:v>
+                  <c:v>추론 (평균)</c:v>
                 </c:pt>
               </c:strCache>
             </c:strRef>
@@ -228,12 +226,10 @@
               <c:strCache>
                 <c:ptCount val="2"/>
                 <c:pt idx="0">
-                  <c:v>코딩
-(평균)</c:v>
+                  <c:v>코딩 (평균)</c:v>
                 </c:pt>
                 <c:pt idx="1">
-                  <c:v>추론
-(평균)</c:v>
+                  <c:v>추론 (평균)</c:v>
                 </c:pt>
               </c:strCache>
             </c:strRef>
@@ -282,12 +278,10 @@
               <c:strCache>
                 <c:ptCount val="2"/>
                 <c:pt idx="0">
-                  <c:v>코딩
-(평균)</c:v>
+                  <c:v>코딩 (평균)</c:v>
                 </c:pt>
                 <c:pt idx="1">
-                  <c:v>추론
-(평균)</c:v>
+                  <c:v>추론 (평균)</c:v>
                 </c:pt>
               </c:strCache>
             </c:strRef>
@@ -336,12 +330,10 @@
               <c:strCache>
                 <c:ptCount val="2"/>
                 <c:pt idx="0">
-                  <c:v>코딩
-(평균)</c:v>
+                  <c:v>코딩 (평균)</c:v>
                 </c:pt>
                 <c:pt idx="1">
-                  <c:v>추론
-(평균)</c:v>
+                  <c:v>추론 (평균)</c:v>
                 </c:pt>
               </c:strCache>
             </c:strRef>
@@ -380,7 +372,7 @@
           <a:lstStyle/>
           <a:p>
             <a:pPr>
-              <a:defRPr sz="900">
+              <a:defRPr sz="1000">
                 <a:latin typeface="Apple SD Gothic Neo"/>
               </a:defRPr>
             </a:pPr>
@@ -397,7 +389,7 @@
         <c:axId val="-2113994440"/>
         <c:scaling>
           <c:max val="100.0"/>
-          <c:min val="0.0"/>
+          <c:min val="40.0"/>
         </c:scaling>
         <c:delete val="0"/>
         <c:axPos val="l"/>
@@ -410,7 +402,7 @@
           <a:lstStyle/>
           <a:p>
             <a:pPr>
-              <a:defRPr sz="900">
+              <a:defRPr sz="1000">
                 <a:latin typeface="Apple SD Gothic Neo"/>
               </a:defRPr>
             </a:pPr>
@@ -428,13 +420,231 @@
         <a:lstStyle/>
         <a:p>
           <a:pPr>
-            <a:defRPr sz="850">
+            <a:defRPr sz="900">
               <a:latin typeface="Apple SD Gothic Neo"/>
             </a:defRPr>
           </a:pPr>
         </a:p>
       </c:txPr>
     </c:legend>
+    <c:dispBlanksAs val="gap"/>
+  </c:chart>
+  <c:txPr>
+    <a:bodyPr/>
+    <a:lstStyle/>
+    <a:p>
+      <a:pPr>
+        <a:defRPr sz="1800"/>
+      </a:pPr>
+      <a:endParaRPr lang="en-US"/>
+    </a:p>
+  </c:txPr>
+  <c:externalData r:id="rId1">
+    <c:autoUpdate val="0"/>
+  </c:externalData>
+</c:chartSpace>
+</file>
+
+<file path=ppt/charts/chart10.xml><?xml version="1.0" encoding="utf-8"?>
+<c:chartSpace xmlns:c="http://schemas.openxmlformats.org/drawingml/2006/chart" xmlns:a="http://schemas.openxmlformats.org/drawingml/2006/main" xmlns:r="http://schemas.openxmlformats.org/officeDocument/2006/relationships">
+  <c:date1904 val="0"/>
+  <c:chart>
+    <c:title>
+      <c:tx>
+        <c:rich>
+          <a:bodyPr/>
+          <a:lstStyle/>
+          <a:p>
+            <a:pPr>
+              <a:defRPr sz="1150" b="1">
+                <a:solidFill>
+                  <a:srgbClr val="142A4A"/>
+                </a:solidFill>
+                <a:latin typeface="Apple SD Gothic Neo"/>
+              </a:defRPr>
+            </a:pPr>
+            <a:r>
+              <a:t>HLE — 검색·계산 도구 사용</a:t>
+            </a:r>
+          </a:p>
+          <a:p>
+            <a:r>
+              <a:t>도구 쓰면 점수 상승</a:t>
+            </a:r>
+          </a:p>
+        </c:rich>
+      </c:tx>
+      <c:layout/>
+      <c:overlay val="0"/>
+    </c:title>
+    <c:autoTitleDeleted val="0"/>
+    <c:plotArea>
+      <c:barChart>
+        <c:barDir val="bar"/>
+        <c:grouping val="clustered"/>
+        <c:ser>
+          <c:idx val="0"/>
+          <c:order val="0"/>
+          <c:tx>
+            <c:strRef>
+              <c:f>Sheet1!$B$1</c:f>
+              <c:strCache>
+                <c:ptCount val="1"/>
+                <c:pt idx="0">
+                  <c:v/>
+                </c:pt>
+              </c:strCache>
+            </c:strRef>
+          </c:tx>
+          <c:dPt>
+            <c:idx val="0"/>
+            <c:spPr>
+              <a:solidFill>
+                <a:srgbClr val="D4774A"/>
+              </a:solidFill>
+              <a:ln>
+                <a:noFill/>
+              </a:ln>
+            </c:spPr>
+          </c:dPt>
+          <c:dPt>
+            <c:idx val="1"/>
+            <c:spPr>
+              <a:solidFill>
+                <a:srgbClr val="10A37A"/>
+              </a:solidFill>
+              <a:ln>
+                <a:noFill/>
+              </a:ln>
+            </c:spPr>
+          </c:dPt>
+          <c:dPt>
+            <c:idx val="2"/>
+            <c:spPr>
+              <a:solidFill>
+                <a:srgbClr val="4285F4"/>
+              </a:solidFill>
+              <a:ln>
+                <a:noFill/>
+              </a:ln>
+            </c:spPr>
+          </c:dPt>
+          <c:cat>
+            <c:strRef>
+              <c:f>Sheet1!$A$2:$A$4</c:f>
+              <c:strCache>
+                <c:ptCount val="3"/>
+                <c:pt idx="0">
+                  <c:v>Claude</c:v>
+                </c:pt>
+                <c:pt idx="1">
+                  <c:v>GPT-5.5</c:v>
+                </c:pt>
+                <c:pt idx="2">
+                  <c:v>Gemini</c:v>
+                </c:pt>
+              </c:strCache>
+            </c:strRef>
+          </c:cat>
+          <c:val>
+            <c:numRef>
+              <c:f>Sheet1!$B$2:$B$4</c:f>
+              <c:numCache>
+                <c:formatCode>General</c:formatCode>
+                <c:ptCount val="3"/>
+                <c:pt idx="0">
+                  <c:v>57.9</c:v>
+                </c:pt>
+                <c:pt idx="1">
+                  <c:v>52.2</c:v>
+                </c:pt>
+                <c:pt idx="2">
+                  <c:v>51.4</c:v>
+                </c:pt>
+              </c:numCache>
+            </c:numRef>
+          </c:val>
+        </c:ser>
+        <c:dLbls>
+          <c:numFmt formatCode="0.0&quot;%&quot;" sourceLinked="0"/>
+          <c:txPr>
+            <a:bodyPr/>
+            <a:lstStyle/>
+            <a:p>
+              <a:pPr>
+                <a:defRPr sz="1000" b="1">
+                  <a:latin typeface="Apple SD Gothic Neo"/>
+                </a:defRPr>
+              </a:pPr>
+            </a:p>
+          </c:txPr>
+          <c:dLblPos val="outEnd"/>
+          <c:showLegendKey val="0"/>
+          <c:showVal val="1"/>
+          <c:showCatName val="0"/>
+          <c:showSerName val="0"/>
+          <c:showPercent val="0"/>
+          <c:showBubbleSize val="0"/>
+          <c:showLeaderLines val="1"/>
+        </c:dLbls>
+        <c:axId val="-2068027336"/>
+        <c:axId val="-2113994440"/>
+      </c:barChart>
+      <c:catAx>
+        <c:axId val="-2068027336"/>
+        <c:scaling>
+          <c:orientation val="maxMin"/>
+          <c:max val="65.0"/>
+          <c:min val="45.0"/>
+        </c:scaling>
+        <c:delete val="0"/>
+        <c:axPos val="l"/>
+        <c:majorGridlines/>
+        <c:majorTickMark val="out"/>
+        <c:minorTickMark val="none"/>
+        <c:tickLblPos val="nextTo"/>
+        <c:txPr>
+          <a:bodyPr/>
+          <a:lstStyle/>
+          <a:p>
+            <a:pPr>
+              <a:defRPr sz="1000">
+                <a:latin typeface="Apple SD Gothic Neo"/>
+              </a:defRPr>
+            </a:pPr>
+          </a:p>
+        </c:txPr>
+        <c:crossAx val="-2113994440"/>
+        <c:crosses val="autoZero"/>
+        <c:auto val="1"/>
+        <c:lblAlgn val="ctr"/>
+        <c:lblOffset val="100"/>
+        <c:noMultiLvlLbl val="0"/>
+      </c:catAx>
+      <c:valAx>
+        <c:axId val="-2113994440"/>
+        <c:scaling/>
+        <c:delete val="0"/>
+        <c:axPos val="b"/>
+        <c:majorGridlines/>
+        <c:majorTickMark val="out"/>
+        <c:minorTickMark val="none"/>
+        <c:tickLblPos val="nextTo"/>
+        <c:txPr>
+          <a:bodyPr/>
+          <a:lstStyle/>
+          <a:p>
+            <a:pPr>
+              <a:defRPr sz="1000">
+                <a:latin typeface="Apple SD Gothic Neo"/>
+              </a:defRPr>
+            </a:pPr>
+          </a:p>
+        </c:txPr>
+        <c:crossAx val="-2068027336"/>
+        <c:crosses val="autoZero"/>
+      </c:valAx>
+    </c:plotArea>
     <c:dispBlanksAs val="gap"/>
   </c:chart>
   <c:txPr>
@@ -472,7 +682,7 @@
               </a:defRPr>
             </a:pPr>
             <a:r>
-              <a:t>SWE-bench Verified (보통 난이도)</a:t>
+              <a:t>SWE-bench Verified (보통)</a:t>
             </a:r>
           </a:p>
           <a:p>
@@ -554,18 +764,16 @@
               <c:strCache>
                 <c:ptCount val="4"/>
                 <c:pt idx="0">
-                  <c:v>Claude
-Opus 4.8</c:v>
+                  <c:v>Claude</c:v>
                 </c:pt>
                 <c:pt idx="1">
                   <c:v>GPT-5.5</c:v>
                 </c:pt>
                 <c:pt idx="2">
-                  <c:v>Gemini
-3.1 Pro</c:v>
+                  <c:v>Gemini</c:v>
                 </c:pt>
                 <c:pt idx="3">
-                  <c:v>Grok 4.3</c:v>
+                  <c:v>Grok</c:v>
                 </c:pt>
               </c:strCache>
             </c:strRef>
@@ -593,13 +801,13 @@
           </c:val>
         </c:ser>
         <c:dLbls>
-          <c:numFmt formatCode="0&quot;%&quot;" sourceLinked="0"/>
+          <c:numFmt formatCode="0.0&quot;%&quot;" sourceLinked="0"/>
           <c:txPr>
             <a:bodyPr/>
             <a:lstStyle/>
             <a:p>
               <a:pPr>
-                <a:defRPr sz="900">
+                <a:defRPr sz="1000" b="1">
                   <a:latin typeface="Apple SD Gothic Neo"/>
                 </a:defRPr>
               </a:pPr>
@@ -622,7 +830,7 @@
         <c:scaling>
           <c:orientation val="maxMin"/>
           <c:max val="100.0"/>
-          <c:min val="0.0"/>
+          <c:min val="60.0"/>
         </c:scaling>
         <c:delete val="0"/>
         <c:axPos val="l"/>
@@ -635,7 +843,7 @@
           <a:lstStyle/>
           <a:p>
             <a:pPr>
-              <a:defRPr sz="900">
+              <a:defRPr sz="1000">
                 <a:latin typeface="Apple SD Gothic Neo"/>
               </a:defRPr>
             </a:pPr>
@@ -662,7 +870,7 @@
           <a:lstStyle/>
           <a:p>
             <a:pPr>
-              <a:defRPr sz="900">
+              <a:defRPr sz="1000">
                 <a:latin typeface="Apple SD Gothic Neo"/>
               </a:defRPr>
             </a:pPr>
@@ -709,7 +917,7 @@
               </a:defRPr>
             </a:pPr>
             <a:r>
-              <a:t>SWE-bench Pro (어려운 버전)</a:t>
+              <a:t>SWE-bench Pro (어려움)</a:t>
             </a:r>
           </a:p>
           <a:p>
@@ -780,15 +988,13 @@
               <c:strCache>
                 <c:ptCount val="3"/>
                 <c:pt idx="0">
-                  <c:v>Claude
-Opus 4.8</c:v>
+                  <c:v>Claude</c:v>
                 </c:pt>
                 <c:pt idx="1">
                   <c:v>GPT-5.5</c:v>
                 </c:pt>
                 <c:pt idx="2">
-                  <c:v>Gemini
-3.1 Pro</c:v>
+                  <c:v>Gemini</c:v>
                 </c:pt>
               </c:strCache>
             </c:strRef>
@@ -813,13 +1019,13 @@
           </c:val>
         </c:ser>
         <c:dLbls>
-          <c:numFmt formatCode="0&quot;%&quot;" sourceLinked="0"/>
+          <c:numFmt formatCode="0.0&quot;%&quot;" sourceLinked="0"/>
           <c:txPr>
             <a:bodyPr/>
             <a:lstStyle/>
             <a:p>
               <a:pPr>
-                <a:defRPr sz="900">
+                <a:defRPr sz="1000" b="1">
                   <a:latin typeface="Apple SD Gothic Neo"/>
                 </a:defRPr>
               </a:pPr>
@@ -841,8 +1047,8 @@
         <c:axId val="-2068027336"/>
         <c:scaling>
           <c:orientation val="maxMin"/>
-          <c:max val="100.0"/>
-          <c:min val="0.0"/>
+          <c:max val="80.0"/>
+          <c:min val="40.0"/>
         </c:scaling>
         <c:delete val="0"/>
         <c:axPos val="l"/>
@@ -855,7 +1061,7 @@
           <a:lstStyle/>
           <a:p>
             <a:pPr>
-              <a:defRPr sz="900">
+              <a:defRPr sz="1000">
                 <a:latin typeface="Apple SD Gothic Neo"/>
               </a:defRPr>
             </a:pPr>
@@ -882,7 +1088,7 @@
           <a:lstStyle/>
           <a:p>
             <a:pPr>
-              <a:defRPr sz="900">
+              <a:defRPr sz="1000">
                 <a:latin typeface="Apple SD Gothic Neo"/>
               </a:defRPr>
             </a:pPr>
@@ -929,12 +1135,12 @@
               </a:defRPr>
             </a:pPr>
             <a:r>
-              <a:t>Terminal-Bench 2.1 (터미널·명령어)</a:t>
-            </a:r>
-          </a:p>
-          <a:p>
-            <a:r>
-              <a:t>긴 명령 작업 성공률</a:t>
+              <a:t>Terminal-Bench 2.1 (터미널)</a:t>
+            </a:r>
+          </a:p>
+          <a:p>
+            <a:r>
+              <a:t>명령 작업 성공률</a:t>
             </a:r>
           </a:p>
         </c:rich>
@@ -1000,15 +1206,13 @@
               <c:strCache>
                 <c:ptCount val="3"/>
                 <c:pt idx="0">
-                  <c:v>Claude
-Opus 4.8</c:v>
+                  <c:v>Claude</c:v>
                 </c:pt>
                 <c:pt idx="1">
                   <c:v>GPT-5.5</c:v>
                 </c:pt>
                 <c:pt idx="2">
-                  <c:v>Gemini
-3.1 Pro</c:v>
+                  <c:v>Gemini</c:v>
                 </c:pt>
               </c:strCache>
             </c:strRef>
@@ -1033,13 +1237,13 @@
           </c:val>
         </c:ser>
         <c:dLbls>
-          <c:numFmt formatCode="0&quot;%&quot;" sourceLinked="0"/>
+          <c:numFmt formatCode="0.0&quot;%&quot;" sourceLinked="0"/>
           <c:txPr>
             <a:bodyPr/>
             <a:lstStyle/>
             <a:p>
               <a:pPr>
-                <a:defRPr sz="900">
+                <a:defRPr sz="1000" b="1">
                   <a:latin typeface="Apple SD Gothic Neo"/>
                 </a:defRPr>
               </a:pPr>
@@ -1061,8 +1265,8 @@
         <c:axId val="-2068027336"/>
         <c:scaling>
           <c:orientation val="maxMin"/>
-          <c:max val="100.0"/>
-          <c:min val="0.0"/>
+          <c:max val="85.0"/>
+          <c:min val="60.0"/>
         </c:scaling>
         <c:delete val="0"/>
         <c:axPos val="l"/>
@@ -1075,7 +1279,7 @@
           <a:lstStyle/>
           <a:p>
             <a:pPr>
-              <a:defRPr sz="900">
+              <a:defRPr sz="1000">
                 <a:latin typeface="Apple SD Gothic Neo"/>
               </a:defRPr>
             </a:pPr>
@@ -1102,7 +1306,7 @@
           <a:lstStyle/>
           <a:p>
             <a:pPr>
-              <a:defRPr sz="900">
+              <a:defRPr sz="1000">
                 <a:latin typeface="Apple SD Gothic Neo"/>
               </a:defRPr>
             </a:pPr>
@@ -1149,12 +1353,12 @@
               </a:defRPr>
             </a:pPr>
             <a:r>
-              <a:t>OSWorld-Verified (PC 직접 조작)</a:t>
-            </a:r>
-          </a:p>
-          <a:p>
-            <a:r>
-              <a:t>Gemini·Grok * 근사치</a:t>
+              <a:t>OSWorld (PC 직접 조작)</a:t>
+            </a:r>
+          </a:p>
+          <a:p>
+            <a:r>
+              <a:t>Grok 미공개</a:t>
             </a:r>
           </a:p>
         </c:rich>
@@ -1220,15 +1424,13 @@
               <c:strCache>
                 <c:ptCount val="3"/>
                 <c:pt idx="0">
-                  <c:v>Claude
-Opus 4.8</c:v>
+                  <c:v>Claude</c:v>
                 </c:pt>
                 <c:pt idx="1">
                   <c:v>GPT-5.5</c:v>
                 </c:pt>
                 <c:pt idx="2">
-                  <c:v>Gemini
-3.1 Pro</c:v>
+                  <c:v>Gemini</c:v>
                 </c:pt>
               </c:strCache>
             </c:strRef>
@@ -1253,13 +1455,13 @@
           </c:val>
         </c:ser>
         <c:dLbls>
-          <c:numFmt formatCode="0&quot;%&quot;" sourceLinked="0"/>
+          <c:numFmt formatCode="0.0&quot;%&quot;" sourceLinked="0"/>
           <c:txPr>
             <a:bodyPr/>
             <a:lstStyle/>
             <a:p>
               <a:pPr>
-                <a:defRPr sz="900">
+                <a:defRPr sz="1000" b="1">
                   <a:latin typeface="Apple SD Gothic Neo"/>
                 </a:defRPr>
               </a:pPr>
@@ -1281,8 +1483,8 @@
         <c:axId val="-2068027336"/>
         <c:scaling>
           <c:orientation val="maxMin"/>
-          <c:max val="100.0"/>
-          <c:min val="0.0"/>
+          <c:max val="90.0"/>
+          <c:min val="65.0"/>
         </c:scaling>
         <c:delete val="0"/>
         <c:axPos val="l"/>
@@ -1295,7 +1497,7 @@
           <a:lstStyle/>
           <a:p>
             <a:pPr>
-              <a:defRPr sz="900">
+              <a:defRPr sz="1000">
                 <a:latin typeface="Apple SD Gothic Neo"/>
               </a:defRPr>
             </a:pPr>
@@ -1322,7 +1524,7 @@
           <a:lstStyle/>
           <a:p>
             <a:pPr>
-              <a:defRPr sz="900">
+              <a:defRPr sz="1000">
                 <a:latin typeface="Apple SD Gothic Neo"/>
               </a:defRPr>
             </a:pPr>
@@ -1369,7 +1571,7 @@
               </a:defRPr>
             </a:pPr>
             <a:r>
-              <a:t>GPQA Diamond (대학원 과학 퀴즈)</a:t>
+              <a:t>GPQA Diamond (과학 퀴즈)</a:t>
             </a:r>
           </a:p>
           <a:p>
@@ -1451,18 +1653,16 @@
               <c:strCache>
                 <c:ptCount val="4"/>
                 <c:pt idx="0">
-                  <c:v>Claude
-Opus 4.8</c:v>
+                  <c:v>Claude</c:v>
                 </c:pt>
                 <c:pt idx="1">
                   <c:v>GPT-5.5</c:v>
                 </c:pt>
                 <c:pt idx="2">
-                  <c:v>Gemini
-3.1 Pro</c:v>
+                  <c:v>Gemini</c:v>
                 </c:pt>
                 <c:pt idx="3">
-                  <c:v>Grok 4.3</c:v>
+                  <c:v>Grok</c:v>
                 </c:pt>
               </c:strCache>
             </c:strRef>
@@ -1490,13 +1690,13 @@
           </c:val>
         </c:ser>
         <c:dLbls>
-          <c:numFmt formatCode="0&quot;%&quot;" sourceLinked="0"/>
+          <c:numFmt formatCode="0.0&quot;%&quot;" sourceLinked="0"/>
           <c:txPr>
             <a:bodyPr/>
             <a:lstStyle/>
             <a:p>
               <a:pPr>
-                <a:defRPr sz="900">
+                <a:defRPr sz="1000" b="1">
                   <a:latin typeface="Apple SD Gothic Neo"/>
                 </a:defRPr>
               </a:pPr>
@@ -1519,7 +1719,7 @@
         <c:scaling>
           <c:orientation val="maxMin"/>
           <c:max val="100.0"/>
-          <c:min val="0.0"/>
+          <c:min val="80.0"/>
         </c:scaling>
         <c:delete val="0"/>
         <c:axPos val="l"/>
@@ -1532,7 +1732,7 @@
           <a:lstStyle/>
           <a:p>
             <a:pPr>
-              <a:defRPr sz="900">
+              <a:defRPr sz="1000">
                 <a:latin typeface="Apple SD Gothic Neo"/>
               </a:defRPr>
             </a:pPr>
@@ -1559,7 +1759,7 @@
           <a:lstStyle/>
           <a:p>
             <a:pPr>
-              <a:defRPr sz="900">
+              <a:defRPr sz="1000">
                 <a:latin typeface="Apple SD Gothic Neo"/>
               </a:defRPr>
             </a:pPr>
@@ -1606,7 +1806,7 @@
               </a:defRPr>
             </a:pPr>
             <a:r>
-              <a:t>HLE — 도구 없이 혼자 풀기</a:t>
+              <a:t>HLE (도구 없이 혼자 풀기)</a:t>
             </a:r>
           </a:p>
           <a:p>
@@ -1688,18 +1888,16 @@
               <c:strCache>
                 <c:ptCount val="4"/>
                 <c:pt idx="0">
-                  <c:v>Claude
-Opus 4.8</c:v>
+                  <c:v>Claude</c:v>
                 </c:pt>
                 <c:pt idx="1">
                   <c:v>GPT-5.5</c:v>
                 </c:pt>
                 <c:pt idx="2">
-                  <c:v>Gemini
-3.1 Pro</c:v>
+                  <c:v>Gemini</c:v>
                 </c:pt>
                 <c:pt idx="3">
-                  <c:v>Grok 4.3</c:v>
+                  <c:v>Grok</c:v>
                 </c:pt>
               </c:strCache>
             </c:strRef>
@@ -1727,13 +1925,13 @@
           </c:val>
         </c:ser>
         <c:dLbls>
-          <c:numFmt formatCode="0&quot;%&quot;" sourceLinked="0"/>
+          <c:numFmt formatCode="0.0&quot;%&quot;" sourceLinked="0"/>
           <c:txPr>
             <a:bodyPr/>
             <a:lstStyle/>
             <a:p>
               <a:pPr>
-                <a:defRPr sz="900">
+                <a:defRPr sz="1000" b="1">
                   <a:latin typeface="Apple SD Gothic Neo"/>
                 </a:defRPr>
               </a:pPr>
@@ -1755,8 +1953,8 @@
         <c:axId val="-2068027336"/>
         <c:scaling>
           <c:orientation val="maxMin"/>
-          <c:max val="100.0"/>
-          <c:min val="0.0"/>
+          <c:max val="60.0"/>
+          <c:min val="30.0"/>
         </c:scaling>
         <c:delete val="0"/>
         <c:axPos val="l"/>
@@ -1769,7 +1967,7 @@
           <a:lstStyle/>
           <a:p>
             <a:pPr>
-              <a:defRPr sz="900">
+              <a:defRPr sz="1000">
                 <a:latin typeface="Apple SD Gothic Neo"/>
               </a:defRPr>
             </a:pPr>
@@ -1796,7 +1994,7 @@
           <a:lstStyle/>
           <a:p>
             <a:pPr>
-              <a:defRPr sz="900">
+              <a:defRPr sz="1000">
                 <a:latin typeface="Apple SD Gothic Neo"/>
               </a:defRPr>
             </a:pPr>
@@ -1843,7 +2041,7 @@
               </a:defRPr>
             </a:pPr>
             <a:r>
-              <a:t>수학 시험 3종 비교 — 막대가 길수록 정답률 높음 (%)</a:t>
+              <a:t>기본·올림피아드 수학 (%)</a:t>
             </a:r>
           </a:p>
         </c:rich>
@@ -1865,7 +2063,7 @@
               <c:strCache>
                 <c:ptCount val="1"/>
                 <c:pt idx="0">
-                  <c:v>MATH-500 (기본~중급)</c:v>
+                  <c:v>MATH-500</c:v>
                 </c:pt>
               </c:strCache>
             </c:strRef>
@@ -1884,18 +2082,16 @@
               <c:strCache>
                 <c:ptCount val="4"/>
                 <c:pt idx="0">
-                  <c:v>Claude
-Opus 4.8</c:v>
+                  <c:v>Claude</c:v>
                 </c:pt>
                 <c:pt idx="1">
                   <c:v>GPT-5.5</c:v>
                 </c:pt>
                 <c:pt idx="2">
-                  <c:v>Gemini
-3.1 Pro</c:v>
+                  <c:v>Gemini</c:v>
                 </c:pt>
                 <c:pt idx="3">
-                  <c:v>Grok 4.3</c:v>
+                  <c:v>Grok</c:v>
                 </c:pt>
               </c:strCache>
             </c:strRef>
@@ -1931,7 +2127,7 @@
               <c:strCache>
                 <c:ptCount val="1"/>
                 <c:pt idx="0">
-                  <c:v>AIME 2026 (올림피아드급)</c:v>
+                  <c:v>AIME 2026</c:v>
                 </c:pt>
               </c:strCache>
             </c:strRef>
@@ -1950,18 +2146,16 @@
               <c:strCache>
                 <c:ptCount val="4"/>
                 <c:pt idx="0">
-                  <c:v>Claude
-Opus 4.8</c:v>
+                  <c:v>Claude</c:v>
                 </c:pt>
                 <c:pt idx="1">
                   <c:v>GPT-5.5</c:v>
                 </c:pt>
                 <c:pt idx="2">
-                  <c:v>Gemini
-3.1 Pro</c:v>
+                  <c:v>Gemini</c:v>
                 </c:pt>
                 <c:pt idx="3">
-                  <c:v>Grok 4.3</c:v>
+                  <c:v>Grok</c:v>
                 </c:pt>
               </c:strCache>
             </c:strRef>
@@ -1988,23 +2182,146 @@
             </c:numRef>
           </c:val>
         </c:ser>
+        <c:axId val="-2068027336"/>
+        <c:axId val="-2113994440"/>
+      </c:barChart>
+      <c:catAx>
+        <c:axId val="-2068027336"/>
+        <c:scaling>
+          <c:orientation val="minMax"/>
+        </c:scaling>
+        <c:delete val="0"/>
+        <c:axPos val="b"/>
+        <c:majorTickMark val="out"/>
+        <c:minorTickMark val="none"/>
+        <c:tickLblPos val="nextTo"/>
+        <c:txPr>
+          <a:bodyPr/>
+          <a:lstStyle/>
+          <a:p>
+            <a:pPr>
+              <a:defRPr sz="1000">
+                <a:latin typeface="Apple SD Gothic Neo"/>
+              </a:defRPr>
+            </a:pPr>
+          </a:p>
+        </c:txPr>
+        <c:crossAx val="-2113994440"/>
+        <c:crosses val="autoZero"/>
+        <c:auto val="1"/>
+        <c:lblAlgn val="ctr"/>
+        <c:lblOffset val="100"/>
+        <c:noMultiLvlLbl val="0"/>
+      </c:catAx>
+      <c:valAx>
+        <c:axId val="-2113994440"/>
+        <c:scaling>
+          <c:max val="100.0"/>
+          <c:min val="90.0"/>
+        </c:scaling>
+        <c:delete val="0"/>
+        <c:axPos val="l"/>
+        <c:majorGridlines/>
+        <c:majorTickMark val="out"/>
+        <c:minorTickMark val="none"/>
+        <c:tickLblPos val="nextTo"/>
+        <c:txPr>
+          <a:bodyPr/>
+          <a:lstStyle/>
+          <a:p>
+            <a:pPr>
+              <a:defRPr sz="1000">
+                <a:latin typeface="Apple SD Gothic Neo"/>
+              </a:defRPr>
+            </a:pPr>
+          </a:p>
+        </c:txPr>
+        <c:crossAx val="-2068027336"/>
+        <c:crosses val="autoZero"/>
+      </c:valAx>
+    </c:plotArea>
+    <c:legend>
+      <c:legendPos val="b"/>
+      <c:overlay val="0"/>
+      <c:txPr>
+        <a:bodyPr/>
+        <a:lstStyle/>
+        <a:p>
+          <a:pPr>
+            <a:defRPr sz="900">
+              <a:latin typeface="Apple SD Gothic Neo"/>
+            </a:defRPr>
+          </a:pPr>
+        </a:p>
+      </c:txPr>
+    </c:legend>
+    <c:dispBlanksAs val="gap"/>
+  </c:chart>
+  <c:txPr>
+    <a:bodyPr/>
+    <a:lstStyle/>
+    <a:p>
+      <a:pPr>
+        <a:defRPr sz="1800"/>
+      </a:pPr>
+      <a:endParaRPr lang="en-US"/>
+    </a:p>
+  </c:txPr>
+  <c:externalData r:id="rId1">
+    <c:autoUpdate val="0"/>
+  </c:externalData>
+</c:chartSpace>
+</file>
+
+<file path=ppt/charts/chart9.xml><?xml version="1.0" encoding="utf-8"?>
+<c:chartSpace xmlns:c="http://schemas.openxmlformats.org/drawingml/2006/chart" xmlns:a="http://schemas.openxmlformats.org/drawingml/2006/main" xmlns:r="http://schemas.openxmlformats.org/officeDocument/2006/relationships">
+  <c:date1904 val="0"/>
+  <c:chart>
+    <c:title>
+      <c:tx>
+        <c:rich>
+          <a:bodyPr/>
+          <a:lstStyle/>
+          <a:p>
+            <a:pPr>
+              <a:defRPr sz="1200" b="1">
+                <a:solidFill>
+                  <a:srgbClr val="142A4A"/>
+                </a:solidFill>
+                <a:latin typeface="Apple SD Gothic Neo"/>
+              </a:defRPr>
+            </a:pPr>
+            <a:r>
+              <a:t>최고난도 수학 (%)</a:t>
+            </a:r>
+          </a:p>
+        </c:rich>
+      </c:tx>
+      <c:layout/>
+      <c:overlay val="0"/>
+    </c:title>
+    <c:autoTitleDeleted val="0"/>
+    <c:plotArea>
+      <c:barChart>
+        <c:barDir val="col"/>
+        <c:grouping val="clustered"/>
         <c:ser>
-          <c:idx val="2"/>
-          <c:order val="2"/>
+          <c:idx val="0"/>
+          <c:order val="0"/>
           <c:tx>
             <c:strRef>
-              <c:f>Sheet1!$D$1</c:f>
+              <c:f>Sheet1!$B$1</c:f>
               <c:strCache>
                 <c:ptCount val="1"/>
                 <c:pt idx="0">
-                  <c:v>FrontierMath (최고난도)</c:v>
+                  <c:v>FrontierMath</c:v>
                 </c:pt>
               </c:strCache>
             </c:strRef>
           </c:tx>
           <c:spPr>
             <a:solidFill>
-              <a:srgbClr val="F27E2E"/>
+              <a:srgbClr val="1F6FB2"/>
             </a:solidFill>
             <a:ln>
               <a:noFill/>
@@ -2016,25 +2333,23 @@
               <c:strCache>
                 <c:ptCount val="4"/>
                 <c:pt idx="0">
-                  <c:v>Claude
-Opus 4.8</c:v>
+                  <c:v>Claude</c:v>
                 </c:pt>
                 <c:pt idx="1">
                   <c:v>GPT-5.5</c:v>
                 </c:pt>
                 <c:pt idx="2">
-                  <c:v>Gemini
-3.1 Pro</c:v>
+                  <c:v>Gemini</c:v>
                 </c:pt>
                 <c:pt idx="3">
-                  <c:v>Grok 4.3</c:v>
+                  <c:v>Grok</c:v>
                 </c:pt>
               </c:strCache>
             </c:strRef>
           </c:cat>
           <c:val>
             <c:numRef>
-              <c:f>Sheet1!$D$2:$D$5</c:f>
+              <c:f>Sheet1!$B$2:$B$5</c:f>
               <c:numCache>
                 <c:formatCode>General</c:formatCode>
                 <c:ptCount val="4"/>
@@ -2072,7 +2387,7 @@
           <a:lstStyle/>
           <a:p>
             <a:pPr>
-              <a:defRPr sz="900">
+              <a:defRPr sz="1000">
                 <a:latin typeface="Apple SD Gothic Neo"/>
               </a:defRPr>
             </a:pPr>
@@ -2088,8 +2403,8 @@
       <c:valAx>
         <c:axId val="-2113994440"/>
         <c:scaling>
-          <c:max val="100.0"/>
-          <c:min val="0.0"/>
+          <c:max val="60.0"/>
+          <c:min val="40.0"/>
         </c:scaling>
         <c:delete val="0"/>
         <c:axPos val="l"/>
@@ -2102,7 +2417,7 @@
           <a:lstStyle/>
           <a:p>
             <a:pPr>
-              <a:defRPr sz="900">
+              <a:defRPr sz="1000">
                 <a:latin typeface="Apple SD Gothic Neo"/>
               </a:defRPr>
             </a:pPr>
@@ -2120,233 +2435,13 @@
         <a:lstStyle/>
         <a:p>
           <a:pPr>
-            <a:defRPr sz="850">
+            <a:defRPr sz="900">
               <a:latin typeface="Apple SD Gothic Neo"/>
             </a:defRPr>
           </a:pPr>
         </a:p>
       </c:txPr>
     </c:legend>
-    <c:dispBlanksAs val="gap"/>
-  </c:chart>
-  <c:txPr>
-    <a:bodyPr/>
-    <a:lstStyle/>
-    <a:p>
-      <a:pPr>
-        <a:defRPr sz="1800"/>
-      </a:pPr>
-      <a:endParaRPr lang="en-US"/>
-    </a:p>
-  </c:txPr>
-  <c:externalData r:id="rId1">
-    <c:autoUpdate val="0"/>
-  </c:externalData>
-</c:chartSpace>
-</file>
-
-<file path=ppt/charts/chart9.xml><?xml version="1.0" encoding="utf-8"?>
-<c:chartSpace xmlns:c="http://schemas.openxmlformats.org/drawingml/2006/chart" xmlns:a="http://schemas.openxmlformats.org/drawingml/2006/main" xmlns:r="http://schemas.openxmlformats.org/officeDocument/2006/relationships">
-  <c:date1904 val="0"/>
-  <c:chart>
-    <c:title>
-      <c:tx>
-        <c:rich>
-          <a:bodyPr/>
-          <a:lstStyle/>
-          <a:p>
-            <a:pPr>
-              <a:defRPr sz="1150" b="1">
-                <a:solidFill>
-                  <a:srgbClr val="142A4A"/>
-                </a:solidFill>
-                <a:latin typeface="Apple SD Gothic Neo"/>
-              </a:defRPr>
-            </a:pPr>
-            <a:r>
-              <a:t>HLE — 검색·계산 도구 사용 가능</a:t>
-            </a:r>
-          </a:p>
-          <a:p>
-            <a:r>
-              <a:t>도구 쓰면 점수 상승</a:t>
-            </a:r>
-          </a:p>
-        </c:rich>
-      </c:tx>
-      <c:layout/>
-      <c:overlay val="0"/>
-    </c:title>
-    <c:autoTitleDeleted val="0"/>
-    <c:plotArea>
-      <c:barChart>
-        <c:barDir val="bar"/>
-        <c:grouping val="clustered"/>
-        <c:ser>
-          <c:idx val="0"/>
-          <c:order val="0"/>
-          <c:tx>
-            <c:strRef>
-              <c:f>Sheet1!$B$1</c:f>
-              <c:strCache>
-                <c:ptCount val="1"/>
-                <c:pt idx="0">
-                  <c:v/>
-                </c:pt>
-              </c:strCache>
-            </c:strRef>
-          </c:tx>
-          <c:dPt>
-            <c:idx val="0"/>
-            <c:spPr>
-              <a:solidFill>
-                <a:srgbClr val="D4774A"/>
-              </a:solidFill>
-              <a:ln>
-                <a:noFill/>
-              </a:ln>
-            </c:spPr>
-          </c:dPt>
-          <c:dPt>
-            <c:idx val="1"/>
-            <c:spPr>
-              <a:solidFill>
-                <a:srgbClr val="10A37A"/>
-              </a:solidFill>
-              <a:ln>
-                <a:noFill/>
-              </a:ln>
-            </c:spPr>
-          </c:dPt>
-          <c:dPt>
-            <c:idx val="2"/>
-            <c:spPr>
-              <a:solidFill>
-                <a:srgbClr val="4285F4"/>
-              </a:solidFill>
-              <a:ln>
-                <a:noFill/>
-              </a:ln>
-            </c:spPr>
-          </c:dPt>
-          <c:cat>
-            <c:strRef>
-              <c:f>Sheet1!$A$2:$A$4</c:f>
-              <c:strCache>
-                <c:ptCount val="3"/>
-                <c:pt idx="0">
-                  <c:v>Claude
-Opus 4.8</c:v>
-                </c:pt>
-                <c:pt idx="1">
-                  <c:v>GPT-5.5</c:v>
-                </c:pt>
-                <c:pt idx="2">
-                  <c:v>Gemini
-3.1 Pro</c:v>
-                </c:pt>
-              </c:strCache>
-            </c:strRef>
-          </c:cat>
-          <c:val>
-            <c:numRef>
-              <c:f>Sheet1!$B$2:$B$4</c:f>
-              <c:numCache>
-                <c:formatCode>General</c:formatCode>
-                <c:ptCount val="3"/>
-                <c:pt idx="0">
-                  <c:v>57.9</c:v>
-                </c:pt>
-                <c:pt idx="1">
-                  <c:v>52.2</c:v>
-                </c:pt>
-                <c:pt idx="2">
-                  <c:v>51.4</c:v>
-                </c:pt>
-              </c:numCache>
-            </c:numRef>
-          </c:val>
-        </c:ser>
-        <c:dLbls>
-          <c:numFmt formatCode="0&quot;%&quot;" sourceLinked="0"/>
-          <c:txPr>
-            <a:bodyPr/>
-            <a:lstStyle/>
-            <a:p>
-              <a:pPr>
-                <a:defRPr sz="900">
-                  <a:latin typeface="Apple SD Gothic Neo"/>
-                </a:defRPr>
-              </a:pPr>
-            </a:p>
-          </c:txPr>
-          <c:dLblPos val="outEnd"/>
-          <c:showLegendKey val="0"/>
-          <c:showVal val="1"/>
-          <c:showCatName val="0"/>
-          <c:showSerName val="0"/>
-          <c:showPercent val="0"/>
-          <c:showBubbleSize val="0"/>
-          <c:showLeaderLines val="1"/>
-        </c:dLbls>
-        <c:axId val="-2068027336"/>
-        <c:axId val="-2113994440"/>
-      </c:barChart>
-      <c:catAx>
-        <c:axId val="-2068027336"/>
-        <c:scaling>
-          <c:orientation val="maxMin"/>
-          <c:max val="100.0"/>
-          <c:min val="0.0"/>
-        </c:scaling>
-        <c:delete val="0"/>
-        <c:axPos val="l"/>
-        <c:majorGridlines/>
-        <c:majorTickMark val="out"/>
-        <c:minorTickMark val="none"/>
-        <c:tickLblPos val="nextTo"/>
-        <c:txPr>
-          <a:bodyPr/>
-          <a:lstStyle/>
-          <a:p>
-            <a:pPr>
-              <a:defRPr sz="900">
-                <a:latin typeface="Apple SD Gothic Neo"/>
-              </a:defRPr>
-            </a:pPr>
-          </a:p>
-        </c:txPr>
-        <c:crossAx val="-2113994440"/>
-        <c:crosses val="autoZero"/>
-        <c:auto val="1"/>
-        <c:lblAlgn val="ctr"/>
-        <c:lblOffset val="100"/>
-        <c:noMultiLvlLbl val="0"/>
-      </c:catAx>
-      <c:valAx>
-        <c:axId val="-2113994440"/>
-        <c:scaling/>
-        <c:delete val="0"/>
-        <c:axPos val="b"/>
-        <c:majorGridlines/>
-        <c:majorTickMark val="out"/>
-        <c:minorTickMark val="none"/>
-        <c:tickLblPos val="nextTo"/>
-        <c:txPr>
-          <a:bodyPr/>
-          <a:lstStyle/>
-          <a:p>
-            <a:pPr>
-              <a:defRPr sz="900">
-                <a:latin typeface="Apple SD Gothic Neo"/>
-              </a:defRPr>
-            </a:pPr>
-          </a:p>
-        </c:txPr>
-        <c:crossAx val="-2068027336"/>
-        <c:crosses val="autoZero"/>
-      </c:valAx>
-    </c:plotArea>
     <c:dispBlanksAs val="gap"/>
   </c:chart>
   <c:txPr>
@@ -5551,6 +5646,48 @@
         </p:nvSpPr>
         <p:spPr>
           <a:xfrm>
+            <a:off x="457200" y="6327648"/>
+            <a:ext cx="10515600" cy="201168"/>
+          </a:xfrm>
+          <a:prstGeom prst="rect">
+            <a:avLst/>
+          </a:prstGeom>
+          <a:noFill/>
+        </p:spPr>
+        <p:txBody>
+          <a:bodyPr wrap="square" anchor="t" lIns="25400" rIns="25400" tIns="25400" bIns="25400">
+            <a:spAutoFit/>
+          </a:bodyPr>
+          <a:lstStyle/>
+          <a:p>
+            <a:pPr algn="l">
+              <a:lnSpc>
+                <a:spcPct val="100000"/>
+              </a:lnSpc>
+              <a:spcAft>
+                <a:spcPts val="400"/>
+              </a:spcAft>
+            </a:pPr>
+            <a:r>
+              <a:rPr sz="850" b="0">
+                <a:solidFill>
+                  <a:srgbClr val="8A929E"/>
+                </a:solidFill>
+                <a:latin typeface="Apple SD Gothic Neo"/>
+              </a:rPr>
+              <a:t>출처: Anthropic · OpenAI · Google · xAI 공식 Model Card + Vellum · Artificial Analysis 독립검증</a:t>
+            </a:r>
+          </a:p>
+        </p:txBody>
+      </p:sp>
+      <p:sp>
+        <p:nvSpPr>
+          <p:cNvPr id="7" name="TextBox 6"/>
+          <p:cNvSpPr txBox="1"/>
+          <p:nvPr/>
+        </p:nvSpPr>
+        <p:spPr>
+          <a:xfrm>
             <a:off x="11338560" y="6492240"/>
             <a:ext cx="731520" cy="274320"/>
           </a:xfrm>
@@ -6202,7 +6339,7 @@
               </a:spcAft>
             </a:pPr>
             <a:r>
-              <a:rPr sz="950" b="0">
+              <a:rPr sz="1000" b="0">
                 <a:solidFill>
                   <a:srgbClr val="444A55"/>
                 </a:solidFill>
@@ -6221,7 +6358,7 @@
         </p:nvSpPr>
         <p:spPr>
           <a:xfrm>
-            <a:off x="1783080" y="2487168"/>
+            <a:off x="1828800" y="2487168"/>
             <a:ext cx="146304" cy="146304"/>
           </a:xfrm>
           <a:prstGeom prst="rect">
@@ -6265,7 +6402,7 @@
         </p:nvSpPr>
         <p:spPr>
           <a:xfrm>
-            <a:off x="1984248" y="2474468"/>
+            <a:off x="2029968" y="2474468"/>
             <a:ext cx="1097280" cy="182880"/>
           </a:xfrm>
           <a:prstGeom prst="rect">
@@ -6288,7 +6425,7 @@
               </a:spcAft>
             </a:pPr>
             <a:r>
-              <a:rPr sz="950" b="0">
+              <a:rPr sz="1000" b="0">
                 <a:solidFill>
                   <a:srgbClr val="444A55"/>
                 </a:solidFill>
@@ -6307,7 +6444,7 @@
         </p:nvSpPr>
         <p:spPr>
           <a:xfrm>
-            <a:off x="3108960" y="2487168"/>
+            <a:off x="3200400" y="2487168"/>
             <a:ext cx="146304" cy="146304"/>
           </a:xfrm>
           <a:prstGeom prst="rect">
@@ -6351,7 +6488,7 @@
         </p:nvSpPr>
         <p:spPr>
           <a:xfrm>
-            <a:off x="3310128" y="2474468"/>
+            <a:off x="3401568" y="2474468"/>
             <a:ext cx="1097280" cy="182880"/>
           </a:xfrm>
           <a:prstGeom prst="rect">
@@ -6374,7 +6511,7 @@
               </a:spcAft>
             </a:pPr>
             <a:r>
-              <a:rPr sz="950" b="0">
+              <a:rPr sz="1000" b="0">
                 <a:solidFill>
                   <a:srgbClr val="444A55"/>
                 </a:solidFill>
@@ -6393,7 +6530,7 @@
         </p:nvSpPr>
         <p:spPr>
           <a:xfrm>
-            <a:off x="4434840" y="2487168"/>
+            <a:off x="4572000" y="2487168"/>
             <a:ext cx="146304" cy="146304"/>
           </a:xfrm>
           <a:prstGeom prst="rect">
@@ -6437,7 +6574,7 @@
         </p:nvSpPr>
         <p:spPr>
           <a:xfrm>
-            <a:off x="4636008" y="2474468"/>
+            <a:off x="4773168" y="2474468"/>
             <a:ext cx="1097280" cy="182880"/>
           </a:xfrm>
           <a:prstGeom prst="rect">
@@ -6460,7 +6597,7 @@
               </a:spcAft>
             </a:pPr>
             <a:r>
-              <a:rPr sz="950" b="0">
+              <a:rPr sz="1000" b="0">
                 <a:solidFill>
                   <a:srgbClr val="444A55"/>
                 </a:solidFill>
@@ -6540,7 +6677,7 @@
         <p:spPr>
           <a:xfrm>
             <a:off x="457200" y="5650992"/>
-            <a:ext cx="11292840" cy="804672"/>
+            <a:ext cx="11292840" cy="594360"/>
           </a:xfrm>
           <a:prstGeom prst="roundRect">
             <a:avLst/>
@@ -6584,7 +6721,7 @@
         <p:spPr>
           <a:xfrm>
             <a:off x="640080" y="5650992"/>
-            <a:ext cx="10927080" cy="804672"/>
+            <a:ext cx="10927080" cy="594360"/>
           </a:xfrm>
           <a:prstGeom prst="rect">
             <a:avLst/>
@@ -6634,30 +6771,53 @@
               <a:t>코딩 = 코드·명령어 잘 다루는지  |  추론 = 머리 쓰는 문제·수학·과학 잘 푸는지</a:t>
             </a:r>
           </a:p>
+        </p:txBody>
+      </p:sp>
+      <p:sp>
+        <p:nvSpPr>
+          <p:cNvPr id="25" name="TextBox 24"/>
+          <p:cNvSpPr txBox="1"/>
+          <p:nvPr/>
+        </p:nvSpPr>
+        <p:spPr>
+          <a:xfrm>
+            <a:off x="457200" y="6327648"/>
+            <a:ext cx="10515600" cy="201168"/>
+          </a:xfrm>
+          <a:prstGeom prst="rect">
+            <a:avLst/>
+          </a:prstGeom>
+          <a:noFill/>
+        </p:spPr>
+        <p:txBody>
+          <a:bodyPr wrap="square" anchor="t" lIns="25400" rIns="25400" tIns="25400" bIns="25400">
+            <a:spAutoFit/>
+          </a:bodyPr>
+          <a:lstStyle/>
           <a:p>
             <a:pPr algn="l">
               <a:lnSpc>
-                <a:spcPct val="115000"/>
+                <a:spcPct val="100000"/>
               </a:lnSpc>
               <a:spcAft>
-                <a:spcPts val="200"/>
+                <a:spcPts val="400"/>
               </a:spcAft>
             </a:pPr>
             <a:r>
-              <a:rPr sz="1100" b="0">
-                <a:solidFill>
-                  <a:srgbClr val="FFFFFF"/>
+              <a:rPr sz="850" b="0">
+                <a:solidFill>
+                  <a:srgbClr val="8A929E"/>
                 </a:solidFill>
                 <a:latin typeface="Apple SD Gothic Neo"/>
               </a:rPr>
-              <a:t>한 AI가 모든 시험 1등은 아님 → 우리 팀 업무에 맞는 시험 점수를 보면 됨</a:t>
-            </a:r>
-          </a:p>
-        </p:txBody>
-      </p:sp>
-      <p:sp>
-        <p:nvSpPr>
-          <p:cNvPr id="25" name="TextBox 24"/>
+              <a:t>출처: 각 사 공식 System Card 평균치 산출</a:t>
+            </a:r>
+          </a:p>
+        </p:txBody>
+      </p:sp>
+      <p:sp>
+        <p:nvSpPr>
+          <p:cNvPr id="26" name="TextBox 25"/>
           <p:cNvSpPr txBox="1"/>
           <p:nvPr/>
         </p:nvSpPr>
@@ -7001,7 +7161,7 @@
         <p:spPr>
           <a:xfrm>
             <a:off x="457200" y="5074920"/>
-            <a:ext cx="11292840" cy="960120"/>
+            <a:ext cx="11292840" cy="914400"/>
           </a:xfrm>
           <a:prstGeom prst="roundRect">
             <a:avLst/>
@@ -7045,7 +7205,7 @@
         <p:spPr>
           <a:xfrm>
             <a:off x="640080" y="5074920"/>
-            <a:ext cx="10927080" cy="960120"/>
+            <a:ext cx="10927080" cy="914400"/>
           </a:xfrm>
           <a:prstGeom prst="rect">
             <a:avLst/>
@@ -7111,7 +7271,7 @@
                 </a:solidFill>
                 <a:latin typeface="Apple SD Gothic Neo"/>
               </a:rPr>
-              <a:t>GPT·Gemini도 50% 넘음 = 쓸 만한 수준  |  실무 코드 수정은 Claude가 가장 유리</a:t>
+              <a:t>GPT·Gemini도 50% 넘음 = 쓸 만한 수준</a:t>
             </a:r>
           </a:p>
         </p:txBody>
@@ -7119,6 +7279,48 @@
       <p:sp>
         <p:nvSpPr>
           <p:cNvPr id="11" name="TextBox 10"/>
+          <p:cNvSpPr txBox="1"/>
+          <p:nvPr/>
+        </p:nvSpPr>
+        <p:spPr>
+          <a:xfrm>
+            <a:off x="457200" y="6327648"/>
+            <a:ext cx="10515600" cy="201168"/>
+          </a:xfrm>
+          <a:prstGeom prst="rect">
+            <a:avLst/>
+          </a:prstGeom>
+          <a:noFill/>
+        </p:spPr>
+        <p:txBody>
+          <a:bodyPr wrap="square" anchor="t" lIns="25400" rIns="25400" tIns="25400" bIns="25400">
+            <a:spAutoFit/>
+          </a:bodyPr>
+          <a:lstStyle/>
+          <a:p>
+            <a:pPr algn="l">
+              <a:lnSpc>
+                <a:spcPct val="100000"/>
+              </a:lnSpc>
+              <a:spcAft>
+                <a:spcPts val="400"/>
+              </a:spcAft>
+            </a:pPr>
+            <a:r>
+              <a:rPr sz="850" b="0">
+                <a:solidFill>
+                  <a:srgbClr val="8A929E"/>
+                </a:solidFill>
+                <a:latin typeface="Apple SD Gothic Neo"/>
+              </a:rPr>
+              <a:t>출처: Anthropic System Card (2026.5) · OpenAI · Google 공식 발표</a:t>
+            </a:r>
+          </a:p>
+        </p:txBody>
+      </p:sp>
+      <p:sp>
+        <p:nvSpPr>
+          <p:cNvPr id="12" name="TextBox 11"/>
           <p:cNvSpPr txBox="1"/>
           <p:nvPr/>
         </p:nvSpPr>
@@ -7462,7 +7664,7 @@
         <p:spPr>
           <a:xfrm>
             <a:off x="457200" y="5074920"/>
-            <a:ext cx="11292840" cy="960120"/>
+            <a:ext cx="11292840" cy="914400"/>
           </a:xfrm>
           <a:prstGeom prst="roundRect">
             <a:avLst/>
@@ -7506,7 +7708,7 @@
         <p:spPr>
           <a:xfrm>
             <a:off x="640080" y="5074920"/>
-            <a:ext cx="10927080" cy="960120"/>
+            <a:ext cx="10927080" cy="914400"/>
           </a:xfrm>
           <a:prstGeom prst="rect">
             <a:avLst/>
@@ -7572,7 +7774,7 @@
                 </a:solidFill>
                 <a:latin typeface="Apple SD Gothic Neo"/>
               </a:rPr>
-              <a:t>PC 화면 직접 조작 → Claude 1위 (83.4%)  |  HW팀: 터미널·자동화는 GPT, GUI 작업은 Claude</a:t>
+              <a:t>PC 화면 직접 조작 → Claude 1위 (83.4%)</a:t>
             </a:r>
           </a:p>
         </p:txBody>
@@ -7580,6 +7782,48 @@
       <p:sp>
         <p:nvSpPr>
           <p:cNvPr id="11" name="TextBox 10"/>
+          <p:cNvSpPr txBox="1"/>
+          <p:nvPr/>
+        </p:nvSpPr>
+        <p:spPr>
+          <a:xfrm>
+            <a:off x="457200" y="6327648"/>
+            <a:ext cx="10515600" cy="201168"/>
+          </a:xfrm>
+          <a:prstGeom prst="rect">
+            <a:avLst/>
+          </a:prstGeom>
+          <a:noFill/>
+        </p:spPr>
+        <p:txBody>
+          <a:bodyPr wrap="square" anchor="t" lIns="25400" rIns="25400" tIns="25400" bIns="25400">
+            <a:spAutoFit/>
+          </a:bodyPr>
+          <a:lstStyle/>
+          <a:p>
+            <a:pPr algn="l">
+              <a:lnSpc>
+                <a:spcPct val="100000"/>
+              </a:lnSpc>
+              <a:spcAft>
+                <a:spcPts val="400"/>
+              </a:spcAft>
+            </a:pPr>
+            <a:r>
+              <a:rPr sz="850" b="0">
+                <a:solidFill>
+                  <a:srgbClr val="8A929E"/>
+                </a:solidFill>
+                <a:latin typeface="Apple SD Gothic Neo"/>
+              </a:rPr>
+              <a:t>출처: Anthropic System Card · HundredTabs 벤치마크 비교 (2026.5)</a:t>
+            </a:r>
+          </a:p>
+        </p:txBody>
+      </p:sp>
+      <p:sp>
+        <p:nvSpPr>
+          <p:cNvPr id="12" name="TextBox 11"/>
           <p:cNvSpPr txBox="1"/>
           <p:nvPr/>
         </p:nvSpPr>
@@ -7923,7 +8167,7 @@
         <p:spPr>
           <a:xfrm>
             <a:off x="457200" y="5074920"/>
-            <a:ext cx="11292840" cy="960120"/>
+            <a:ext cx="11292840" cy="914400"/>
           </a:xfrm>
           <a:prstGeom prst="roundRect">
             <a:avLst/>
@@ -7967,7 +8211,7 @@
         <p:spPr>
           <a:xfrm>
             <a:off x="640080" y="5074920"/>
-            <a:ext cx="10927080" cy="960120"/>
+            <a:ext cx="10927080" cy="914400"/>
           </a:xfrm>
           <a:prstGeom prst="rect">
             <a:avLst/>
@@ -8014,7 +8258,7 @@
                 </a:solidFill>
                 <a:latin typeface="Apple SD Gothic Neo"/>
               </a:rPr>
-              <a:t>과학 퀴즈(GPQA)는 4종 모두 88~94% — 격차 작음 (거의 비슷)</a:t>
+              <a:t>과학 퀴즈(GPQA)는 4종 모두 88~94% — 격차 작음</a:t>
             </a:r>
           </a:p>
           <a:p>
@@ -8033,7 +8277,7 @@
                 </a:solidFill>
                 <a:latin typeface="Apple SD Gothic Neo"/>
               </a:rPr>
-              <a:t>진짜 어려운 생각(HLE)에서는 Claude·Grok 상위 — '막히는 문제'는 Claude가 유리</a:t>
+              <a:t>진짜 어려운 생각(HLE)에서는 Claude·Grok 상위</a:t>
             </a:r>
           </a:p>
         </p:txBody>
@@ -8041,6 +8285,48 @@
       <p:sp>
         <p:nvSpPr>
           <p:cNvPr id="11" name="TextBox 10"/>
+          <p:cNvSpPr txBox="1"/>
+          <p:nvPr/>
+        </p:nvSpPr>
+        <p:spPr>
+          <a:xfrm>
+            <a:off x="457200" y="6327648"/>
+            <a:ext cx="10515600" cy="201168"/>
+          </a:xfrm>
+          <a:prstGeom prst="rect">
+            <a:avLst/>
+          </a:prstGeom>
+          <a:noFill/>
+        </p:spPr>
+        <p:txBody>
+          <a:bodyPr wrap="square" anchor="t" lIns="25400" rIns="25400" tIns="25400" bIns="25400">
+            <a:spAutoFit/>
+          </a:bodyPr>
+          <a:lstStyle/>
+          <a:p>
+            <a:pPr algn="l">
+              <a:lnSpc>
+                <a:spcPct val="100000"/>
+              </a:lnSpc>
+              <a:spcAft>
+                <a:spcPts val="400"/>
+              </a:spcAft>
+            </a:pPr>
+            <a:r>
+              <a:rPr sz="850" b="0">
+                <a:solidFill>
+                  <a:srgbClr val="8A929E"/>
+                </a:solidFill>
+                <a:latin typeface="Apple SD Gothic Neo"/>
+              </a:rPr>
+              <a:t>출처: Anthropic System Card · Vellum 벤치마크 해설 (2026.5)</a:t>
+            </a:r>
+          </a:p>
+        </p:txBody>
+      </p:sp>
+      <p:sp>
+        <p:nvSpPr>
+          <p:cNvPr id="12" name="TextBox 11"/>
           <p:cNvSpPr txBox="1"/>
           <p:nvPr/>
         </p:nvSpPr>
@@ -8315,7 +8601,7 @@
                 </a:solidFill>
                 <a:latin typeface="Apple SD Gothic Neo"/>
               </a:rPr>
-              <a:t>MATH-500 = 중·고등~대학 초급 수학  |  AIME = 올림피아드급  |  FrontierMath = 연구자도 어려운 최고난도</a:t>
+              <a:t>MATH-500 = 중·고등~대학 초급 수학  |  AIME = 올림피아드급  |  FrontierMath = 최고난도</a:t>
             </a:r>
           </a:p>
           <a:p>
@@ -8334,7 +8620,7 @@
                 </a:solidFill>
                 <a:latin typeface="Apple SD Gothic Neo"/>
               </a:rPr>
-              <a:t>쉬운 수학은 GPT·Gemini·Grok도 94%↑  |  어려울수록 점수 차이가 커짐</a:t>
+              <a:t>쉬운 수학은 모두 94%↑  |  어려울수록 점수 차이가 커짐</a:t>
             </a:r>
           </a:p>
         </p:txBody>
@@ -8348,8 +8634,8 @@
           <p:nvPr/>
         </p:nvGraphicFramePr>
         <p:xfrm>
-          <a:off x="457200" y="1627632"/>
-          <a:ext cx="11247120" cy="3337560"/>
+          <a:off x="411480" y="1627632"/>
+          <a:ext cx="5440680" cy="1965960"/>
         </p:xfrm>
         <a:graphic>
           <a:graphicData uri="http://schemas.openxmlformats.org/drawingml/2006/chart">
@@ -8357,16 +8643,34 @@
           </a:graphicData>
         </a:graphic>
       </p:graphicFrame>
-      <p:sp>
-        <p:nvSpPr>
-          <p:cNvPr id="8" name="Rounded Rectangle 7"/>
+      <p:graphicFrame>
+        <p:nvGraphicFramePr>
+          <p:cNvPr id="8" name="Chart 7"/>
+          <p:cNvGraphicFramePr>
+            <a:graphicFrameLocks noGrp="1"/>
+          </p:cNvGraphicFramePr>
+          <p:nvPr/>
+        </p:nvGraphicFramePr>
+        <p:xfrm>
+          <a:off x="6263640" y="1627632"/>
+          <a:ext cx="5440680" cy="1965960"/>
+        </p:xfrm>
+        <a:graphic>
+          <a:graphicData uri="http://schemas.openxmlformats.org/drawingml/2006/chart">
+            <c:chart xmlns:c="http://schemas.openxmlformats.org/drawingml/2006/chart" r:id="rId3"/>
+          </a:graphicData>
+        </a:graphic>
+      </p:graphicFrame>
+      <p:sp>
+        <p:nvSpPr>
+          <p:cNvPr id="9" name="Rounded Rectangle 8"/>
           <p:cNvSpPr/>
           <p:nvPr/>
         </p:nvSpPr>
         <p:spPr>
           <a:xfrm>
-            <a:off x="457200" y="5074920"/>
-            <a:ext cx="11292840" cy="960120"/>
+            <a:off x="457200" y="3886200"/>
+            <a:ext cx="11292840" cy="914400"/>
           </a:xfrm>
           <a:prstGeom prst="roundRect">
             <a:avLst/>
@@ -8403,14 +8707,14 @@
       </p:sp>
       <p:sp>
         <p:nvSpPr>
-          <p:cNvPr id="9" name="TextBox 8"/>
+          <p:cNvPr id="10" name="TextBox 9"/>
           <p:cNvSpPr txBox="1"/>
           <p:nvPr/>
         </p:nvSpPr>
         <p:spPr>
           <a:xfrm>
-            <a:off x="640080" y="5074920"/>
-            <a:ext cx="10927080" cy="960120"/>
+            <a:off x="640080" y="3886200"/>
+            <a:ext cx="10927080" cy="914400"/>
           </a:xfrm>
           <a:prstGeom prst="rect">
             <a:avLst/>
@@ -8457,7 +8761,7 @@
                 </a:solidFill>
                 <a:latin typeface="Apple SD Gothic Neo"/>
               </a:rPr>
-              <a:t>일반·올림피아드 수학 → GPT·Grok·Gemini 앞섬 (95~97%)</a:t>
+              <a:t>일반·올림피아드 수학 → GPT 97% 1위 (Claude·Gemini·Grok도 95% 이상)</a:t>
             </a:r>
           </a:p>
           <a:p>
@@ -8476,14 +8780,56 @@
                 </a:solidFill>
                 <a:latin typeface="Apple SD Gothic Neo"/>
               </a:rPr>
-              <a:t>최고난도 수학(FrontierMath) → Grok 54% 1위  |  HW팀: 계산·수식 많은 업무는 GPT, 초난도는 Grok도 검토</a:t>
-            </a:r>
-          </a:p>
-        </p:txBody>
-      </p:sp>
-      <p:sp>
-        <p:nvSpPr>
-          <p:cNvPr id="10" name="TextBox 9"/>
+              <a:t>최고난도 수학(FrontierMath) → Grok 54% 1위</a:t>
+            </a:r>
+          </a:p>
+        </p:txBody>
+      </p:sp>
+      <p:sp>
+        <p:nvSpPr>
+          <p:cNvPr id="11" name="TextBox 10"/>
+          <p:cNvSpPr txBox="1"/>
+          <p:nvPr/>
+        </p:nvSpPr>
+        <p:spPr>
+          <a:xfrm>
+            <a:off x="457200" y="6327648"/>
+            <a:ext cx="10515600" cy="201168"/>
+          </a:xfrm>
+          <a:prstGeom prst="rect">
+            <a:avLst/>
+          </a:prstGeom>
+          <a:noFill/>
+        </p:spPr>
+        <p:txBody>
+          <a:bodyPr wrap="square" anchor="t" lIns="25400" rIns="25400" tIns="25400" bIns="25400">
+            <a:spAutoFit/>
+          </a:bodyPr>
+          <a:lstStyle/>
+          <a:p>
+            <a:pPr algn="l">
+              <a:lnSpc>
+                <a:spcPct val="100000"/>
+              </a:lnSpc>
+              <a:spcAft>
+                <a:spcPts val="400"/>
+              </a:spcAft>
+            </a:pPr>
+            <a:r>
+              <a:rPr sz="850" b="0">
+                <a:solidFill>
+                  <a:srgbClr val="8A929E"/>
+                </a:solidFill>
+                <a:latin typeface="Apple SD Gothic Neo"/>
+              </a:rPr>
+              <a:t>출처: AI Magic · Vellum 벤치마크 비교 (2026.5) · FrontierMath 공식</a:t>
+            </a:r>
+          </a:p>
+        </p:txBody>
+      </p:sp>
+      <p:sp>
+        <p:nvSpPr>
+          <p:cNvPr id="12" name="TextBox 11"/>
           <p:cNvSpPr txBox="1"/>
           <p:nvPr/>
         </p:nvSpPr>
@@ -8716,7 +9062,7 @@
                 </a:solidFill>
                 <a:latin typeface="Apple SD Gothic Neo"/>
               </a:rPr>
-              <a:t>추론 ③ — 도구 쓰면 더 잘 푸는지 · 종합 정리</a:t>
+              <a:t>추론 ③ — 도구 사용 시 · 종합 정리</a:t>
             </a:r>
           </a:p>
         </p:txBody>
@@ -8816,14 +9162,13 @@
               </a:spcAft>
             </a:pPr>
             <a:r>
-              <a:rPr sz="1050" b="1">
+              <a:rPr sz="1000" b="1">
                 <a:solidFill>
                   <a:srgbClr val="142A4A"/>
                 </a:solidFill>
                 <a:latin typeface="Apple SD Gothic Neo"/>
               </a:rPr>
-              <a:t>코딩
-버그 수정</a:t>
+              <a:t>코딩 버그 수정</a:t>
             </a:r>
           </a:p>
           <a:p>
@@ -8855,7 +9200,7 @@
               </a:spcAft>
             </a:pPr>
             <a:r>
-              <a:rPr sz="950" b="0">
+              <a:rPr sz="900" b="0">
                 <a:solidFill>
                   <a:srgbClr val="444A55"/>
                 </a:solidFill>
@@ -8943,14 +9288,13 @@
               </a:spcAft>
             </a:pPr>
             <a:r>
-              <a:rPr sz="1050" b="1">
+              <a:rPr sz="1000" b="1">
                 <a:solidFill>
                   <a:srgbClr val="142A4A"/>
                 </a:solidFill>
                 <a:latin typeface="Apple SD Gothic Neo"/>
               </a:rPr>
-              <a:t>터미널
-명령어</a:t>
+              <a:t>터미널 명령어</a:t>
             </a:r>
           </a:p>
           <a:p>
@@ -8982,7 +9326,7 @@
               </a:spcAft>
             </a:pPr>
             <a:r>
-              <a:rPr sz="950" b="0">
+              <a:rPr sz="900" b="0">
                 <a:solidFill>
                   <a:srgbClr val="444A55"/>
                 </a:solidFill>
@@ -9070,14 +9414,13 @@
               </a:spcAft>
             </a:pPr>
             <a:r>
-              <a:rPr sz="1050" b="1">
+              <a:rPr sz="1000" b="1">
                 <a:solidFill>
                   <a:srgbClr val="142A4A"/>
                 </a:solidFill>
                 <a:latin typeface="Apple SD Gothic Neo"/>
               </a:rPr>
-              <a:t>PC
-직접 조작</a:t>
+              <a:t>PC 직접 조작</a:t>
             </a:r>
           </a:p>
           <a:p>
@@ -9109,7 +9452,7 @@
               </a:spcAft>
             </a:pPr>
             <a:r>
-              <a:rPr sz="950" b="0">
+              <a:rPr sz="900" b="0">
                 <a:solidFill>
                   <a:srgbClr val="444A55"/>
                 </a:solidFill>
@@ -9197,14 +9540,13 @@
               </a:spcAft>
             </a:pPr>
             <a:r>
-              <a:rPr sz="1050" b="1">
+              <a:rPr sz="1000" b="1">
                 <a:solidFill>
                   <a:srgbClr val="142A4A"/>
                 </a:solidFill>
                 <a:latin typeface="Apple SD Gothic Neo"/>
               </a:rPr>
-              <a:t>어려운
-생각</a:t>
+              <a:t>어려운 생각</a:t>
             </a:r>
           </a:p>
           <a:p>
@@ -9236,7 +9578,7 @@
               </a:spcAft>
             </a:pPr>
             <a:r>
-              <a:rPr sz="950" b="0">
+              <a:rPr sz="900" b="0">
                 <a:solidFill>
                   <a:srgbClr val="444A55"/>
                 </a:solidFill>
@@ -9324,14 +9666,13 @@
               </a:spcAft>
             </a:pPr>
             <a:r>
-              <a:rPr sz="1050" b="1">
+              <a:rPr sz="1000" b="1">
                 <a:solidFill>
                   <a:srgbClr val="142A4A"/>
                 </a:solidFill>
                 <a:latin typeface="Apple SD Gothic Neo"/>
               </a:rPr>
-              <a:t>과학
-퀴즈</a:t>
+              <a:t>과학 퀴즈</a:t>
             </a:r>
           </a:p>
           <a:p>
@@ -9363,7 +9704,7 @@
               </a:spcAft>
             </a:pPr>
             <a:r>
-              <a:rPr sz="950" b="0">
+              <a:rPr sz="900" b="0">
                 <a:solidFill>
                   <a:srgbClr val="444A55"/>
                 </a:solidFill>
@@ -9451,14 +9792,13 @@
               </a:spcAft>
             </a:pPr>
             <a:r>
-              <a:rPr sz="1050" b="1">
+              <a:rPr sz="1000" b="1">
                 <a:solidFill>
                   <a:srgbClr val="142A4A"/>
                 </a:solidFill>
                 <a:latin typeface="Apple SD Gothic Neo"/>
               </a:rPr>
-              <a:t>최고난도
-수학</a:t>
+              <a:t>최고난도 수학</a:t>
             </a:r>
           </a:p>
           <a:p>
@@ -9490,7 +9830,7 @@
               </a:spcAft>
             </a:pPr>
             <a:r>
-              <a:rPr sz="950" b="0">
+              <a:rPr sz="900" b="0">
                 <a:solidFill>
                   <a:srgbClr val="444A55"/>
                 </a:solidFill>
@@ -9509,8 +9849,8 @@
         </p:nvSpPr>
         <p:spPr>
           <a:xfrm>
-            <a:off x="457200" y="5230368"/>
-            <a:ext cx="11292840" cy="868680"/>
+            <a:off x="457200" y="5212080"/>
+            <a:ext cx="11292840" cy="777240"/>
           </a:xfrm>
           <a:prstGeom prst="roundRect">
             <a:avLst/>
@@ -9553,8 +9893,8 @@
         </p:nvSpPr>
         <p:spPr>
           <a:xfrm>
-            <a:off x="640080" y="5230368"/>
-            <a:ext cx="10927080" cy="868680"/>
+            <a:off x="640080" y="5212080"/>
+            <a:ext cx="10927080" cy="777240"/>
           </a:xfrm>
           <a:prstGeom prst="rect">
             <a:avLst/>
@@ -9601,33 +9941,56 @@
                 </a:solidFill>
                 <a:latin typeface="Apple SD Gothic Neo"/>
               </a:rPr>
-              <a:t>코딩·복잡한 생각 → Claude  |  터미널·수학 → GPT  |  과학 → Gemini  |  초난도 수학·저비용 → Grok</a:t>
-            </a:r>
-          </a:p>
+              <a:t>코딩·복잡한 생각 → Claude  |  터미널·수학 → GPT  |  과학 → Gemini  |  초난도 수학 → Grok</a:t>
+            </a:r>
+          </a:p>
+        </p:txBody>
+      </p:sp>
+      <p:sp>
+        <p:nvSpPr>
+          <p:cNvPr id="21" name="TextBox 20"/>
+          <p:cNvSpPr txBox="1"/>
+          <p:nvPr/>
+        </p:nvSpPr>
+        <p:spPr>
+          <a:xfrm>
+            <a:off x="457200" y="6327648"/>
+            <a:ext cx="10515600" cy="201168"/>
+          </a:xfrm>
+          <a:prstGeom prst="rect">
+            <a:avLst/>
+          </a:prstGeom>
+          <a:noFill/>
+        </p:spPr>
+        <p:txBody>
+          <a:bodyPr wrap="square" anchor="t" lIns="25400" rIns="25400" tIns="25400" bIns="25400">
+            <a:spAutoFit/>
+          </a:bodyPr>
+          <a:lstStyle/>
           <a:p>
             <a:pPr algn="l">
               <a:lnSpc>
-                <a:spcPct val="115000"/>
+                <a:spcPct val="100000"/>
               </a:lnSpc>
               <a:spcAft>
-                <a:spcPts val="200"/>
+                <a:spcPts val="400"/>
               </a:spcAft>
             </a:pPr>
             <a:r>
-              <a:rPr sz="1100" b="0">
-                <a:solidFill>
-                  <a:srgbClr val="FFFFFF"/>
+              <a:rPr sz="850" b="0">
+                <a:solidFill>
+                  <a:srgbClr val="8A929E"/>
                 </a:solidFill>
                 <a:latin typeface="Apple SD Gothic Neo"/>
               </a:rPr>
-              <a:t>시험마다 1등이 다름 → '우리 팀이 자주 하는 일'과 같은 시험 점수를 보면 선택이 쉬움</a:t>
-            </a:r>
-          </a:p>
-        </p:txBody>
-      </p:sp>
-      <p:sp>
-        <p:nvSpPr>
-          <p:cNvPr id="21" name="TextBox 20"/>
+              <a:t>출처: Anthropic System Card · Vellum · AI Magic (2026.5)</a:t>
+            </a:r>
+          </a:p>
+        </p:txBody>
+      </p:sp>
+      <p:sp>
+        <p:nvSpPr>
+          <p:cNvPr id="22" name="TextBox 21"/>
           <p:cNvSpPr txBox="1"/>
           <p:nvPr/>
         </p:nvSpPr>
@@ -9873,8 +10236,8 @@
         </p:nvSpPr>
         <p:spPr>
           <a:xfrm>
-            <a:off x="594360" y="1417320"/>
-            <a:ext cx="10972800" cy="4114800"/>
+            <a:off x="594360" y="1325880"/>
+            <a:ext cx="10972800" cy="4389120"/>
           </a:xfrm>
           <a:prstGeom prst="rect">
             <a:avLst/>
@@ -9889,7 +10252,7 @@
           <a:p>
             <a:pPr algn="l">
               <a:lnSpc>
-                <a:spcPct val="130000"/>
+                <a:spcPct val="125000"/>
               </a:lnSpc>
               <a:spcAft>
                 <a:spcPts val="400"/>
@@ -9902,13 +10265,13 @@
                 </a:solidFill>
                 <a:latin typeface="Apple SD Gothic Neo"/>
               </a:rPr>
-              <a:t>공식 자료 (각 AI 회사가 직접 공개한 시험 점수)</a:t>
+              <a:t>1차 — 공식 자료 (각 AI 회사가 직접 공개)</a:t>
             </a:r>
           </a:p>
           <a:p>
             <a:pPr algn="l">
               <a:lnSpc>
-                <a:spcPct val="130000"/>
+                <a:spcPct val="125000"/>
               </a:lnSpc>
               <a:spcAft>
                 <a:spcPts val="400"/>
@@ -9921,127 +10284,127 @@
                 </a:solidFill>
                 <a:latin typeface="Apple SD Gothic Neo"/>
               </a:rPr>
-              <a:t>Anthropic Claude Opus 4.8 System Card  ·  OpenAI GPT-5.5  ·  Google Gemini 3.1 Pro  ·  xAI Grok 4.3</a:t>
+              <a:t>• Anthropic Claude Opus 4.8 System Card (2026.5.28)</a:t>
             </a:r>
           </a:p>
           <a:p>
             <a:pPr algn="l">
               <a:lnSpc>
-                <a:spcPct val="130000"/>
+                <a:spcPct val="125000"/>
               </a:lnSpc>
               <a:spcAft>
                 <a:spcPts val="400"/>
               </a:spcAft>
             </a:pPr>
             <a:r>
-              <a:rPr sz="800" b="0">
+              <a:rPr sz="1150" b="0">
                 <a:solidFill>
                   <a:srgbClr val="444A55"/>
                 </a:solidFill>
                 <a:latin typeface="Apple SD Gothic Neo"/>
               </a:rPr>
-              <a:t/>
+              <a:t>• OpenAI GPT-5.5 System Card  ·  Google Gemini 3.1 Pro Model Card  ·  xAI Grok 4.3 Model Card</a:t>
             </a:r>
           </a:p>
           <a:p>
             <a:pPr algn="l">
               <a:lnSpc>
-                <a:spcPct val="130000"/>
+                <a:spcPct val="125000"/>
               </a:lnSpc>
               <a:spcAft>
                 <a:spcPts val="400"/>
               </a:spcAft>
             </a:pPr>
             <a:r>
-              <a:rPr sz="1400" b="1">
-                <a:solidFill>
-                  <a:srgbClr val="142A4A"/>
+              <a:rPr sz="800" b="0">
+                <a:solidFill>
+                  <a:srgbClr val="444A55"/>
                 </a:solidFill>
                 <a:latin typeface="Apple SD Gothic Neo"/>
               </a:rPr>
-              <a:t>독립 검증 (회사 말만 믿지 않고 다른 기관이 모아둔 자료)</a:t>
+              <a:t/>
             </a:r>
           </a:p>
           <a:p>
             <a:pPr algn="l">
               <a:lnSpc>
-                <a:spcPct val="130000"/>
+                <a:spcPct val="125000"/>
               </a:lnSpc>
               <a:spcAft>
                 <a:spcPts val="400"/>
               </a:spcAft>
             </a:pPr>
             <a:r>
-              <a:rPr sz="1150" b="0">
-                <a:solidFill>
-                  <a:srgbClr val="444A55"/>
+              <a:rPr sz="1400" b="1">
+                <a:solidFill>
+                  <a:srgbClr val="142A4A"/>
                 </a:solidFill>
                 <a:latin typeface="Apple SD Gothic Neo"/>
               </a:rPr>
-              <a:t>Artificial Analysis  ·  Vellum  ·  Weights &amp; Biases ml-news</a:t>
+              <a:t>2차 — 독립 검증 (회사 말만 믿지 않고 다른 기관이 확인)</a:t>
             </a:r>
           </a:p>
           <a:p>
             <a:pPr algn="l">
               <a:lnSpc>
-                <a:spcPct val="130000"/>
+                <a:spcPct val="125000"/>
               </a:lnSpc>
               <a:spcAft>
                 <a:spcPts val="400"/>
               </a:spcAft>
             </a:pPr>
             <a:r>
-              <a:rPr sz="800" b="0">
+              <a:rPr sz="1150" b="0">
                 <a:solidFill>
                   <a:srgbClr val="444A55"/>
                 </a:solidFill>
                 <a:latin typeface="Apple SD Gothic Neo"/>
               </a:rPr>
-              <a:t/>
+              <a:t>• Artificial Analysis Intelligence Index  ·  Vellum 벤치마크 해설  ·  HundredTabs  ·  AI Magic</a:t>
             </a:r>
           </a:p>
           <a:p>
             <a:pPr algn="l">
               <a:lnSpc>
-                <a:spcPct val="130000"/>
+                <a:spcPct val="125000"/>
               </a:lnSpc>
               <a:spcAft>
                 <a:spcPts val="400"/>
               </a:spcAft>
             </a:pPr>
             <a:r>
-              <a:rPr sz="1400" b="1">
-                <a:solidFill>
-                  <a:srgbClr val="F27E2E"/>
+              <a:rPr sz="800" b="0">
+                <a:solidFill>
+                  <a:srgbClr val="444A55"/>
                 </a:solidFill>
                 <a:latin typeface="Apple SD Gothic Neo"/>
               </a:rPr>
-              <a:t>꼭 기억할 점</a:t>
+              <a:t/>
             </a:r>
           </a:p>
           <a:p>
             <a:pPr algn="l">
               <a:lnSpc>
-                <a:spcPct val="130000"/>
+                <a:spcPct val="125000"/>
               </a:lnSpc>
               <a:spcAft>
                 <a:spcPts val="400"/>
               </a:spcAft>
             </a:pPr>
             <a:r>
-              <a:rPr sz="1150" b="0">
-                <a:solidFill>
-                  <a:srgbClr val="444A55"/>
+              <a:rPr sz="1400" b="1">
+                <a:solidFill>
+                  <a:srgbClr val="F27E2E"/>
                 </a:solidFill>
                 <a:latin typeface="Apple SD Gothic Neo"/>
               </a:rPr>
-              <a:t>① 같은 시험이어도 측정 방법이 다르면 점수가 달라질 수 있음</a:t>
+              <a:t>꼭 기억할 점</a:t>
             </a:r>
           </a:p>
           <a:p>
             <a:pPr algn="l">
               <a:lnSpc>
-                <a:spcPct val="130000"/>
+                <a:spcPct val="125000"/>
               </a:lnSpc>
               <a:spcAft>
                 <a:spcPts val="400"/>
@@ -10054,13 +10417,32 @@
                 </a:solidFill>
                 <a:latin typeface="Apple SD Gothic Neo"/>
               </a:rPr>
-              <a:t>② * 표시는 공식 미공개라 근사치 — 보고 시 '약' 또는 '추정'으로 말하면 됨</a:t>
+              <a:t>① 같은 시험이어도 측정 방법이 다르면 점수가 달라질 수 있음</a:t>
             </a:r>
           </a:p>
           <a:p>
             <a:pPr algn="l">
               <a:lnSpc>
-                <a:spcPct val="130000"/>
+                <a:spcPct val="125000"/>
+              </a:lnSpc>
+              <a:spcAft>
+                <a:spcPts val="400"/>
+              </a:spcAft>
+            </a:pPr>
+            <a:r>
+              <a:rPr sz="1150" b="0">
+                <a:solidFill>
+                  <a:srgbClr val="444A55"/>
+                </a:solidFill>
+                <a:latin typeface="Apple SD Gothic Neo"/>
+              </a:rPr>
+              <a:t>② * 표시는 공식 미공개라 근사치 — 보고 시 '약' 또는 '추정'으로 말하기</a:t>
+            </a:r>
+          </a:p>
+          <a:p>
+            <a:pPr algn="l">
+              <a:lnSpc>
+                <a:spcPct val="125000"/>
               </a:lnSpc>
               <a:spcAft>
                 <a:spcPts val="400"/>
